--- a/Lightning Talk Marina.pptx
+++ b/Lightning Talk Marina.pptx
@@ -3,13 +3,15 @@
 <p:presentation xmlns:a="http://schemas.openxmlformats.org/drawingml/2006/main" xmlns:p="http://schemas.openxmlformats.org/presentationml/2006/main" xmlns:r="http://schemas.openxmlformats.org/officeDocument/2006/relationships" xmlns:p14="http://schemas.microsoft.com/office/powerpoint/2010/main" xmlns:p15="http://schemas.microsoft.com/office/powerpoint/2012/main" xmlns:mc="http://schemas.openxmlformats.org/markup-compatibility/2006">
   <p:sldMasterIdLst>
     <p:sldMasterId id="2147483648" r:id="rId2"/>
+    <p:sldMasterId id="2147483650" r:id="rId3"/>
   </p:sldMasterIdLst>
   <p:notesMasterIdLst>
-    <p:notesMasterId r:id="rId3"/>
+    <p:notesMasterId r:id="rId4"/>
   </p:notesMasterIdLst>
   <p:sldIdLst>
-    <p:sldId id="256" r:id="rId4"/>
-    <p:sldId id="257" r:id="rId5"/>
+    <p:sldId id="256" r:id="rId5"/>
+    <p:sldId id="257" r:id="rId6"/>
+    <p:sldId id="258" r:id="rId7"/>
   </p:sldIdLst>
   <p:sldSz cx="12192000" cy="6858000"/>
   <p:notesSz cx="6858000" cy="12192000"/>
@@ -35,7 +37,7 @@
       </p:grpSpPr>
       <p:sp>
         <p:nvSpPr>
-          <p:cNvPr id="4" name="PlaceHolder 1"/>
+          <p:cNvPr id="6" name="PlaceHolder 1"/>
           <p:cNvSpPr>
             <a:spLocks noGrp="1"/>
           </p:cNvSpPr>
@@ -61,27 +63,28 @@
             <a:noAutofit/>
           </a:bodyPr>
           <a:p>
-            <a:r>
-              <a:rPr b="0" lang="de-AT" sz="1800" spc="-1" strike="noStrike">
-                <a:solidFill>
-                  <a:schemeClr val="dk1"/>
+            <a:pPr algn="ctr"/>
+            <a:r>
+              <a:rPr b="0" lang="de-AT" sz="4400" spc="-1" strike="noStrike">
+                <a:solidFill>
+                  <a:srgbClr val="000000"/>
                 </a:solidFill>
                 <a:latin typeface="Arial"/>
               </a:rPr>
               <a:t>Folie mittels Klicken verschieben</a:t>
             </a:r>
-            <a:endParaRPr b="0" lang="de-AT" sz="1800" spc="-1" strike="noStrike">
-              <a:solidFill>
-                <a:schemeClr val="dk1"/>
-              </a:solidFill>
-              <a:latin typeface="Arial"/>
-            </a:endParaRPr>
-          </a:p>
-        </p:txBody>
-      </p:sp>
-      <p:sp>
-        <p:nvSpPr>
-          <p:cNvPr id="5" name="PlaceHolder 2"/>
+            <a:endParaRPr b="0" lang="de-AT" sz="4400" spc="-1" strike="noStrike">
+              <a:solidFill>
+                <a:srgbClr val="000000"/>
+              </a:solidFill>
+              <a:latin typeface="Arial"/>
+            </a:endParaRPr>
+          </a:p>
+        </p:txBody>
+      </p:sp>
+      <p:sp>
+        <p:nvSpPr>
+          <p:cNvPr id="7" name="PlaceHolder 2"/>
           <p:cNvSpPr>
             <a:spLocks noGrp="1"/>
           </p:cNvSpPr>
@@ -130,7 +133,7 @@
       </p:sp>
       <p:sp>
         <p:nvSpPr>
-          <p:cNvPr id="6" name="PlaceHolder 3"/>
+          <p:cNvPr id="8" name="PlaceHolder 3"/>
           <p:cNvSpPr>
             <a:spLocks noGrp="1"/>
           </p:cNvSpPr>
@@ -179,7 +182,7 @@
       </p:sp>
       <p:sp>
         <p:nvSpPr>
-          <p:cNvPr id="7" name="PlaceHolder 4"/>
+          <p:cNvPr id="9" name="PlaceHolder 4"/>
           <p:cNvSpPr>
             <a:spLocks noGrp="1"/>
           </p:cNvSpPr>
@@ -239,7 +242,7 @@
       </p:sp>
       <p:sp>
         <p:nvSpPr>
-          <p:cNvPr id="8" name="PlaceHolder 5"/>
+          <p:cNvPr id="10" name="PlaceHolder 5"/>
           <p:cNvSpPr>
             <a:spLocks noGrp="1"/>
           </p:cNvSpPr>
@@ -299,7 +302,7 @@
       </p:sp>
       <p:sp>
         <p:nvSpPr>
-          <p:cNvPr id="9" name="PlaceHolder 6"/>
+          <p:cNvPr id="11" name="PlaceHolder 6"/>
           <p:cNvSpPr>
             <a:spLocks noGrp="1"/>
           </p:cNvSpPr>
@@ -339,7 +342,7 @@
             <a:pPr indent="0" algn="r">
               <a:buNone/>
             </a:pPr>
-            <a:fld id="{1465AAB1-2761-4F70-ADEE-9A37B7D1BE86}" type="slidenum">
+            <a:fld id="{D9A33B5D-5C01-485E-8BAD-0EBB3E41D5A2}" type="slidenum">
               <a:rPr b="0" lang="de-AT" sz="1400" spc="-1" strike="noStrike">
                 <a:solidFill>
                   <a:srgbClr val="000000"/>
@@ -382,7 +385,7 @@
       </p:grpSpPr>
       <p:sp>
         <p:nvSpPr>
-          <p:cNvPr id="42" name="PlaceHolder 1"/>
+          <p:cNvPr id="79" name="PlaceHolder 1"/>
           <p:cNvSpPr>
             <a:spLocks noGrp="1"/>
           </p:cNvSpPr>
@@ -393,7 +396,7 @@
         <p:spPr>
           <a:xfrm>
             <a:off x="685800" y="1143000"/>
-            <a:ext cx="5486040" cy="3085920"/>
+            <a:ext cx="5484960" cy="3084840"/>
           </a:xfrm>
           <a:prstGeom prst="rect">
             <a:avLst/>
@@ -405,7 +408,7 @@
       </p:sp>
       <p:sp>
         <p:nvSpPr>
-          <p:cNvPr id="43" name="PlaceHolder 2"/>
+          <p:cNvPr id="80" name="PlaceHolder 2"/>
           <p:cNvSpPr>
             <a:spLocks noGrp="1"/>
           </p:cNvSpPr>
@@ -416,7 +419,7 @@
         <p:spPr>
           <a:xfrm>
             <a:off x="685800" y="4400640"/>
-            <a:ext cx="5486040" cy="3600000"/>
+            <a:ext cx="5484960" cy="3598920"/>
           </a:xfrm>
           <a:prstGeom prst="rect">
             <a:avLst/>
@@ -431,9 +434,24 @@
             <a:noAutofit/>
           </a:bodyPr>
           <a:p>
-            <a:pPr marL="216000" indent="-216000">
+            <a:pPr marL="216000" indent="0">
+              <a:lnSpc>
+                <a:spcPct val="100000"/>
+              </a:lnSpc>
               <a:buNone/>
-            </a:pPr>
+              <a:tabLst>
+                <a:tab algn="l" pos="0"/>
+              </a:tabLst>
+            </a:pPr>
+            <a:r>
+              <a:rPr b="0" lang="de-AT" sz="1800" spc="-1" strike="noStrike">
+                <a:solidFill>
+                  <a:srgbClr val="000000"/>
+                </a:solidFill>
+                <a:latin typeface="Arial"/>
+              </a:rPr>
+              <a:t>Problem: ChatGPT can make learning tasks easier, but easier does not always mean deeper.</a:t>
+            </a:r>
             <a:endParaRPr b="0" lang="de-AT" sz="1800" spc="-1" strike="noStrike">
               <a:solidFill>
                 <a:srgbClr val="000000"/>
@@ -441,11 +459,141 @@
               <a:latin typeface="Arial"/>
             </a:endParaRPr>
           </a:p>
-        </p:txBody>
-      </p:sp>
-      <p:sp>
-        <p:nvSpPr>
-          <p:cNvPr id="44" name="PlaceHolder 3"/>
+          <a:p>
+            <a:pPr marL="216000" indent="0">
+              <a:lnSpc>
+                <a:spcPct val="100000"/>
+              </a:lnSpc>
+              <a:buNone/>
+              <a:tabLst>
+                <a:tab algn="l" pos="0"/>
+              </a:tabLst>
+            </a:pPr>
+            <a:r>
+              <a:rPr b="0" lang="de-AT" sz="1800" spc="-1" strike="noStrike">
+                <a:solidFill>
+                  <a:srgbClr val="000000"/>
+                </a:solidFill>
+                <a:latin typeface="Arial"/>
+              </a:rPr>
+              <a:t>Technology use: Students used either Google search or ChatGPT-3.5 for a 20-minute scientific inquiry task.</a:t>
+            </a:r>
+            <a:endParaRPr b="0" lang="de-AT" sz="1800" spc="-1" strike="noStrike">
+              <a:solidFill>
+                <a:srgbClr val="000000"/>
+              </a:solidFill>
+              <a:latin typeface="Arial"/>
+            </a:endParaRPr>
+          </a:p>
+          <a:p>
+            <a:pPr marL="216000" indent="0">
+              <a:lnSpc>
+                <a:spcPct val="100000"/>
+              </a:lnSpc>
+              <a:buNone/>
+              <a:tabLst>
+                <a:tab algn="l" pos="0"/>
+              </a:tabLst>
+            </a:pPr>
+            <a:r>
+              <a:rPr b="0" lang="de-AT" sz="1800" spc="-1" strike="noStrike">
+                <a:solidFill>
+                  <a:srgbClr val="000000"/>
+                </a:solidFill>
+                <a:latin typeface="Arial"/>
+              </a:rPr>
+              <a:t>Main result: ChatGPT reduced cognitive load, but the reasoning quality of the final justification was weaker.</a:t>
+            </a:r>
+            <a:endParaRPr b="0" lang="de-AT" sz="1800" spc="-1" strike="noStrike">
+              <a:solidFill>
+                <a:srgbClr val="000000"/>
+              </a:solidFill>
+              <a:latin typeface="Arial"/>
+            </a:endParaRPr>
+          </a:p>
+          <a:p>
+            <a:pPr marL="216000" indent="0">
+              <a:lnSpc>
+                <a:spcPct val="100000"/>
+              </a:lnSpc>
+              <a:buNone/>
+              <a:tabLst>
+                <a:tab algn="l" pos="0"/>
+              </a:tabLst>
+            </a:pPr>
+            <a:r>
+              <a:rPr b="0" lang="de-AT" sz="2000" spc="-1" strike="noStrike">
+                <a:solidFill>
+                  <a:srgbClr val="000000"/>
+                </a:solidFill>
+                <a:latin typeface="Arial"/>
+              </a:rPr>
+              <a:t>Critical point: The study has limits, but it makes </a:t>
+            </a:r>
+            <a:r>
+              <a:rPr b="0" lang="de-AT" sz="1800" spc="-1" strike="noStrike">
+                <a:solidFill>
+                  <a:srgbClr val="000000"/>
+                </a:solidFill>
+                <a:latin typeface="Arial"/>
+              </a:rPr>
+              <a:t>the AI-in-education debate concrete and measurable.</a:t>
+            </a:r>
+            <a:endParaRPr b="0" lang="de-AT" sz="1800" spc="-1" strike="noStrike">
+              <a:solidFill>
+                <a:srgbClr val="000000"/>
+              </a:solidFill>
+              <a:latin typeface="Arial"/>
+            </a:endParaRPr>
+          </a:p>
+          <a:p>
+            <a:pPr marL="216000" indent="0">
+              <a:lnSpc>
+                <a:spcPct val="100000"/>
+              </a:lnSpc>
+              <a:buNone/>
+              <a:tabLst>
+                <a:tab algn="l" pos="0"/>
+              </a:tabLst>
+            </a:pPr>
+            <a:r>
+              <a:rPr b="0" lang="de-AT" sz="1800" spc="-1" strike="noStrike">
+                <a:solidFill>
+                  <a:srgbClr val="000000"/>
+                </a:solidFill>
+                <a:latin typeface="Arial"/>
+              </a:rPr>
+              <a:t>Two independent raters coded the written justifications</a:t>
+            </a:r>
+            <a:endParaRPr b="0" lang="de-AT" sz="1800" spc="-1" strike="noStrike">
+              <a:solidFill>
+                <a:srgbClr val="000000"/>
+              </a:solidFill>
+              <a:latin typeface="Arial"/>
+            </a:endParaRPr>
+          </a:p>
+          <a:p>
+            <a:pPr marL="216000" indent="0" defTabSz="914400">
+              <a:lnSpc>
+                <a:spcPct val="100000"/>
+              </a:lnSpc>
+              <a:buNone/>
+              <a:tabLst>
+                <a:tab algn="l" pos="0"/>
+              </a:tabLst>
+            </a:pPr>
+            <a:endParaRPr b="0" lang="de-AT" sz="1020" spc="-1" strike="noStrike">
+              <a:solidFill>
+                <a:srgbClr val="000000"/>
+              </a:solidFill>
+              <a:latin typeface="Arial"/>
+            </a:endParaRPr>
+          </a:p>
+        </p:txBody>
+      </p:sp>
+      <p:sp>
+        <p:nvSpPr>
+          <p:cNvPr id="81" name="PlaceHolder 3"/>
           <p:cNvSpPr>
             <a:spLocks noGrp="1"/>
           </p:cNvSpPr>
@@ -456,7 +604,7 @@
         <p:spPr>
           <a:xfrm>
             <a:off x="3884760" y="8685360"/>
-            <a:ext cx="2971440" cy="458280"/>
+            <a:ext cx="2970360" cy="457200"/>
           </a:xfrm>
           <a:prstGeom prst="rect">
             <a:avLst/>
@@ -476,6 +624,9 @@
                 <a:spcPct val="100000"/>
               </a:lnSpc>
               <a:buNone/>
+              <a:tabLst>
+                <a:tab algn="l" pos="0"/>
+              </a:tabLst>
               <a:defRPr b="0" lang="en-US" sz="1200" spc="-1" strike="noStrike">
                 <a:solidFill>
                   <a:schemeClr val="dk1"/>
@@ -491,8 +642,426 @@
                 <a:spcPct val="100000"/>
               </a:lnSpc>
               <a:buNone/>
-            </a:pPr>
-            <a:fld id="{ECFF6FB8-0213-4D4D-B22E-792596A3D443}" type="slidenum">
+              <a:tabLst>
+                <a:tab algn="l" pos="0"/>
+              </a:tabLst>
+            </a:pPr>
+            <a:fld id="{D57C9EC1-784B-4FAE-A90C-3152BFEAEC74}" type="slidenum">
+              <a:rPr b="0" lang="en-US" sz="1200" spc="-1" strike="noStrike">
+                <a:solidFill>
+                  <a:schemeClr val="dk1"/>
+                </a:solidFill>
+                <a:latin typeface="+mn-lt"/>
+                <a:ea typeface="+mn-ea"/>
+              </a:rPr>
+              <a:t>3</a:t>
+            </a:fld>
+            <a:endParaRPr b="0" lang="de-AT" sz="1200" spc="-1" strike="noStrike">
+              <a:solidFill>
+                <a:srgbClr val="000000"/>
+              </a:solidFill>
+              <a:latin typeface="Times New Roman"/>
+            </a:endParaRPr>
+          </a:p>
+        </p:txBody>
+      </p:sp>
+    </p:spTree>
+  </p:cSld>
+</p:notes>
+</file>
+
+<file path=ppt/notesSlides/notesSlide2.xml><?xml version="1.0" encoding="utf-8"?>
+<p:notes xmlns:a="http://schemas.openxmlformats.org/drawingml/2006/main" xmlns:p="http://schemas.openxmlformats.org/presentationml/2006/main" xmlns:r="http://schemas.openxmlformats.org/officeDocument/2006/relationships" xmlns:p14="http://schemas.microsoft.com/office/powerpoint/2010/main" xmlns:p15="http://schemas.microsoft.com/office/powerpoint/2012/main" xmlns:mc="http://schemas.openxmlformats.org/markup-compatibility/2006">
+  <p:cSld>
+    <p:spTree>
+      <p:nvGrpSpPr>
+        <p:cNvPr id="1" name=""/>
+        <p:cNvGrpSpPr/>
+        <p:nvPr/>
+      </p:nvGrpSpPr>
+      <p:grpSpPr>
+        <a:xfrm>
+          <a:off x="0" y="0"/>
+          <a:ext cx="0" cy="0"/>
+          <a:chOff x="0" y="0"/>
+          <a:chExt cx="0" cy="0"/>
+        </a:xfrm>
+      </p:grpSpPr>
+      <p:sp>
+        <p:nvSpPr>
+          <p:cNvPr id="82" name="PlaceHolder 1"/>
+          <p:cNvSpPr>
+            <a:spLocks noGrp="1"/>
+          </p:cNvSpPr>
+          <p:nvPr>
+            <p:ph type="sldImg"/>
+          </p:nvPr>
+        </p:nvSpPr>
+        <p:spPr>
+          <a:xfrm>
+            <a:off x="216000" y="812520"/>
+            <a:ext cx="7126920" cy="4008600"/>
+          </a:xfrm>
+          <a:prstGeom prst="rect">
+            <a:avLst/>
+          </a:prstGeom>
+          <a:ln w="0">
+            <a:noFill/>
+          </a:ln>
+        </p:spPr>
+      </p:sp>
+      <p:sp>
+        <p:nvSpPr>
+          <p:cNvPr id="83" name="PlaceHolder 2"/>
+          <p:cNvSpPr>
+            <a:spLocks noGrp="1"/>
+          </p:cNvSpPr>
+          <p:nvPr>
+            <p:ph type="body"/>
+          </p:nvPr>
+        </p:nvSpPr>
+        <p:spPr>
+          <a:xfrm>
+            <a:off x="756000" y="5078520"/>
+            <a:ext cx="6047280" cy="4810680"/>
+          </a:xfrm>
+          <a:prstGeom prst="rect">
+            <a:avLst/>
+          </a:prstGeom>
+          <a:noFill/>
+          <a:ln w="0">
+            <a:noFill/>
+          </a:ln>
+        </p:spPr>
+        <p:txBody>
+          <a:bodyPr lIns="0" rIns="0" tIns="0" bIns="0" anchor="t">
+            <a:noAutofit/>
+          </a:bodyPr>
+          <a:p>
+            <a:pPr marL="216000" indent="-216000">
+              <a:lnSpc>
+                <a:spcPct val="100000"/>
+              </a:lnSpc>
+              <a:buNone/>
+              <a:tabLst>
+                <a:tab algn="l" pos="0"/>
+              </a:tabLst>
+            </a:pPr>
+            <a:r>
+              <a:rPr b="0" lang="de-AT" sz="2000" spc="-1" strike="noStrike">
+                <a:solidFill>
+                  <a:srgbClr val="000000"/>
+                </a:solidFill>
+                <a:latin typeface="Arial"/>
+              </a:rPr>
+              <a:t>Reducing useless load can help</a:t>
+            </a:r>
+            <a:endParaRPr b="0" lang="de-AT" sz="2000" spc="-1" strike="noStrike">
+              <a:solidFill>
+                <a:srgbClr val="000000"/>
+              </a:solidFill>
+              <a:latin typeface="Arial"/>
+            </a:endParaRPr>
+          </a:p>
+          <a:p>
+            <a:pPr marL="216000" indent="-216000">
+              <a:lnSpc>
+                <a:spcPct val="100000"/>
+              </a:lnSpc>
+              <a:buNone/>
+              <a:tabLst>
+                <a:tab algn="l" pos="0"/>
+              </a:tabLst>
+            </a:pPr>
+            <a:r>
+              <a:rPr b="0" lang="de-AT" sz="2000" spc="-1" strike="noStrike">
+                <a:solidFill>
+                  <a:srgbClr val="000000"/>
+                </a:solidFill>
+                <a:latin typeface="Arial"/>
+              </a:rPr>
+              <a:t>Reducing productive effort can hurt</a:t>
+            </a:r>
+            <a:endParaRPr b="0" lang="de-AT" sz="2000" spc="-1" strike="noStrike">
+              <a:solidFill>
+                <a:srgbClr val="000000"/>
+              </a:solidFill>
+              <a:latin typeface="Arial"/>
+            </a:endParaRPr>
+          </a:p>
+          <a:p>
+            <a:pPr marL="216000" indent="-216000">
+              <a:lnSpc>
+                <a:spcPct val="100000"/>
+              </a:lnSpc>
+              <a:buNone/>
+              <a:tabLst>
+                <a:tab algn="l" pos="0"/>
+              </a:tabLst>
+            </a:pPr>
+            <a:r>
+              <a:rPr b="0" lang="de-AT" sz="2000" spc="-1" strike="noStrike">
+                <a:solidFill>
+                  <a:srgbClr val="000000"/>
+                </a:solidFill>
+                <a:latin typeface="Arial"/>
+              </a:rPr>
+              <a:t>AI should support, not replace thinking</a:t>
+            </a:r>
+            <a:endParaRPr b="0" lang="de-AT" sz="2000" spc="-1" strike="noStrike">
+              <a:solidFill>
+                <a:srgbClr val="000000"/>
+              </a:solidFill>
+              <a:latin typeface="Arial"/>
+            </a:endParaRPr>
+          </a:p>
+          <a:p>
+            <a:pPr marL="216000" indent="-216000">
+              <a:lnSpc>
+                <a:spcPct val="100000"/>
+              </a:lnSpc>
+              <a:buNone/>
+              <a:tabLst>
+                <a:tab algn="l" pos="0"/>
+              </a:tabLst>
+            </a:pPr>
+            <a:r>
+              <a:rPr b="0" lang="de-AT" sz="2000" spc="-1" strike="noStrike">
+                <a:solidFill>
+                  <a:srgbClr val="000000"/>
+                </a:solidFill>
+                <a:latin typeface="Arial"/>
+              </a:rPr>
+              <a:t>ICL: Load caused by content difficulty → “This task was very complex.”</a:t>
+            </a:r>
+            <a:endParaRPr b="0" lang="de-AT" sz="2000" spc="-1" strike="noStrike">
+              <a:solidFill>
+                <a:srgbClr val="000000"/>
+              </a:solidFill>
+              <a:latin typeface="Arial"/>
+            </a:endParaRPr>
+          </a:p>
+          <a:p>
+            <a:pPr marL="216000" indent="-216000">
+              <a:lnSpc>
+                <a:spcPct val="100000"/>
+              </a:lnSpc>
+              <a:buNone/>
+              <a:tabLst>
+                <a:tab algn="l" pos="0"/>
+              </a:tabLst>
+            </a:pPr>
+            <a:r>
+              <a:rPr b="0" lang="de-AT" sz="2000" spc="-1" strike="noStrike">
+                <a:solidFill>
+                  <a:srgbClr val="000000"/>
+                </a:solidFill>
+                <a:latin typeface="Arial"/>
+              </a:rPr>
+              <a:t>ECL: Unnecessary extra load → How information is found or presented</a:t>
+            </a:r>
+            <a:endParaRPr b="0" lang="de-AT" sz="2000" spc="-1" strike="noStrike">
+              <a:solidFill>
+                <a:srgbClr val="000000"/>
+              </a:solidFill>
+              <a:latin typeface="Arial"/>
+            </a:endParaRPr>
+          </a:p>
+          <a:p>
+            <a:pPr marL="216000" indent="-216000">
+              <a:lnSpc>
+                <a:spcPct val="100000"/>
+              </a:lnSpc>
+              <a:buNone/>
+              <a:tabLst>
+                <a:tab algn="l" pos="0"/>
+              </a:tabLst>
+            </a:pPr>
+            <a:r>
+              <a:rPr b="0" lang="de-AT" sz="2000" spc="-1" strike="noStrike">
+                <a:solidFill>
+                  <a:srgbClr val="000000"/>
+                </a:solidFill>
+                <a:latin typeface="Arial"/>
+              </a:rPr>
+              <a:t>GCL: Effort for understanding and connecting → Related to deeper processing </a:t>
+            </a:r>
+            <a:endParaRPr b="0" lang="de-AT" sz="2000" spc="-1" strike="noStrike">
+              <a:solidFill>
+                <a:srgbClr val="000000"/>
+              </a:solidFill>
+              <a:latin typeface="Arial"/>
+            </a:endParaRPr>
+          </a:p>
+          <a:p>
+            <a:pPr marL="216000" indent="-216000">
+              <a:lnSpc>
+                <a:spcPct val="100000"/>
+              </a:lnSpc>
+              <a:buNone/>
+              <a:tabLst>
+                <a:tab algn="l" pos="0"/>
+              </a:tabLst>
+            </a:pPr>
+            <a:r>
+              <a:rPr b="0" lang="de-AT" sz="2000" spc="-1" strike="noStrike">
+                <a:solidFill>
+                  <a:srgbClr val="000000"/>
+                </a:solidFill>
+                <a:latin typeface="Arial"/>
+              </a:rPr>
+              <a:t>All loads are lower in the ChatGPT group</a:t>
+            </a:r>
+            <a:endParaRPr b="0" lang="de-AT" sz="2000" spc="-1" strike="noStrike">
+              <a:solidFill>
+                <a:srgbClr val="000000"/>
+              </a:solidFill>
+              <a:latin typeface="Arial"/>
+            </a:endParaRPr>
+          </a:p>
+        </p:txBody>
+      </p:sp>
+    </p:spTree>
+  </p:cSld>
+</p:notes>
+</file>
+
+<file path=ppt/notesSlides/notesSlide3.xml><?xml version="1.0" encoding="utf-8"?>
+<p:notes xmlns:a="http://schemas.openxmlformats.org/drawingml/2006/main" xmlns:p="http://schemas.openxmlformats.org/presentationml/2006/main" xmlns:r="http://schemas.openxmlformats.org/officeDocument/2006/relationships" xmlns:p14="http://schemas.microsoft.com/office/powerpoint/2010/main" xmlns:p15="http://schemas.microsoft.com/office/powerpoint/2012/main" xmlns:mc="http://schemas.openxmlformats.org/markup-compatibility/2006">
+  <p:cSld>
+    <p:spTree>
+      <p:nvGrpSpPr>
+        <p:cNvPr id="1" name=""/>
+        <p:cNvGrpSpPr/>
+        <p:nvPr/>
+      </p:nvGrpSpPr>
+      <p:grpSpPr>
+        <a:xfrm>
+          <a:off x="0" y="0"/>
+          <a:ext cx="0" cy="0"/>
+          <a:chOff x="0" y="0"/>
+          <a:chExt cx="0" cy="0"/>
+        </a:xfrm>
+      </p:grpSpPr>
+      <p:sp>
+        <p:nvSpPr>
+          <p:cNvPr id="84" name="PlaceHolder 1"/>
+          <p:cNvSpPr>
+            <a:spLocks noGrp="1"/>
+          </p:cNvSpPr>
+          <p:nvPr>
+            <p:ph type="sldImg"/>
+          </p:nvPr>
+        </p:nvSpPr>
+        <p:spPr>
+          <a:xfrm>
+            <a:off x="685800" y="1143000"/>
+            <a:ext cx="5485320" cy="3085200"/>
+          </a:xfrm>
+          <a:prstGeom prst="rect">
+            <a:avLst/>
+          </a:prstGeom>
+          <a:ln w="0">
+            <a:noFill/>
+          </a:ln>
+        </p:spPr>
+      </p:sp>
+      <p:sp>
+        <p:nvSpPr>
+          <p:cNvPr id="85" name="PlaceHolder 2"/>
+          <p:cNvSpPr>
+            <a:spLocks noGrp="1"/>
+          </p:cNvSpPr>
+          <p:nvPr>
+            <p:ph type="body"/>
+          </p:nvPr>
+        </p:nvSpPr>
+        <p:spPr>
+          <a:xfrm>
+            <a:off x="685800" y="4400640"/>
+            <a:ext cx="5485320" cy="3599280"/>
+          </a:xfrm>
+          <a:prstGeom prst="rect">
+            <a:avLst/>
+          </a:prstGeom>
+          <a:noFill/>
+          <a:ln w="0">
+            <a:noFill/>
+          </a:ln>
+        </p:spPr>
+        <p:txBody>
+          <a:bodyPr lIns="91440" rIns="91440" tIns="45720" bIns="45720" anchor="t">
+            <a:noAutofit/>
+          </a:bodyPr>
+          <a:p>
+            <a:pPr marL="216000" indent="-216000">
+              <a:buNone/>
+            </a:pPr>
+            <a:endParaRPr b="0" lang="de-AT" sz="1800" spc="-1" strike="noStrike">
+              <a:solidFill>
+                <a:srgbClr val="000000"/>
+              </a:solidFill>
+              <a:latin typeface="Arial"/>
+            </a:endParaRPr>
+          </a:p>
+        </p:txBody>
+      </p:sp>
+      <p:sp>
+        <p:nvSpPr>
+          <p:cNvPr id="86" name="PlaceHolder 3"/>
+          <p:cNvSpPr>
+            <a:spLocks noGrp="1"/>
+          </p:cNvSpPr>
+          <p:nvPr>
+            <p:ph type="sldNum" idx="5"/>
+          </p:nvPr>
+        </p:nvSpPr>
+        <p:spPr>
+          <a:xfrm>
+            <a:off x="3884760" y="8685360"/>
+            <a:ext cx="2970720" cy="457560"/>
+          </a:xfrm>
+          <a:prstGeom prst="rect">
+            <a:avLst/>
+          </a:prstGeom>
+          <a:noFill/>
+          <a:ln w="0">
+            <a:noFill/>
+          </a:ln>
+        </p:spPr>
+        <p:txBody>
+          <a:bodyPr lIns="91440" rIns="91440" tIns="45720" bIns="45720" anchor="b">
+            <a:noAutofit/>
+          </a:bodyPr>
+          <a:lstStyle>
+            <a:lvl1pPr indent="0" algn="r" defTabSz="914400">
+              <a:lnSpc>
+                <a:spcPct val="100000"/>
+              </a:lnSpc>
+              <a:buNone/>
+              <a:tabLst>
+                <a:tab algn="l" pos="0"/>
+              </a:tabLst>
+              <a:defRPr b="0" lang="en-US" sz="1200" spc="-1" strike="noStrike">
+                <a:solidFill>
+                  <a:schemeClr val="dk1"/>
+                </a:solidFill>
+                <a:latin typeface="+mn-lt"/>
+                <a:ea typeface="+mn-ea"/>
+              </a:defRPr>
+            </a:lvl1pPr>
+          </a:lstStyle>
+          <a:p>
+            <a:pPr indent="0" algn="r" defTabSz="914400">
+              <a:lnSpc>
+                <a:spcPct val="100000"/>
+              </a:lnSpc>
+              <a:buNone/>
+              <a:tabLst>
+                <a:tab algn="l" pos="0"/>
+              </a:tabLst>
+            </a:pPr>
+            <a:fld id="{6CFB9625-5161-4C61-B53B-5612B7AE3DA2}" type="slidenum">
               <a:rPr b="0" lang="en-US" sz="1200" spc="-1" strike="noStrike">
                 <a:solidFill>
                   <a:schemeClr val="dk1"/>
@@ -540,7 +1109,7 @@
 
 <file path=ppt/slideLayouts/slideLayout2.xml><?xml version="1.0" encoding="utf-8"?>
 <p:sldLayout xmlns:a="http://schemas.openxmlformats.org/drawingml/2006/main" xmlns:p="http://schemas.openxmlformats.org/presentationml/2006/main" xmlns:r="http://schemas.openxmlformats.org/officeDocument/2006/relationships" xmlns:p14="http://schemas.microsoft.com/office/powerpoint/2010/main" xmlns:p15="http://schemas.microsoft.com/office/powerpoint/2012/main" xmlns:mc="http://schemas.openxmlformats.org/markup-compatibility/2006" type="tx" preserve="1">
-  <p:cSld name="DEFAULT">
+  <p:cSld name="Standard">
     <p:spTree>
       <p:nvGrpSpPr>
         <p:cNvPr id="1" name=""/>
@@ -557,7 +1126,7 @@
       </p:grpSpPr>
       <p:sp>
         <p:nvSpPr>
-          <p:cNvPr id="2" name="PlaceHolder 1"/>
+          <p:cNvPr id="4" name="PlaceHolder 1"/>
           <p:cNvSpPr>
             <a:spLocks noGrp="1"/>
           </p:cNvSpPr>
@@ -583,21 +1152,21 @@
             <a:noAutofit/>
           </a:bodyPr>
           <a:p>
-            <a:pPr indent="0">
+            <a:pPr indent="0" algn="ctr">
               <a:buNone/>
             </a:pPr>
-            <a:endParaRPr b="0" lang="de-AT" sz="1800" spc="-1" strike="noStrike">
-              <a:solidFill>
-                <a:schemeClr val="dk1"/>
-              </a:solidFill>
-              <a:latin typeface="Arial"/>
-            </a:endParaRPr>
-          </a:p>
-        </p:txBody>
-      </p:sp>
-      <p:sp>
-        <p:nvSpPr>
-          <p:cNvPr id="3" name="PlaceHolder 2"/>
+            <a:endParaRPr b="0" lang="de-AT" sz="4400" spc="-1" strike="noStrike">
+              <a:solidFill>
+                <a:srgbClr val="000000"/>
+              </a:solidFill>
+              <a:latin typeface="Arial"/>
+            </a:endParaRPr>
+          </a:p>
+        </p:txBody>
+      </p:sp>
+      <p:sp>
+        <p:nvSpPr>
+          <p:cNvPr id="5" name="PlaceHolder 2"/>
           <p:cNvSpPr>
             <a:spLocks noGrp="1"/>
           </p:cNvSpPr>
@@ -631,7 +1200,7 @@
             </a:pPr>
             <a:endParaRPr b="0" lang="de-AT" sz="3200" spc="-1" strike="noStrike">
               <a:solidFill>
-                <a:schemeClr val="dk1"/>
+                <a:srgbClr val="000000"/>
               </a:solidFill>
               <a:latin typeface="Arial"/>
             </a:endParaRPr>
@@ -695,21 +1264,21 @@
             <a:noAutofit/>
           </a:bodyPr>
           <a:p>
-            <a:pPr indent="0">
+            <a:pPr indent="0" algn="ctr">
               <a:buNone/>
             </a:pPr>
             <a:r>
-              <a:rPr b="0" lang="de-AT" sz="1800" spc="-1" strike="noStrike">
-                <a:solidFill>
-                  <a:schemeClr val="dk1"/>
+              <a:rPr b="0" lang="de-AT" sz="4400" spc="-1" strike="noStrike">
+                <a:solidFill>
+                  <a:srgbClr val="000000"/>
                 </a:solidFill>
                 <a:latin typeface="Arial"/>
               </a:rPr>
               <a:t>Format des Titeltextes durch Klicken bearbeiten</a:t>
             </a:r>
-            <a:endParaRPr b="0" lang="de-AT" sz="1800" spc="-1" strike="noStrike">
-              <a:solidFill>
-                <a:schemeClr val="dk1"/>
+            <a:endParaRPr b="0" lang="de-AT" sz="4400" spc="-1" strike="noStrike">
+              <a:solidFill>
+                <a:srgbClr val="000000"/>
               </a:solidFill>
               <a:latin typeface="Arial"/>
             </a:endParaRPr>
@@ -758,7 +1327,7 @@
             <a:r>
               <a:rPr b="0" lang="de-AT" sz="3200" spc="-1" strike="noStrike">
                 <a:solidFill>
-                  <a:schemeClr val="dk1"/>
+                  <a:srgbClr val="000000"/>
                 </a:solidFill>
                 <a:latin typeface="Arial"/>
               </a:rPr>
@@ -766,7 +1335,7 @@
             </a:r>
             <a:endParaRPr b="0" lang="de-AT" sz="3200" spc="-1" strike="noStrike">
               <a:solidFill>
-                <a:schemeClr val="dk1"/>
+                <a:srgbClr val="000000"/>
               </a:solidFill>
               <a:latin typeface="Arial"/>
             </a:endParaRPr>
@@ -784,17 +1353,17 @@
               <a:buChar char=""/>
             </a:pPr>
             <a:r>
-              <a:rPr b="0" lang="de-AT" sz="2400" spc="-1" strike="noStrike">
-                <a:solidFill>
-                  <a:schemeClr val="dk1"/>
+              <a:rPr b="0" lang="de-AT" sz="2800" spc="-1" strike="noStrike">
+                <a:solidFill>
+                  <a:srgbClr val="000000"/>
                 </a:solidFill>
                 <a:latin typeface="Arial"/>
               </a:rPr>
               <a:t>Zweite Gliederungsebene</a:t>
             </a:r>
-            <a:endParaRPr b="0" lang="de-AT" sz="2400" spc="-1" strike="noStrike">
-              <a:solidFill>
-                <a:schemeClr val="dk1"/>
+            <a:endParaRPr b="0" lang="de-AT" sz="2800" spc="-1" strike="noStrike">
+              <a:solidFill>
+                <a:srgbClr val="000000"/>
               </a:solidFill>
               <a:latin typeface="Arial"/>
             </a:endParaRPr>
@@ -812,17 +1381,17 @@
               <a:buChar char=""/>
             </a:pPr>
             <a:r>
-              <a:rPr b="0" lang="de-AT" sz="2000" spc="-1" strike="noStrike">
-                <a:solidFill>
-                  <a:schemeClr val="dk1"/>
+              <a:rPr b="0" lang="de-AT" sz="2400" spc="-1" strike="noStrike">
+                <a:solidFill>
+                  <a:srgbClr val="000000"/>
                 </a:solidFill>
                 <a:latin typeface="Arial"/>
               </a:rPr>
               <a:t>Dritte Gliederungsebene</a:t>
             </a:r>
-            <a:endParaRPr b="0" lang="de-AT" sz="2000" spc="-1" strike="noStrike">
-              <a:solidFill>
-                <a:schemeClr val="dk1"/>
+            <a:endParaRPr b="0" lang="de-AT" sz="2400" spc="-1" strike="noStrike">
+              <a:solidFill>
+                <a:srgbClr val="000000"/>
               </a:solidFill>
               <a:latin typeface="Arial"/>
             </a:endParaRPr>
@@ -842,7 +1411,7 @@
             <a:r>
               <a:rPr b="0" lang="de-AT" sz="2000" spc="-1" strike="noStrike">
                 <a:solidFill>
-                  <a:schemeClr val="dk1"/>
+                  <a:srgbClr val="000000"/>
                 </a:solidFill>
                 <a:latin typeface="Arial"/>
               </a:rPr>
@@ -850,7 +1419,7 @@
             </a:r>
             <a:endParaRPr b="0" lang="de-AT" sz="2000" spc="-1" strike="noStrike">
               <a:solidFill>
-                <a:schemeClr val="dk1"/>
+                <a:srgbClr val="000000"/>
               </a:solidFill>
               <a:latin typeface="Arial"/>
             </a:endParaRPr>
@@ -870,7 +1439,7 @@
             <a:r>
               <a:rPr b="0" lang="de-AT" sz="2000" spc="-1" strike="noStrike">
                 <a:solidFill>
-                  <a:schemeClr val="dk1"/>
+                  <a:srgbClr val="000000"/>
                 </a:solidFill>
                 <a:latin typeface="Arial"/>
               </a:rPr>
@@ -878,7 +1447,7 @@
             </a:r>
             <a:endParaRPr b="0" lang="de-AT" sz="2000" spc="-1" strike="noStrike">
               <a:solidFill>
-                <a:schemeClr val="dk1"/>
+                <a:srgbClr val="000000"/>
               </a:solidFill>
               <a:latin typeface="Arial"/>
             </a:endParaRPr>
@@ -898,7 +1467,7 @@
             <a:r>
               <a:rPr b="0" lang="de-AT" sz="2000" spc="-1" strike="noStrike">
                 <a:solidFill>
-                  <a:schemeClr val="dk1"/>
+                  <a:srgbClr val="000000"/>
                 </a:solidFill>
                 <a:latin typeface="Arial"/>
               </a:rPr>
@@ -906,7 +1475,7 @@
             </a:r>
             <a:endParaRPr b="0" lang="de-AT" sz="2000" spc="-1" strike="noStrike">
               <a:solidFill>
-                <a:schemeClr val="dk1"/>
+                <a:srgbClr val="000000"/>
               </a:solidFill>
               <a:latin typeface="Arial"/>
             </a:endParaRPr>
@@ -926,7 +1495,7 @@
             <a:r>
               <a:rPr b="0" lang="de-AT" sz="2000" spc="-1" strike="noStrike">
                 <a:solidFill>
-                  <a:schemeClr val="dk1"/>
+                  <a:srgbClr val="000000"/>
                 </a:solidFill>
                 <a:latin typeface="Arial"/>
               </a:rPr>
@@ -934,7 +1503,7 @@
             </a:r>
             <a:endParaRPr b="0" lang="de-AT" sz="2000" spc="-1" strike="noStrike">
               <a:solidFill>
-                <a:schemeClr val="dk1"/>
+                <a:srgbClr val="000000"/>
               </a:solidFill>
               <a:latin typeface="Arial"/>
             </a:endParaRPr>
@@ -946,7 +1515,313 @@
   <p:clrMap bg1="lt1" bg2="lt2" tx1="dk1" tx2="dk2" accent1="accent1" accent2="accent2" accent3="accent3" accent4="accent4" accent5="accent5" accent6="accent6" hlink="hlink" folHlink="folHlink"/>
   <p:sldLayoutIdLst>
     <p:sldLayoutId id="2147483649" r:id="rId2"/>
-    <p:sldLayoutId id="2147483650" r:id="rId3"/>
+  </p:sldLayoutIdLst>
+</p:sldMaster>
+</file>
+
+<file path=ppt/slideMasters/slideMaster2.xml><?xml version="1.0" encoding="utf-8"?>
+<p:sldMaster xmlns:a="http://schemas.openxmlformats.org/drawingml/2006/main" xmlns:p="http://schemas.openxmlformats.org/presentationml/2006/main" xmlns:r="http://schemas.openxmlformats.org/officeDocument/2006/relationships" xmlns:p14="http://schemas.microsoft.com/office/powerpoint/2010/main" xmlns:p15="http://schemas.microsoft.com/office/powerpoint/2012/main" xmlns:mc="http://schemas.openxmlformats.org/markup-compatibility/2006">
+  <p:cSld>
+    <p:bg>
+      <p:bgPr>
+        <a:solidFill>
+          <a:srgbClr val="ffffff"/>
+        </a:solidFill>
+      </p:bgPr>
+    </p:bg>
+    <p:spTree>
+      <p:nvGrpSpPr>
+        <p:cNvPr id="1" name=""/>
+        <p:cNvGrpSpPr/>
+        <p:nvPr/>
+      </p:nvGrpSpPr>
+      <p:grpSpPr>
+        <a:xfrm>
+          <a:off x="0" y="0"/>
+          <a:ext cx="0" cy="0"/>
+          <a:chOff x="0" y="0"/>
+          <a:chExt cx="0" cy="0"/>
+        </a:xfrm>
+      </p:grpSpPr>
+      <p:sp>
+        <p:nvSpPr>
+          <p:cNvPr id="2" name="PlaceHolder 1"/>
+          <p:cNvSpPr>
+            <a:spLocks noGrp="1"/>
+          </p:cNvSpPr>
+          <p:nvPr>
+            <p:ph type="title"/>
+          </p:nvPr>
+        </p:nvSpPr>
+        <p:spPr>
+          <a:xfrm>
+            <a:off x="609480" y="273600"/>
+            <a:ext cx="10972080" cy="1144440"/>
+          </a:xfrm>
+          <a:prstGeom prst="rect">
+            <a:avLst/>
+          </a:prstGeom>
+          <a:noFill/>
+          <a:ln w="0">
+            <a:noFill/>
+          </a:ln>
+        </p:spPr>
+        <p:txBody>
+          <a:bodyPr lIns="0" rIns="0" tIns="0" bIns="0" anchor="ctr">
+            <a:noAutofit/>
+          </a:bodyPr>
+          <a:p>
+            <a:pPr indent="0">
+              <a:buNone/>
+            </a:pPr>
+            <a:r>
+              <a:rPr b="0" lang="de-AT" sz="1800" spc="-1" strike="noStrike">
+                <a:solidFill>
+                  <a:srgbClr val="000000"/>
+                </a:solidFill>
+                <a:latin typeface="Arial"/>
+              </a:rPr>
+              <a:t>Format des Titeltextes durch Klicken bearbeiten</a:t>
+            </a:r>
+            <a:endParaRPr b="0" lang="de-AT" sz="1800" spc="-1" strike="noStrike">
+              <a:solidFill>
+                <a:srgbClr val="000000"/>
+              </a:solidFill>
+              <a:latin typeface="Arial"/>
+            </a:endParaRPr>
+          </a:p>
+        </p:txBody>
+      </p:sp>
+      <p:sp>
+        <p:nvSpPr>
+          <p:cNvPr id="3" name="PlaceHolder 2"/>
+          <p:cNvSpPr>
+            <a:spLocks noGrp="1"/>
+          </p:cNvSpPr>
+          <p:nvPr>
+            <p:ph type="body"/>
+          </p:nvPr>
+        </p:nvSpPr>
+        <p:spPr>
+          <a:xfrm>
+            <a:off x="609480" y="1604520"/>
+            <a:ext cx="10972080" cy="3976920"/>
+          </a:xfrm>
+          <a:prstGeom prst="rect">
+            <a:avLst/>
+          </a:prstGeom>
+          <a:noFill/>
+          <a:ln w="0">
+            <a:noFill/>
+          </a:ln>
+        </p:spPr>
+        <p:txBody>
+          <a:bodyPr lIns="0" rIns="0" tIns="0" bIns="0" anchor="t">
+            <a:normAutofit/>
+          </a:bodyPr>
+          <a:p>
+            <a:pPr marL="432000" indent="-324000">
+              <a:spcBef>
+                <a:spcPts val="1417"/>
+              </a:spcBef>
+              <a:buClr>
+                <a:srgbClr val="000000"/>
+              </a:buClr>
+              <a:buSzPct val="45000"/>
+              <a:buFont typeface="Wingdings" charset="2"/>
+              <a:buChar char=""/>
+            </a:pPr>
+            <a:r>
+              <a:rPr b="0" lang="de-AT" sz="1800" spc="-1" strike="noStrike">
+                <a:solidFill>
+                  <a:srgbClr val="000000"/>
+                </a:solidFill>
+                <a:latin typeface="Arial"/>
+              </a:rPr>
+              <a:t>Format des Gliederungstextes durch Klicken bearbeiten</a:t>
+            </a:r>
+            <a:endParaRPr b="0" lang="de-AT" sz="1800" spc="-1" strike="noStrike">
+              <a:solidFill>
+                <a:srgbClr val="000000"/>
+              </a:solidFill>
+              <a:latin typeface="Arial"/>
+            </a:endParaRPr>
+          </a:p>
+          <a:p>
+            <a:pPr lvl="1" marL="864000" indent="-324000">
+              <a:spcBef>
+                <a:spcPts val="1134"/>
+              </a:spcBef>
+              <a:buClr>
+                <a:srgbClr val="000000"/>
+              </a:buClr>
+              <a:buSzPct val="75000"/>
+              <a:buFont typeface="Symbol" charset="2"/>
+              <a:buChar char=""/>
+            </a:pPr>
+            <a:r>
+              <a:rPr b="0" lang="de-AT" sz="1800" spc="-1" strike="noStrike">
+                <a:solidFill>
+                  <a:srgbClr val="000000"/>
+                </a:solidFill>
+                <a:latin typeface="Arial"/>
+              </a:rPr>
+              <a:t>Zweite Gliederungsebene</a:t>
+            </a:r>
+            <a:endParaRPr b="0" lang="de-AT" sz="1800" spc="-1" strike="noStrike">
+              <a:solidFill>
+                <a:srgbClr val="000000"/>
+              </a:solidFill>
+              <a:latin typeface="Arial"/>
+            </a:endParaRPr>
+          </a:p>
+          <a:p>
+            <a:pPr lvl="2" marL="1296000" indent="-288000">
+              <a:spcBef>
+                <a:spcPts val="850"/>
+              </a:spcBef>
+              <a:buClr>
+                <a:srgbClr val="000000"/>
+              </a:buClr>
+              <a:buSzPct val="45000"/>
+              <a:buFont typeface="Wingdings" charset="2"/>
+              <a:buChar char=""/>
+            </a:pPr>
+            <a:r>
+              <a:rPr b="0" lang="de-AT" sz="1800" spc="-1" strike="noStrike">
+                <a:solidFill>
+                  <a:srgbClr val="000000"/>
+                </a:solidFill>
+                <a:latin typeface="Arial"/>
+              </a:rPr>
+              <a:t>Dritte Gliederungsebene</a:t>
+            </a:r>
+            <a:endParaRPr b="0" lang="de-AT" sz="1800" spc="-1" strike="noStrike">
+              <a:solidFill>
+                <a:srgbClr val="000000"/>
+              </a:solidFill>
+              <a:latin typeface="Arial"/>
+            </a:endParaRPr>
+          </a:p>
+          <a:p>
+            <a:pPr lvl="3" marL="1728000" indent="-216000">
+              <a:spcBef>
+                <a:spcPts val="567"/>
+              </a:spcBef>
+              <a:buClr>
+                <a:srgbClr val="000000"/>
+              </a:buClr>
+              <a:buSzPct val="75000"/>
+              <a:buFont typeface="Symbol" charset="2"/>
+              <a:buChar char=""/>
+            </a:pPr>
+            <a:r>
+              <a:rPr b="0" lang="de-AT" sz="1800" spc="-1" strike="noStrike">
+                <a:solidFill>
+                  <a:srgbClr val="000000"/>
+                </a:solidFill>
+                <a:latin typeface="Arial"/>
+              </a:rPr>
+              <a:t>Vierte Gliederungsebene</a:t>
+            </a:r>
+            <a:endParaRPr b="0" lang="de-AT" sz="1800" spc="-1" strike="noStrike">
+              <a:solidFill>
+                <a:srgbClr val="000000"/>
+              </a:solidFill>
+              <a:latin typeface="Arial"/>
+            </a:endParaRPr>
+          </a:p>
+          <a:p>
+            <a:pPr lvl="4" marL="2160000" indent="-216000">
+              <a:spcBef>
+                <a:spcPts val="283"/>
+              </a:spcBef>
+              <a:buClr>
+                <a:srgbClr val="000000"/>
+              </a:buClr>
+              <a:buSzPct val="45000"/>
+              <a:buFont typeface="Wingdings" charset="2"/>
+              <a:buChar char=""/>
+            </a:pPr>
+            <a:r>
+              <a:rPr b="0" lang="de-AT" sz="1800" spc="-1" strike="noStrike">
+                <a:solidFill>
+                  <a:srgbClr val="000000"/>
+                </a:solidFill>
+                <a:latin typeface="Arial"/>
+              </a:rPr>
+              <a:t>Fünfte Gliederungsebene</a:t>
+            </a:r>
+            <a:endParaRPr b="0" lang="de-AT" sz="1800" spc="-1" strike="noStrike">
+              <a:solidFill>
+                <a:srgbClr val="000000"/>
+              </a:solidFill>
+              <a:latin typeface="Arial"/>
+            </a:endParaRPr>
+          </a:p>
+          <a:p>
+            <a:pPr lvl="5" marL="2592000" indent="-216000">
+              <a:spcBef>
+                <a:spcPts val="283"/>
+              </a:spcBef>
+              <a:buClr>
+                <a:srgbClr val="000000"/>
+              </a:buClr>
+              <a:buSzPct val="45000"/>
+              <a:buFont typeface="Wingdings" charset="2"/>
+              <a:buChar char=""/>
+            </a:pPr>
+            <a:r>
+              <a:rPr b="0" lang="de-AT" sz="1800" spc="-1" strike="noStrike">
+                <a:solidFill>
+                  <a:srgbClr val="000000"/>
+                </a:solidFill>
+                <a:latin typeface="Arial"/>
+              </a:rPr>
+              <a:t>Sechste Gliederungsebene</a:t>
+            </a:r>
+            <a:endParaRPr b="0" lang="de-AT" sz="1800" spc="-1" strike="noStrike">
+              <a:solidFill>
+                <a:srgbClr val="000000"/>
+              </a:solidFill>
+              <a:latin typeface="Arial"/>
+            </a:endParaRPr>
+          </a:p>
+          <a:p>
+            <a:pPr lvl="6" marL="3024000" indent="-216000">
+              <a:spcBef>
+                <a:spcPts val="283"/>
+              </a:spcBef>
+              <a:buClr>
+                <a:srgbClr val="000000"/>
+              </a:buClr>
+              <a:buSzPct val="45000"/>
+              <a:buFont typeface="Wingdings" charset="2"/>
+              <a:buChar char=""/>
+            </a:pPr>
+            <a:r>
+              <a:rPr b="0" lang="de-AT" sz="1800" spc="-1" strike="noStrike">
+                <a:solidFill>
+                  <a:srgbClr val="000000"/>
+                </a:solidFill>
+                <a:latin typeface="Arial"/>
+              </a:rPr>
+              <a:t>Siebte Gliederungsebene</a:t>
+            </a:r>
+            <a:endParaRPr b="0" lang="de-AT" sz="1800" spc="-1" strike="noStrike">
+              <a:solidFill>
+                <a:srgbClr val="000000"/>
+              </a:solidFill>
+              <a:latin typeface="Arial"/>
+            </a:endParaRPr>
+          </a:p>
+        </p:txBody>
+      </p:sp>
+    </p:spTree>
+  </p:cSld>
+  <p:clrMap bg1="lt1" bg2="lt2" tx1="dk1" tx2="dk2" accent1="accent1" accent2="accent2" accent3="accent3" accent4="accent4" accent5="accent5" accent6="accent6" hlink="hlink" folHlink="folHlink"/>
+  <p:sldLayoutIdLst>
+    <p:sldLayoutId id="2147483651" r:id="rId2"/>
   </p:sldLayoutIdLst>
 </p:sldMaster>
 </file>
@@ -977,14 +1852,14 @@
       </p:grpSpPr>
       <p:sp>
         <p:nvSpPr>
-          <p:cNvPr id="10" name="Shape 0"/>
+          <p:cNvPr id="12" name="Shape 0"/>
           <p:cNvSpPr/>
           <p:nvPr/>
         </p:nvSpPr>
         <p:spPr>
           <a:xfrm>
             <a:off x="0" y="0"/>
-            <a:ext cx="12191400" cy="676440"/>
+            <a:ext cx="12190320" cy="675360"/>
           </a:xfrm>
           <a:prstGeom prst="rect">
             <a:avLst/>
@@ -1010,6 +1885,11 @@
             <a:noAutofit/>
           </a:bodyPr>
           <a:p>
+            <a:pPr>
+              <a:lnSpc>
+                <a:spcPct val="100000"/>
+              </a:lnSpc>
+            </a:pPr>
             <a:endParaRPr b="0" lang="de-AT" sz="1800" spc="-1" strike="noStrike">
               <a:solidFill>
                 <a:srgbClr val="000000"/>
@@ -1021,14 +1901,14 @@
       </p:sp>
       <p:sp>
         <p:nvSpPr>
-          <p:cNvPr id="11" name="Text 1"/>
+          <p:cNvPr id="13" name="Text 1"/>
           <p:cNvSpPr/>
           <p:nvPr/>
         </p:nvSpPr>
         <p:spPr>
           <a:xfrm>
             <a:off x="384120" y="128160"/>
-            <a:ext cx="7954920" cy="402120"/>
+            <a:ext cx="7953840" cy="401040"/>
           </a:xfrm>
           <a:prstGeom prst="rect">
             <a:avLst/>
@@ -1078,14 +1958,14 @@
       </p:sp>
       <p:sp>
         <p:nvSpPr>
-          <p:cNvPr id="12" name="Text 2"/>
+          <p:cNvPr id="14" name="Text 2"/>
           <p:cNvSpPr/>
           <p:nvPr/>
         </p:nvSpPr>
         <p:spPr>
           <a:xfrm>
             <a:off x="9875520" y="191880"/>
-            <a:ext cx="1919880" cy="255600"/>
+            <a:ext cx="1918800" cy="254520"/>
           </a:xfrm>
           <a:prstGeom prst="rect">
             <a:avLst/>
@@ -1114,16 +1994,6 @@
                 <a:tab algn="l" pos="0"/>
               </a:tabLst>
             </a:pPr>
-            <a:r>
-              <a:rPr b="1" lang="en-US" sz="1200" spc="-1" strike="noStrike">
-                <a:solidFill>
-                  <a:srgbClr val="111111"/>
-                </a:solidFill>
-                <a:latin typeface="Arial"/>
-                <a:ea typeface="Arial"/>
-              </a:rPr>
-              <a:t>4-min pitch map</a:t>
-            </a:r>
             <a:endParaRPr b="0" lang="de-AT" sz="1200" spc="-1" strike="noStrike">
               <a:solidFill>
                 <a:srgbClr val="000000"/>
@@ -1131,18 +2001,34 @@
               <a:latin typeface="Arial"/>
             </a:endParaRPr>
           </a:p>
-        </p:txBody>
-      </p:sp>
-      <p:sp>
-        <p:nvSpPr>
-          <p:cNvPr id="13" name="Text 3"/>
+          <a:p>
+            <a:pPr algn="r" defTabSz="914400">
+              <a:lnSpc>
+                <a:spcPct val="100000"/>
+              </a:lnSpc>
+              <a:tabLst>
+                <a:tab algn="l" pos="0"/>
+              </a:tabLst>
+            </a:pPr>
+            <a:endParaRPr b="0" lang="de-AT" sz="1200" spc="-1" strike="noStrike">
+              <a:solidFill>
+                <a:srgbClr val="000000"/>
+              </a:solidFill>
+              <a:latin typeface="Arial"/>
+            </a:endParaRPr>
+          </a:p>
+        </p:txBody>
+      </p:sp>
+      <p:sp>
+        <p:nvSpPr>
+          <p:cNvPr id="15" name="Text 3"/>
           <p:cNvSpPr/>
           <p:nvPr/>
         </p:nvSpPr>
         <p:spPr>
           <a:xfrm>
             <a:off x="384120" y="804600"/>
-            <a:ext cx="11246760" cy="383760"/>
+            <a:ext cx="11245680" cy="382680"/>
           </a:xfrm>
           <a:prstGeom prst="rect">
             <a:avLst/>
@@ -1192,14 +2078,14 @@
       </p:sp>
       <p:sp>
         <p:nvSpPr>
-          <p:cNvPr id="14" name="Shape 4"/>
+          <p:cNvPr id="16" name="Shape 4"/>
           <p:cNvSpPr/>
           <p:nvPr/>
         </p:nvSpPr>
         <p:spPr>
           <a:xfrm>
             <a:off x="438840" y="1417320"/>
-            <a:ext cx="5440320" cy="1325520"/>
+            <a:ext cx="5439240" cy="1324440"/>
           </a:xfrm>
           <a:prstGeom prst="roundRect">
             <a:avLst>
@@ -1227,6 +2113,11 @@
             <a:noAutofit/>
           </a:bodyPr>
           <a:p>
+            <a:pPr>
+              <a:lnSpc>
+                <a:spcPct val="100000"/>
+              </a:lnSpc>
+            </a:pPr>
             <a:endParaRPr b="0" lang="de-AT" sz="1800" spc="-1" strike="noStrike">
               <a:solidFill>
                 <a:srgbClr val="000000"/>
@@ -1238,14 +2129,14 @@
       </p:sp>
       <p:sp>
         <p:nvSpPr>
-          <p:cNvPr id="15" name="Shape 5"/>
+          <p:cNvPr id="17" name="Shape 5"/>
           <p:cNvSpPr/>
           <p:nvPr/>
         </p:nvSpPr>
         <p:spPr>
           <a:xfrm>
             <a:off x="438840" y="1417320"/>
-            <a:ext cx="5440320" cy="109440"/>
+            <a:ext cx="5439240" cy="108360"/>
           </a:xfrm>
           <a:prstGeom prst="rect">
             <a:avLst/>
@@ -1271,6 +2162,11 @@
             <a:noAutofit/>
           </a:bodyPr>
           <a:p>
+            <a:pPr>
+              <a:lnSpc>
+                <a:spcPct val="100000"/>
+              </a:lnSpc>
+            </a:pPr>
             <a:endParaRPr b="0" lang="de-AT" sz="1800" spc="-1" strike="noStrike">
               <a:solidFill>
                 <a:srgbClr val="000000"/>
@@ -1282,14 +2178,14 @@
       </p:sp>
       <p:sp>
         <p:nvSpPr>
-          <p:cNvPr id="16" name="Text 6"/>
+          <p:cNvPr id="18" name="Text 6"/>
           <p:cNvSpPr/>
           <p:nvPr/>
         </p:nvSpPr>
         <p:spPr>
           <a:xfrm>
             <a:off x="603360" y="1581840"/>
-            <a:ext cx="5111280" cy="255600"/>
+            <a:ext cx="5110200" cy="254520"/>
           </a:xfrm>
           <a:prstGeom prst="rect">
             <a:avLst/>
@@ -1339,14 +2235,14 @@
       </p:sp>
       <p:sp>
         <p:nvSpPr>
-          <p:cNvPr id="17" name="Text 7"/>
+          <p:cNvPr id="19" name="Text 7"/>
           <p:cNvSpPr/>
           <p:nvPr/>
         </p:nvSpPr>
         <p:spPr>
           <a:xfrm>
             <a:off x="713160" y="1947600"/>
-            <a:ext cx="5001480" cy="722160"/>
+            <a:ext cx="5000400" cy="721080"/>
           </a:xfrm>
           <a:prstGeom prst="rect">
             <a:avLst/>
@@ -1439,14 +2335,14 @@
       </p:sp>
       <p:sp>
         <p:nvSpPr>
-          <p:cNvPr id="18" name="Shape 8"/>
+          <p:cNvPr id="20" name="Shape 8"/>
           <p:cNvSpPr/>
           <p:nvPr/>
         </p:nvSpPr>
         <p:spPr>
           <a:xfrm>
             <a:off x="6309360" y="1417320"/>
-            <a:ext cx="5440320" cy="1325520"/>
+            <a:ext cx="5439240" cy="1324440"/>
           </a:xfrm>
           <a:prstGeom prst="roundRect">
             <a:avLst>
@@ -1474,6 +2370,11 @@
             <a:noAutofit/>
           </a:bodyPr>
           <a:p>
+            <a:pPr>
+              <a:lnSpc>
+                <a:spcPct val="100000"/>
+              </a:lnSpc>
+            </a:pPr>
             <a:endParaRPr b="0" lang="de-AT" sz="1800" spc="-1" strike="noStrike">
               <a:solidFill>
                 <a:srgbClr val="000000"/>
@@ -1485,14 +2386,14 @@
       </p:sp>
       <p:sp>
         <p:nvSpPr>
-          <p:cNvPr id="19" name="Shape 9"/>
+          <p:cNvPr id="21" name="Shape 9"/>
           <p:cNvSpPr/>
           <p:nvPr/>
         </p:nvSpPr>
         <p:spPr>
           <a:xfrm>
             <a:off x="6309360" y="1417320"/>
-            <a:ext cx="5440320" cy="109440"/>
+            <a:ext cx="5439240" cy="108360"/>
           </a:xfrm>
           <a:prstGeom prst="rect">
             <a:avLst/>
@@ -1518,6 +2419,11 @@
             <a:noAutofit/>
           </a:bodyPr>
           <a:p>
+            <a:pPr>
+              <a:lnSpc>
+                <a:spcPct val="100000"/>
+              </a:lnSpc>
+            </a:pPr>
             <a:endParaRPr b="0" lang="de-AT" sz="1800" spc="-1" strike="noStrike">
               <a:solidFill>
                 <a:srgbClr val="000000"/>
@@ -1529,14 +2435,14 @@
       </p:sp>
       <p:sp>
         <p:nvSpPr>
-          <p:cNvPr id="20" name="Text 10"/>
+          <p:cNvPr id="22" name="Text 10"/>
           <p:cNvSpPr/>
           <p:nvPr/>
         </p:nvSpPr>
         <p:spPr>
           <a:xfrm>
             <a:off x="6473880" y="1581840"/>
-            <a:ext cx="5111280" cy="255600"/>
+            <a:ext cx="5110200" cy="254520"/>
           </a:xfrm>
           <a:prstGeom prst="rect">
             <a:avLst/>
@@ -1586,14 +2492,14 @@
       </p:sp>
       <p:sp>
         <p:nvSpPr>
-          <p:cNvPr id="21" name="Text 11"/>
-          <p:cNvSpPr/>
-          <p:nvPr/>
-        </p:nvSpPr>
-        <p:spPr>
-          <a:xfrm>
-            <a:off x="6583680" y="1947600"/>
-            <a:ext cx="5001480" cy="722160"/>
+          <p:cNvPr id="23" name="Text 11"/>
+          <p:cNvSpPr/>
+          <p:nvPr/>
+        </p:nvSpPr>
+        <p:spPr>
+          <a:xfrm>
+            <a:off x="6583680" y="1980000"/>
+            <a:ext cx="5000400" cy="688680"/>
           </a:xfrm>
           <a:prstGeom prst="rect">
             <a:avLst/>
@@ -1650,7 +2556,7 @@
                 <a:latin typeface="Arial"/>
                 <a:ea typeface="Arial"/>
               </a:rPr>
-              <a:t>Students researched, then wrote a recommendation</a:t>
+              <a:t>Then wrote a recommendation (without any support) </a:t>
             </a:r>
             <a:endParaRPr b="0" lang="de-AT" sz="1020" spc="-1" strike="noStrike">
               <a:solidFill>
@@ -1682,18 +2588,41 @@
               <a:latin typeface="Arial"/>
             </a:endParaRPr>
           </a:p>
-        </p:txBody>
-      </p:sp>
-      <p:sp>
-        <p:nvSpPr>
-          <p:cNvPr id="22" name="Shape 12"/>
+          <a:p>
+            <a:pPr defTabSz="914400">
+              <a:lnSpc>
+                <a:spcPct val="100000"/>
+              </a:lnSpc>
+            </a:pPr>
+            <a:r>
+              <a:rPr b="0" lang="en-US" sz="1020" spc="-1" strike="noStrike">
+                <a:solidFill>
+                  <a:srgbClr val="475569"/>
+                </a:solidFill>
+                <a:latin typeface="Arial"/>
+                <a:ea typeface="Arial"/>
+              </a:rPr>
+              <a:t>Prior knowledge test</a:t>
+            </a:r>
+            <a:endParaRPr b="0" lang="de-AT" sz="1020" spc="-1" strike="noStrike">
+              <a:solidFill>
+                <a:srgbClr val="000000"/>
+              </a:solidFill>
+              <a:latin typeface="Arial"/>
+            </a:endParaRPr>
+          </a:p>
+        </p:txBody>
+      </p:sp>
+      <p:sp>
+        <p:nvSpPr>
+          <p:cNvPr id="24" name="Shape 12"/>
           <p:cNvSpPr/>
           <p:nvPr/>
         </p:nvSpPr>
         <p:spPr>
           <a:xfrm>
             <a:off x="438840" y="3035880"/>
-            <a:ext cx="5440320" cy="1325520"/>
+            <a:ext cx="5439240" cy="1324440"/>
           </a:xfrm>
           <a:prstGeom prst="roundRect">
             <a:avLst>
@@ -1721,6 +2650,11 @@
             <a:noAutofit/>
           </a:bodyPr>
           <a:p>
+            <a:pPr>
+              <a:lnSpc>
+                <a:spcPct val="100000"/>
+              </a:lnSpc>
+            </a:pPr>
             <a:endParaRPr b="0" lang="de-AT" sz="1800" spc="-1" strike="noStrike">
               <a:solidFill>
                 <a:srgbClr val="000000"/>
@@ -1732,14 +2666,14 @@
       </p:sp>
       <p:sp>
         <p:nvSpPr>
-          <p:cNvPr id="23" name="Shape 13"/>
+          <p:cNvPr id="25" name="Shape 13"/>
           <p:cNvSpPr/>
           <p:nvPr/>
         </p:nvSpPr>
         <p:spPr>
           <a:xfrm>
             <a:off x="438840" y="3035880"/>
-            <a:ext cx="5440320" cy="109440"/>
+            <a:ext cx="5439240" cy="108360"/>
           </a:xfrm>
           <a:prstGeom prst="rect">
             <a:avLst/>
@@ -1765,6 +2699,11 @@
             <a:noAutofit/>
           </a:bodyPr>
           <a:p>
+            <a:pPr>
+              <a:lnSpc>
+                <a:spcPct val="100000"/>
+              </a:lnSpc>
+            </a:pPr>
             <a:endParaRPr b="0" lang="de-AT" sz="1800" spc="-1" strike="noStrike">
               <a:solidFill>
                 <a:srgbClr val="000000"/>
@@ -1776,14 +2715,14 @@
       </p:sp>
       <p:sp>
         <p:nvSpPr>
-          <p:cNvPr id="24" name="Text 14"/>
+          <p:cNvPr id="26" name="Text 14"/>
           <p:cNvSpPr/>
           <p:nvPr/>
         </p:nvSpPr>
         <p:spPr>
           <a:xfrm>
             <a:off x="603360" y="3200400"/>
-            <a:ext cx="5111280" cy="255600"/>
+            <a:ext cx="5110200" cy="254520"/>
           </a:xfrm>
           <a:prstGeom prst="rect">
             <a:avLst/>
@@ -1833,14 +2772,14 @@
       </p:sp>
       <p:sp>
         <p:nvSpPr>
-          <p:cNvPr id="25" name="Text 15"/>
+          <p:cNvPr id="27" name="Text 15"/>
           <p:cNvSpPr/>
           <p:nvPr/>
         </p:nvSpPr>
         <p:spPr>
           <a:xfrm>
             <a:off x="713160" y="3566160"/>
-            <a:ext cx="5001480" cy="722160"/>
+            <a:ext cx="5000400" cy="721080"/>
           </a:xfrm>
           <a:prstGeom prst="rect">
             <a:avLst/>
@@ -1933,14 +2872,14 @@
       </p:sp>
       <p:sp>
         <p:nvSpPr>
-          <p:cNvPr id="26" name="Shape 16"/>
+          <p:cNvPr id="28" name="Shape 16"/>
           <p:cNvSpPr/>
           <p:nvPr/>
         </p:nvSpPr>
         <p:spPr>
           <a:xfrm>
             <a:off x="6309360" y="3035880"/>
-            <a:ext cx="5440320" cy="1325520"/>
+            <a:ext cx="5439240" cy="1324440"/>
           </a:xfrm>
           <a:prstGeom prst="roundRect">
             <a:avLst>
@@ -1968,6 +2907,11 @@
             <a:noAutofit/>
           </a:bodyPr>
           <a:p>
+            <a:pPr>
+              <a:lnSpc>
+                <a:spcPct val="100000"/>
+              </a:lnSpc>
+            </a:pPr>
             <a:endParaRPr b="0" lang="de-AT" sz="1800" spc="-1" strike="noStrike">
               <a:solidFill>
                 <a:srgbClr val="000000"/>
@@ -1979,14 +2923,14 @@
       </p:sp>
       <p:sp>
         <p:nvSpPr>
-          <p:cNvPr id="27" name="Shape 17"/>
+          <p:cNvPr id="29" name="Shape 17"/>
           <p:cNvSpPr/>
           <p:nvPr/>
         </p:nvSpPr>
         <p:spPr>
           <a:xfrm>
             <a:off x="6309360" y="3035880"/>
-            <a:ext cx="5440320" cy="109440"/>
+            <a:ext cx="5439240" cy="108360"/>
           </a:xfrm>
           <a:prstGeom prst="rect">
             <a:avLst/>
@@ -2012,6 +2956,11 @@
             <a:noAutofit/>
           </a:bodyPr>
           <a:p>
+            <a:pPr>
+              <a:lnSpc>
+                <a:spcPct val="100000"/>
+              </a:lnSpc>
+            </a:pPr>
             <a:endParaRPr b="0" lang="de-AT" sz="1800" spc="-1" strike="noStrike">
               <a:solidFill>
                 <a:srgbClr val="000000"/>
@@ -2023,14 +2972,14 @@
       </p:sp>
       <p:sp>
         <p:nvSpPr>
-          <p:cNvPr id="28" name="Text 18"/>
+          <p:cNvPr id="30" name="Text 18"/>
           <p:cNvSpPr/>
           <p:nvPr/>
         </p:nvSpPr>
         <p:spPr>
           <a:xfrm>
             <a:off x="6473880" y="3200400"/>
-            <a:ext cx="5111280" cy="255600"/>
+            <a:ext cx="5110200" cy="254520"/>
           </a:xfrm>
           <a:prstGeom prst="rect">
             <a:avLst/>
@@ -2080,14 +3029,14 @@
       </p:sp>
       <p:sp>
         <p:nvSpPr>
-          <p:cNvPr id="29" name="Text 19"/>
+          <p:cNvPr id="31" name="Text 19"/>
           <p:cNvSpPr/>
           <p:nvPr/>
         </p:nvSpPr>
         <p:spPr>
           <a:xfrm>
             <a:off x="6583680" y="3566160"/>
-            <a:ext cx="5001480" cy="722160"/>
+            <a:ext cx="5000400" cy="721080"/>
           </a:xfrm>
           <a:prstGeom prst="rect">
             <a:avLst/>
@@ -2180,14 +3129,14 @@
       </p:sp>
       <p:sp>
         <p:nvSpPr>
-          <p:cNvPr id="30" name="Shape 20"/>
+          <p:cNvPr id="32" name="Shape 20"/>
           <p:cNvSpPr/>
           <p:nvPr/>
         </p:nvSpPr>
         <p:spPr>
           <a:xfrm>
             <a:off x="438840" y="4654440"/>
-            <a:ext cx="5440320" cy="1325520"/>
+            <a:ext cx="5439240" cy="1324440"/>
           </a:xfrm>
           <a:prstGeom prst="roundRect">
             <a:avLst>
@@ -2211,29 +3160,35 @@
           <a:fontRef idx="minor"/>
         </p:style>
         <p:txBody>
-          <a:bodyPr lIns="90000" rIns="90000" tIns="45000" bIns="45000" anchor="t">
-            <a:noAutofit/>
-          </a:bodyPr>
-          <a:p>
-            <a:endParaRPr b="0" lang="de-AT" sz="1800" spc="-1" strike="noStrike">
-              <a:solidFill>
-                <a:srgbClr val="000000"/>
-              </a:solidFill>
-              <a:latin typeface="Arial"/>
-            </a:endParaRPr>
-          </a:p>
-        </p:txBody>
-      </p:sp>
-      <p:sp>
-        <p:nvSpPr>
-          <p:cNvPr id="31" name="Shape 21"/>
+          <a:bodyPr wrap="none" lIns="0" rIns="0" tIns="0" bIns="0" anchor="t">
+            <a:spAutoFit/>
+          </a:bodyPr>
+          <a:p>
+            <a:pPr>
+              <a:lnSpc>
+                <a:spcPct val="100000"/>
+              </a:lnSpc>
+            </a:pPr>
+            <a:endParaRPr b="0" lang="en-US" sz="1020" spc="-1" strike="noStrike">
+              <a:solidFill>
+                <a:srgbClr val="475569"/>
+              </a:solidFill>
+              <a:latin typeface="Arial"/>
+              <a:ea typeface="Arial"/>
+            </a:endParaRPr>
+          </a:p>
+        </p:txBody>
+      </p:sp>
+      <p:sp>
+        <p:nvSpPr>
+          <p:cNvPr id="33" name="Shape 21"/>
           <p:cNvSpPr/>
           <p:nvPr/>
         </p:nvSpPr>
         <p:spPr>
           <a:xfrm>
             <a:off x="438840" y="4654440"/>
-            <a:ext cx="5440320" cy="109440"/>
+            <a:ext cx="5439240" cy="108360"/>
           </a:xfrm>
           <a:prstGeom prst="rect">
             <a:avLst/>
@@ -2259,6 +3214,11 @@
             <a:noAutofit/>
           </a:bodyPr>
           <a:p>
+            <a:pPr>
+              <a:lnSpc>
+                <a:spcPct val="100000"/>
+              </a:lnSpc>
+            </a:pPr>
             <a:endParaRPr b="0" lang="de-AT" sz="1800" spc="-1" strike="noStrike">
               <a:solidFill>
                 <a:srgbClr val="000000"/>
@@ -2270,14 +3230,14 @@
       </p:sp>
       <p:sp>
         <p:nvSpPr>
-          <p:cNvPr id="32" name="Text 22"/>
+          <p:cNvPr id="34" name="Text 22"/>
           <p:cNvSpPr/>
           <p:nvPr/>
         </p:nvSpPr>
         <p:spPr>
           <a:xfrm>
             <a:off x="603360" y="4818960"/>
-            <a:ext cx="5111280" cy="255600"/>
+            <a:ext cx="5110200" cy="254520"/>
           </a:xfrm>
           <a:prstGeom prst="rect">
             <a:avLst/>
@@ -2327,14 +3287,14 @@
       </p:sp>
       <p:sp>
         <p:nvSpPr>
-          <p:cNvPr id="33" name="Text 23"/>
+          <p:cNvPr id="35" name="Text 23"/>
           <p:cNvSpPr/>
           <p:nvPr/>
         </p:nvSpPr>
         <p:spPr>
           <a:xfrm>
             <a:off x="713160" y="5184720"/>
-            <a:ext cx="5001480" cy="722160"/>
+            <a:ext cx="5000400" cy="721080"/>
           </a:xfrm>
           <a:prstGeom prst="rect">
             <a:avLst/>
@@ -2368,7 +3328,7 @@
                 <a:latin typeface="Arial"/>
                 <a:ea typeface="Arial"/>
               </a:rPr>
-              <a:t>One university, moderate sample size</a:t>
+              <a:t>One university, short lab task, not a long classroom intervention</a:t>
             </a:r>
             <a:endParaRPr b="0" lang="de-AT" sz="1020" spc="-1" strike="noStrike">
               <a:solidFill>
@@ -2391,7 +3351,7 @@
                 <a:latin typeface="Arial"/>
                 <a:ea typeface="Arial"/>
               </a:rPr>
-              <a:t>Short lab task, not a long classroom intervention</a:t>
+              <a:t>ChatGPT-3.5 only; newer models may differ</a:t>
             </a:r>
             <a:endParaRPr b="0" lang="de-AT" sz="1020" spc="-1" strike="noStrike">
               <a:solidFill>
@@ -2407,6 +3367,39 @@
               </a:lnSpc>
             </a:pPr>
             <a:r>
+              <a:rPr b="0" lang="en-US" sz="960" spc="-1" strike="noStrike">
+                <a:solidFill>
+                  <a:srgbClr val="171717"/>
+                </a:solidFill>
+                <a:latin typeface="Arial"/>
+                <a:ea typeface="Arial"/>
+              </a:rPr>
+              <a:t>No classic pre-post learning measurement.</a:t>
+            </a:r>
+            <a:endParaRPr b="0" lang="de-AT" sz="960" spc="-1" strike="noStrike">
+              <a:solidFill>
+                <a:srgbClr val="000000"/>
+              </a:solidFill>
+              <a:latin typeface="Arial"/>
+            </a:endParaRPr>
+          </a:p>
+          <a:p>
+            <a:pPr defTabSz="914400">
+              <a:lnSpc>
+                <a:spcPct val="100000"/>
+              </a:lnSpc>
+            </a:pPr>
+            <a:r>
+              <a:rPr b="0" lang="en-US" sz="960" spc="-1" strike="noStrike">
+                <a:solidFill>
+                  <a:srgbClr val="171717"/>
+                </a:solidFill>
+                <a:latin typeface="Arial"/>
+                <a:ea typeface="Arial"/>
+              </a:rPr>
+              <a:t>Prior knowledge was measured after the </a:t>
+            </a:r>
+            <a:r>
               <a:rPr b="0" lang="en-US" sz="1020" spc="-1" strike="noStrike">
                 <a:solidFill>
                   <a:srgbClr val="475569"/>
@@ -2414,7 +3407,7 @@
                 <a:latin typeface="Arial"/>
                 <a:ea typeface="Arial"/>
               </a:rPr>
-              <a:t>ChatGPT-3.5 only; newer models may differ</a:t>
+              <a:t>intervention.</a:t>
             </a:r>
             <a:endParaRPr b="0" lang="de-AT" sz="1020" spc="-1" strike="noStrike">
               <a:solidFill>
@@ -2423,18 +3416,31 @@
               <a:latin typeface="Arial"/>
             </a:endParaRPr>
           </a:p>
-        </p:txBody>
-      </p:sp>
-      <p:sp>
-        <p:nvSpPr>
-          <p:cNvPr id="34" name="Shape 24"/>
+          <a:p>
+            <a:pPr defTabSz="914400">
+              <a:lnSpc>
+                <a:spcPct val="100000"/>
+              </a:lnSpc>
+            </a:pPr>
+            <a:endParaRPr b="0" lang="de-AT" sz="1020" spc="-1" strike="noStrike">
+              <a:solidFill>
+                <a:srgbClr val="000000"/>
+              </a:solidFill>
+              <a:latin typeface="Arial"/>
+            </a:endParaRPr>
+          </a:p>
+        </p:txBody>
+      </p:sp>
+      <p:sp>
+        <p:nvSpPr>
+          <p:cNvPr id="36" name="Shape 24"/>
           <p:cNvSpPr/>
           <p:nvPr/>
         </p:nvSpPr>
         <p:spPr>
           <a:xfrm>
             <a:off x="6309360" y="4654440"/>
-            <a:ext cx="5440320" cy="1325520"/>
+            <a:ext cx="5439240" cy="1324440"/>
           </a:xfrm>
           <a:prstGeom prst="roundRect">
             <a:avLst>
@@ -2462,6 +3468,11 @@
             <a:noAutofit/>
           </a:bodyPr>
           <a:p>
+            <a:pPr>
+              <a:lnSpc>
+                <a:spcPct val="100000"/>
+              </a:lnSpc>
+            </a:pPr>
             <a:endParaRPr b="0" lang="de-AT" sz="1800" spc="-1" strike="noStrike">
               <a:solidFill>
                 <a:srgbClr val="000000"/>
@@ -2473,14 +3484,14 @@
       </p:sp>
       <p:sp>
         <p:nvSpPr>
-          <p:cNvPr id="35" name="Shape 25"/>
+          <p:cNvPr id="37" name="Shape 25"/>
           <p:cNvSpPr/>
           <p:nvPr/>
         </p:nvSpPr>
         <p:spPr>
           <a:xfrm>
             <a:off x="6309360" y="4654440"/>
-            <a:ext cx="5440320" cy="109440"/>
+            <a:ext cx="5439240" cy="108360"/>
           </a:xfrm>
           <a:prstGeom prst="rect">
             <a:avLst/>
@@ -2506,6 +3517,11 @@
             <a:noAutofit/>
           </a:bodyPr>
           <a:p>
+            <a:pPr>
+              <a:lnSpc>
+                <a:spcPct val="100000"/>
+              </a:lnSpc>
+            </a:pPr>
             <a:endParaRPr b="0" lang="de-AT" sz="1800" spc="-1" strike="noStrike">
               <a:solidFill>
                 <a:srgbClr val="000000"/>
@@ -2517,14 +3533,14 @@
       </p:sp>
       <p:sp>
         <p:nvSpPr>
-          <p:cNvPr id="36" name="Text 26"/>
+          <p:cNvPr id="38" name="Text 26"/>
           <p:cNvSpPr/>
           <p:nvPr/>
         </p:nvSpPr>
         <p:spPr>
           <a:xfrm>
             <a:off x="6473880" y="4818960"/>
-            <a:ext cx="5111280" cy="255600"/>
+            <a:ext cx="5110200" cy="254520"/>
           </a:xfrm>
           <a:prstGeom prst="rect">
             <a:avLst/>
@@ -2574,14 +3590,14 @@
       </p:sp>
       <p:sp>
         <p:nvSpPr>
-          <p:cNvPr id="37" name="Text 27"/>
+          <p:cNvPr id="39" name="Text 27"/>
           <p:cNvSpPr/>
           <p:nvPr/>
         </p:nvSpPr>
         <p:spPr>
           <a:xfrm>
             <a:off x="6583680" y="5184720"/>
-            <a:ext cx="5001480" cy="722160"/>
+            <a:ext cx="5000400" cy="721080"/>
           </a:xfrm>
           <a:prstGeom prst="rect">
             <a:avLst/>
@@ -2674,14 +3690,14 @@
       </p:sp>
       <p:sp>
         <p:nvSpPr>
-          <p:cNvPr id="38" name="Shape 28"/>
+          <p:cNvPr id="40" name="Shape 28"/>
           <p:cNvSpPr/>
           <p:nvPr/>
         </p:nvSpPr>
         <p:spPr>
           <a:xfrm>
             <a:off x="438840" y="6336720"/>
-            <a:ext cx="11310840" cy="273960"/>
+            <a:ext cx="11309760" cy="272880"/>
           </a:xfrm>
           <a:prstGeom prst="rect">
             <a:avLst/>
@@ -2707,6 +3723,11 @@
             <a:noAutofit/>
           </a:bodyPr>
           <a:p>
+            <a:pPr>
+              <a:lnSpc>
+                <a:spcPct val="100000"/>
+              </a:lnSpc>
+            </a:pPr>
             <a:endParaRPr b="0" lang="de-AT" sz="1800" spc="-1" strike="noStrike">
               <a:solidFill>
                 <a:srgbClr val="ffffff"/>
@@ -2718,14 +3739,14 @@
       </p:sp>
       <p:sp>
         <p:nvSpPr>
-          <p:cNvPr id="39" name="Text 29"/>
+          <p:cNvPr id="41" name="Text 29"/>
           <p:cNvSpPr/>
           <p:nvPr/>
         </p:nvSpPr>
         <p:spPr>
           <a:xfrm>
             <a:off x="567000" y="6364080"/>
-            <a:ext cx="10881000" cy="200880"/>
+            <a:ext cx="10879920" cy="199800"/>
           </a:xfrm>
           <a:prstGeom prst="rect">
             <a:avLst/>
@@ -2746,7 +3767,7 @@
             <a:normAutofit/>
           </a:bodyPr>
           <a:p>
-            <a:pPr defTabSz="914400">
+            <a:pPr algn="ctr" defTabSz="914400">
               <a:lnSpc>
                 <a:spcPct val="100000"/>
               </a:lnSpc>
@@ -2762,7 +3783,7 @@
                 <a:latin typeface="Arial"/>
                 <a:ea typeface="Arial"/>
               </a:rPr>
-              <a:t>One-sentence pitch: AI should support thinking, not silently replace it.</a:t>
+              <a:t>AI should support thinking, not silently replace it.</a:t>
             </a:r>
             <a:endParaRPr b="0" lang="de-AT" sz="1150" spc="-1" strike="noStrike">
               <a:solidFill>
@@ -2803,20 +3824,89 @@
           <a:chExt cx="0" cy="0"/>
         </a:xfrm>
       </p:grpSpPr>
-      <p:sp>
-        <p:nvSpPr>
-          <p:cNvPr id="40" name="PlaceHolder 1"/>
-          <p:cNvSpPr>
-            <a:spLocks noGrp="1"/>
-          </p:cNvSpPr>
-          <p:nvPr>
-            <p:ph type="title"/>
-          </p:nvPr>
-        </p:nvSpPr>
-        <p:spPr>
-          <a:xfrm>
-            <a:off x="609480" y="273600"/>
-            <a:ext cx="10972440" cy="1144800"/>
+      <p:pic>
+        <p:nvPicPr>
+          <p:cNvPr id="42" name="" descr=""/>
+          <p:cNvPicPr/>
+          <p:nvPr/>
+        </p:nvPicPr>
+        <p:blipFill>
+          <a:blip r:embed="rId1"/>
+          <a:srcRect l="0" t="10499" r="0" b="0"/>
+          <a:stretch/>
+        </p:blipFill>
+        <p:spPr>
+          <a:xfrm>
+            <a:off x="1429920" y="1080000"/>
+            <a:ext cx="9550080" cy="4962600"/>
+          </a:xfrm>
+          <a:prstGeom prst="rect">
+            <a:avLst/>
+          </a:prstGeom>
+          <a:ln w="0">
+            <a:noFill/>
+          </a:ln>
+        </p:spPr>
+      </p:pic>
+      <p:sp>
+        <p:nvSpPr>
+          <p:cNvPr id="43" name="Shape 3"/>
+          <p:cNvSpPr/>
+          <p:nvPr/>
+        </p:nvSpPr>
+        <p:spPr>
+          <a:xfrm>
+            <a:off x="0" y="0"/>
+            <a:ext cx="12190320" cy="675360"/>
+          </a:xfrm>
+          <a:prstGeom prst="rect">
+            <a:avLst/>
+          </a:prstGeom>
+          <a:solidFill>
+            <a:srgbClr val="ffd500"/>
+          </a:solidFill>
+          <a:ln w="12700">
+            <a:solidFill>
+              <a:srgbClr val="ffd500"/>
+            </a:solidFill>
+            <a:round/>
+          </a:ln>
+        </p:spPr>
+        <p:style>
+          <a:lnRef idx="0"/>
+          <a:fillRef idx="0"/>
+          <a:effectRef idx="0"/>
+          <a:fontRef idx="minor"/>
+        </p:style>
+        <p:txBody>
+          <a:bodyPr lIns="90000" rIns="90000" tIns="45000" bIns="45000" anchor="t">
+            <a:noAutofit/>
+          </a:bodyPr>
+          <a:p>
+            <a:pPr>
+              <a:lnSpc>
+                <a:spcPct val="100000"/>
+              </a:lnSpc>
+            </a:pPr>
+            <a:endParaRPr b="0" lang="de-AT" sz="1800" spc="-1" strike="noStrike">
+              <a:solidFill>
+                <a:srgbClr val="000000"/>
+              </a:solidFill>
+              <a:latin typeface="Arial"/>
+            </a:endParaRPr>
+          </a:p>
+        </p:txBody>
+      </p:sp>
+      <p:sp>
+        <p:nvSpPr>
+          <p:cNvPr id="44" name="Text 8"/>
+          <p:cNvSpPr/>
+          <p:nvPr/>
+        </p:nvSpPr>
+        <p:spPr>
+          <a:xfrm>
+            <a:off x="384120" y="128160"/>
+            <a:ext cx="7953840" cy="401040"/>
           </a:xfrm>
           <a:prstGeom prst="rect">
             <a:avLst/>
@@ -2826,46 +3916,54 @@
             <a:noFill/>
           </a:ln>
         </p:spPr>
+        <p:style>
+          <a:lnRef idx="0"/>
+          <a:fillRef idx="0"/>
+          <a:effectRef idx="0"/>
+          <a:fontRef idx="minor"/>
+        </p:style>
         <p:txBody>
           <a:bodyPr lIns="0" rIns="0" tIns="0" bIns="0" anchor="ctr">
-            <a:noAutofit/>
-          </a:bodyPr>
-          <a:p>
-            <a:pPr indent="0">
-              <a:buNone/>
-            </a:pPr>
-            <a:r>
-              <a:rPr b="0" lang="de-AT" sz="1800" spc="-1" strike="noStrike">
-                <a:solidFill>
-                  <a:schemeClr val="dk1"/>
-                </a:solidFill>
-                <a:latin typeface="Arial"/>
-              </a:rPr>
-              <a:t>4-minute pitch structure</a:t>
-            </a:r>
-            <a:endParaRPr b="0" lang="de-AT" sz="1800" spc="-1" strike="noStrike">
-              <a:solidFill>
-                <a:schemeClr val="dk1"/>
-              </a:solidFill>
-              <a:latin typeface="Arial"/>
-            </a:endParaRPr>
-          </a:p>
-        </p:txBody>
-      </p:sp>
-      <p:sp>
-        <p:nvSpPr>
-          <p:cNvPr id="41" name="PlaceHolder 2"/>
-          <p:cNvSpPr>
-            <a:spLocks noGrp="1"/>
-          </p:cNvSpPr>
-          <p:nvPr>
-            <p:ph/>
-          </p:nvPr>
-        </p:nvSpPr>
-        <p:spPr>
-          <a:xfrm>
-            <a:off x="609480" y="1604520"/>
-            <a:ext cx="10972440" cy="3977280"/>
+            <a:normAutofit/>
+          </a:bodyPr>
+          <a:p>
+            <a:pPr defTabSz="914400">
+              <a:lnSpc>
+                <a:spcPct val="100000"/>
+              </a:lnSpc>
+              <a:tabLst>
+                <a:tab algn="l" pos="0"/>
+              </a:tabLst>
+            </a:pPr>
+            <a:r>
+              <a:rPr b="1" lang="en-US" sz="2400" spc="-1" strike="noStrike">
+                <a:solidFill>
+                  <a:srgbClr val="111111"/>
+                </a:solidFill>
+                <a:latin typeface="Arial"/>
+                <a:ea typeface="Arial"/>
+              </a:rPr>
+              <a:t>Cognitive ease at a cost</a:t>
+            </a:r>
+            <a:endParaRPr b="0" lang="de-AT" sz="2400" spc="-1" strike="noStrike">
+              <a:solidFill>
+                <a:srgbClr val="000000"/>
+              </a:solidFill>
+              <a:latin typeface="Arial"/>
+            </a:endParaRPr>
+          </a:p>
+        </p:txBody>
+      </p:sp>
+      <p:sp>
+        <p:nvSpPr>
+          <p:cNvPr id="45" name="Text 12"/>
+          <p:cNvSpPr/>
+          <p:nvPr/>
+        </p:nvSpPr>
+        <p:spPr>
+          <a:xfrm>
+            <a:off x="9875520" y="191880"/>
+            <a:ext cx="1918800" cy="254520"/>
           </a:xfrm>
           <a:prstGeom prst="rect">
             <a:avLst/>
@@ -2875,146 +3973,2055 @@
             <a:noFill/>
           </a:ln>
         </p:spPr>
-        <p:txBody>
-          <a:bodyPr lIns="0" rIns="0" tIns="0" bIns="0" anchor="t">
-            <a:normAutofit fontScale="77804"/>
-          </a:bodyPr>
-          <a:p>
-            <a:pPr marL="432000" indent="-324000">
-              <a:spcBef>
-                <a:spcPts val="1417"/>
-              </a:spcBef>
-              <a:buClr>
-                <a:srgbClr val="000000"/>
-              </a:buClr>
-              <a:buSzPct val="45000"/>
-              <a:buFont typeface="Wingdings" charset="2"/>
-              <a:buChar char=""/>
-            </a:pPr>
-            <a:r>
-              <a:rPr b="0" lang="de-AT" sz="3200" spc="-1" strike="noStrike">
-                <a:solidFill>
-                  <a:schemeClr val="dk1"/>
-                </a:solidFill>
-                <a:latin typeface="Arial"/>
-              </a:rPr>
-              <a:t>Problem: ChatGPT can make learning tasks easier, but easier does not always mean deeper.</a:t>
-            </a:r>
-            <a:endParaRPr b="0" lang="de-AT" sz="3200" spc="-1" strike="noStrike">
-              <a:solidFill>
-                <a:schemeClr val="dk1"/>
-              </a:solidFill>
-              <a:latin typeface="Arial"/>
-            </a:endParaRPr>
-          </a:p>
-          <a:p>
-            <a:pPr marL="432000" indent="-324000">
-              <a:spcBef>
-                <a:spcPts val="1417"/>
-              </a:spcBef>
-              <a:buClr>
-                <a:srgbClr val="000000"/>
-              </a:buClr>
-              <a:buSzPct val="45000"/>
-              <a:buFont typeface="Wingdings" charset="2"/>
-              <a:buChar char=""/>
-            </a:pPr>
-            <a:r>
-              <a:rPr b="0" lang="de-AT" sz="3200" spc="-1" strike="noStrike">
-                <a:solidFill>
-                  <a:schemeClr val="dk1"/>
-                </a:solidFill>
-                <a:latin typeface="Arial"/>
-              </a:rPr>
-              <a:t>Technology use: Students used either Google search or ChatGPT-3.5 for a 20-minute scientific inquiry task.</a:t>
-            </a:r>
-            <a:endParaRPr b="0" lang="de-AT" sz="3200" spc="-1" strike="noStrike">
-              <a:solidFill>
-                <a:schemeClr val="dk1"/>
-              </a:solidFill>
-              <a:latin typeface="Arial"/>
-            </a:endParaRPr>
-          </a:p>
-          <a:p>
-            <a:pPr marL="432000" indent="-324000">
-              <a:spcBef>
-                <a:spcPts val="1417"/>
-              </a:spcBef>
-              <a:buClr>
-                <a:srgbClr val="000000"/>
-              </a:buClr>
-              <a:buSzPct val="45000"/>
-              <a:buFont typeface="Wingdings" charset="2"/>
-              <a:buChar char=""/>
-            </a:pPr>
-            <a:r>
-              <a:rPr b="0" lang="de-AT" sz="3200" spc="-1" strike="noStrike">
-                <a:solidFill>
-                  <a:schemeClr val="dk1"/>
-                </a:solidFill>
-                <a:latin typeface="Arial"/>
-              </a:rPr>
-              <a:t>Main result: ChatGPT reduced cognitive load, but the reasoning quality of the final justification was weaker.</a:t>
-            </a:r>
-            <a:endParaRPr b="0" lang="de-AT" sz="3200" spc="-1" strike="noStrike">
-              <a:solidFill>
-                <a:schemeClr val="dk1"/>
-              </a:solidFill>
-              <a:latin typeface="Arial"/>
-            </a:endParaRPr>
-          </a:p>
-          <a:p>
-            <a:pPr marL="432000" indent="-324000">
-              <a:spcBef>
-                <a:spcPts val="1417"/>
-              </a:spcBef>
-              <a:buClr>
-                <a:srgbClr val="000000"/>
-              </a:buClr>
-              <a:buSzPct val="45000"/>
-              <a:buFont typeface="Wingdings" charset="2"/>
-              <a:buChar char=""/>
-            </a:pPr>
-            <a:r>
-              <a:rPr b="0" lang="de-AT" sz="3200" spc="-1" strike="noStrike">
-                <a:solidFill>
-                  <a:schemeClr val="dk1"/>
-                </a:solidFill>
-                <a:latin typeface="Arial"/>
-              </a:rPr>
-              <a:t>Critical point: The study has limits, but it makes the AI-in-education debate concrete and measurable.</a:t>
-            </a:r>
-            <a:endParaRPr b="0" lang="de-AT" sz="3200" spc="-1" strike="noStrike">
-              <a:solidFill>
-                <a:schemeClr val="dk1"/>
-              </a:solidFill>
-              <a:latin typeface="Arial"/>
-            </a:endParaRPr>
-          </a:p>
-          <a:p>
-            <a:pPr marL="432000" indent="-324000">
-              <a:spcBef>
-                <a:spcPts val="1417"/>
-              </a:spcBef>
-              <a:buClr>
-                <a:srgbClr val="000000"/>
-              </a:buClr>
-              <a:buSzPct val="45000"/>
-              <a:buFont typeface="Wingdings" charset="2"/>
-              <a:buChar char=""/>
-            </a:pPr>
-            <a:r>
-              <a:rPr b="0" lang="de-AT" sz="3200" spc="-1" strike="noStrike">
-                <a:solidFill>
-                  <a:schemeClr val="dk1"/>
-                </a:solidFill>
-                <a:latin typeface="Arial"/>
-              </a:rPr>
-              <a:t>Takeaway: AI should support thinking, not silently replace it.</a:t>
-            </a:r>
-            <a:endParaRPr b="0" lang="de-AT" sz="3200" spc="-1" strike="noStrike">
-              <a:solidFill>
-                <a:schemeClr val="dk1"/>
+        <p:style>
+          <a:lnRef idx="0"/>
+          <a:fillRef idx="0"/>
+          <a:effectRef idx="0"/>
+          <a:fontRef idx="minor"/>
+        </p:style>
+        <p:txBody>
+          <a:bodyPr lIns="0" rIns="0" tIns="0" bIns="0" anchor="ctr">
+            <a:normAutofit/>
+          </a:bodyPr>
+          <a:p>
+            <a:pPr>
+              <a:lnSpc>
+                <a:spcPct val="100000"/>
+              </a:lnSpc>
+            </a:pPr>
+            <a:endParaRPr b="0" lang="de-AT" sz="1800" spc="-1" strike="noStrike">
+              <a:solidFill>
+                <a:srgbClr val="000000"/>
+              </a:solidFill>
+              <a:latin typeface="Arial"/>
+            </a:endParaRPr>
+          </a:p>
+        </p:txBody>
+      </p:sp>
+      <p:sp>
+        <p:nvSpPr>
+          <p:cNvPr id="46" name="Shape 6"/>
+          <p:cNvSpPr/>
+          <p:nvPr/>
+        </p:nvSpPr>
+        <p:spPr>
+          <a:xfrm>
+            <a:off x="438840" y="6336720"/>
+            <a:ext cx="11309400" cy="272520"/>
+          </a:xfrm>
+          <a:prstGeom prst="rect">
+            <a:avLst/>
+          </a:prstGeom>
+          <a:solidFill>
+            <a:srgbClr val="111111"/>
+          </a:solidFill>
+          <a:ln w="12700">
+            <a:solidFill>
+              <a:srgbClr val="111111"/>
+            </a:solidFill>
+            <a:round/>
+          </a:ln>
+        </p:spPr>
+        <p:style>
+          <a:lnRef idx="0"/>
+          <a:fillRef idx="0"/>
+          <a:effectRef idx="0"/>
+          <a:fontRef idx="minor"/>
+        </p:style>
+        <p:txBody>
+          <a:bodyPr lIns="90000" rIns="90000" tIns="45000" bIns="45000" anchor="t">
+            <a:noAutofit/>
+          </a:bodyPr>
+          <a:p>
+            <a:pPr>
+              <a:lnSpc>
+                <a:spcPct val="100000"/>
+              </a:lnSpc>
+            </a:pPr>
+            <a:endParaRPr b="0" lang="de-AT" sz="1800" spc="-1" strike="noStrike">
+              <a:solidFill>
+                <a:srgbClr val="ffffff"/>
+              </a:solidFill>
+              <a:latin typeface="Arial"/>
+            </a:endParaRPr>
+          </a:p>
+        </p:txBody>
+      </p:sp>
+      <p:sp>
+        <p:nvSpPr>
+          <p:cNvPr id="47" name="Text 16"/>
+          <p:cNvSpPr/>
+          <p:nvPr/>
+        </p:nvSpPr>
+        <p:spPr>
+          <a:xfrm>
+            <a:off x="567000" y="6364080"/>
+            <a:ext cx="10879560" cy="199440"/>
+          </a:xfrm>
+          <a:prstGeom prst="rect">
+            <a:avLst/>
+          </a:prstGeom>
+          <a:noFill/>
+          <a:ln w="0">
+            <a:noFill/>
+          </a:ln>
+        </p:spPr>
+        <p:style>
+          <a:lnRef idx="0"/>
+          <a:fillRef idx="0"/>
+          <a:effectRef idx="0"/>
+          <a:fontRef idx="minor"/>
+        </p:style>
+        <p:txBody>
+          <a:bodyPr lIns="0" rIns="0" tIns="0" bIns="0" anchor="ctr">
+            <a:normAutofit/>
+          </a:bodyPr>
+          <a:p>
+            <a:pPr>
+              <a:lnSpc>
+                <a:spcPct val="100000"/>
+              </a:lnSpc>
+            </a:pPr>
+            <a:endParaRPr b="0" lang="de-AT" sz="1800" spc="-1" strike="noStrike">
+              <a:solidFill>
+                <a:srgbClr val="000000"/>
+              </a:solidFill>
+              <a:latin typeface="Arial"/>
+            </a:endParaRPr>
+          </a:p>
+        </p:txBody>
+      </p:sp>
+      <p:sp>
+        <p:nvSpPr>
+          <p:cNvPr id="48" name=""/>
+          <p:cNvSpPr/>
+          <p:nvPr/>
+        </p:nvSpPr>
+        <p:spPr>
+          <a:xfrm>
+            <a:off x="2557440" y="6336720"/>
+            <a:ext cx="6801840" cy="253080"/>
+          </a:xfrm>
+          <a:prstGeom prst="rect">
+            <a:avLst/>
+          </a:prstGeom>
+          <a:noFill/>
+          <a:ln w="0">
+            <a:noFill/>
+          </a:ln>
+        </p:spPr>
+        <p:style>
+          <a:lnRef idx="0"/>
+          <a:fillRef idx="0"/>
+          <a:effectRef idx="0"/>
+          <a:fontRef idx="minor"/>
+        </p:style>
+        <p:txBody>
+          <a:bodyPr lIns="90000" rIns="90000" tIns="45000" bIns="45000" anchor="t">
+            <a:noAutofit/>
+          </a:bodyPr>
+          <a:p>
+            <a:pPr>
+              <a:lnSpc>
+                <a:spcPct val="100000"/>
+              </a:lnSpc>
+            </a:pPr>
+            <a:r>
+              <a:rPr b="1" lang="en-US" sz="1150" spc="-1" strike="noStrike">
+                <a:solidFill>
+                  <a:srgbClr val="ffffff"/>
+                </a:solidFill>
+                <a:latin typeface="Arial"/>
+                <a:ea typeface="Arial"/>
+              </a:rPr>
+              <a:t>Lower effort is not automatically better learning: lower GCL may indicate less deep processing.</a:t>
+            </a:r>
+            <a:endParaRPr b="0" lang="de-AT" sz="1150" spc="-1" strike="noStrike">
+              <a:solidFill>
+                <a:srgbClr val="000000"/>
+              </a:solidFill>
+              <a:latin typeface="Arial"/>
+            </a:endParaRPr>
+          </a:p>
+        </p:txBody>
+      </p:sp>
+    </p:spTree>
+  </p:cSld>
+  <mc:AlternateContent>
+    <mc:Choice Requires="p14">
+      <p:transition spd="slow" p14:dur="2000"/>
+    </mc:Choice>
+    <mc:Fallback>
+      <p:transition spd="slow"/>
+    </mc:Fallback>
+  </mc:AlternateContent>
+</p:sld>
+</file>
+
+<file path=ppt/slides/slide3.xml><?xml version="1.0" encoding="utf-8"?>
+<p:sld xmlns:a="http://schemas.openxmlformats.org/drawingml/2006/main" xmlns:p="http://schemas.openxmlformats.org/presentationml/2006/main" xmlns:r="http://schemas.openxmlformats.org/officeDocument/2006/relationships" xmlns:p14="http://schemas.microsoft.com/office/powerpoint/2010/main" xmlns:p15="http://schemas.microsoft.com/office/powerpoint/2012/main" xmlns:mc="http://schemas.openxmlformats.org/markup-compatibility/2006">
+  <p:cSld>
+    <p:bg>
+      <p:bgPr>
+        <a:solidFill>
+          <a:srgbClr val="ffffff"/>
+        </a:solidFill>
+      </p:bgPr>
+    </p:bg>
+    <p:spTree>
+      <p:nvGrpSpPr>
+        <p:cNvPr id="1" name=""/>
+        <p:cNvGrpSpPr/>
+        <p:nvPr/>
+      </p:nvGrpSpPr>
+      <p:grpSpPr>
+        <a:xfrm>
+          <a:off x="0" y="0"/>
+          <a:ext cx="0" cy="0"/>
+          <a:chOff x="0" y="0"/>
+          <a:chExt cx="0" cy="0"/>
+        </a:xfrm>
+      </p:grpSpPr>
+      <p:sp>
+        <p:nvSpPr>
+          <p:cNvPr id="49" name="Shape 42"/>
+          <p:cNvSpPr/>
+          <p:nvPr/>
+        </p:nvSpPr>
+        <p:spPr>
+          <a:xfrm>
+            <a:off x="0" y="0"/>
+            <a:ext cx="12189960" cy="675000"/>
+          </a:xfrm>
+          <a:prstGeom prst="rect">
+            <a:avLst/>
+          </a:prstGeom>
+          <a:solidFill>
+            <a:srgbClr val="ffd500"/>
+          </a:solidFill>
+          <a:ln w="12700">
+            <a:solidFill>
+              <a:srgbClr val="ffd500"/>
+            </a:solidFill>
+            <a:round/>
+          </a:ln>
+        </p:spPr>
+        <p:style>
+          <a:lnRef idx="0"/>
+          <a:fillRef idx="0"/>
+          <a:effectRef idx="0"/>
+          <a:fontRef idx="minor"/>
+        </p:style>
+        <p:txBody>
+          <a:bodyPr lIns="90000" rIns="90000" tIns="45000" bIns="45000" anchor="t">
+            <a:noAutofit/>
+          </a:bodyPr>
+          <a:p>
+            <a:pPr>
+              <a:lnSpc>
+                <a:spcPct val="100000"/>
+              </a:lnSpc>
+            </a:pPr>
+            <a:endParaRPr b="0" lang="de-AT" sz="1800" spc="-1" strike="noStrike">
+              <a:solidFill>
+                <a:srgbClr val="000000"/>
+              </a:solidFill>
+              <a:latin typeface="Arial"/>
+            </a:endParaRPr>
+          </a:p>
+        </p:txBody>
+      </p:sp>
+      <p:sp>
+        <p:nvSpPr>
+          <p:cNvPr id="50" name="Text 9"/>
+          <p:cNvSpPr/>
+          <p:nvPr/>
+        </p:nvSpPr>
+        <p:spPr>
+          <a:xfrm>
+            <a:off x="384120" y="128160"/>
+            <a:ext cx="7953480" cy="400680"/>
+          </a:xfrm>
+          <a:prstGeom prst="rect">
+            <a:avLst/>
+          </a:prstGeom>
+          <a:noFill/>
+          <a:ln w="0">
+            <a:noFill/>
+          </a:ln>
+        </p:spPr>
+        <p:style>
+          <a:lnRef idx="0"/>
+          <a:fillRef idx="0"/>
+          <a:effectRef idx="0"/>
+          <a:fontRef idx="minor"/>
+        </p:style>
+        <p:txBody>
+          <a:bodyPr lIns="0" rIns="0" tIns="0" bIns="0" anchor="ctr">
+            <a:normAutofit/>
+          </a:bodyPr>
+          <a:p>
+            <a:pPr defTabSz="914400">
+              <a:lnSpc>
+                <a:spcPct val="100000"/>
+              </a:lnSpc>
+              <a:tabLst>
+                <a:tab algn="l" pos="0"/>
+              </a:tabLst>
+            </a:pPr>
+            <a:r>
+              <a:rPr b="1" lang="en-US" sz="2400" spc="-1" strike="noStrike">
+                <a:solidFill>
+                  <a:srgbClr val="111111"/>
+                </a:solidFill>
+                <a:latin typeface="Arial"/>
+                <a:ea typeface="Arial"/>
+              </a:rPr>
+              <a:t>Study design: quality points</a:t>
+            </a:r>
+            <a:endParaRPr b="0" lang="de-AT" sz="2400" spc="-1" strike="noStrike">
+              <a:solidFill>
+                <a:srgbClr val="000000"/>
+              </a:solidFill>
+              <a:latin typeface="Arial"/>
+            </a:endParaRPr>
+          </a:p>
+        </p:txBody>
+      </p:sp>
+      <p:sp>
+        <p:nvSpPr>
+          <p:cNvPr id="51" name="Text 13"/>
+          <p:cNvSpPr/>
+          <p:nvPr/>
+        </p:nvSpPr>
+        <p:spPr>
+          <a:xfrm>
+            <a:off x="384120" y="804600"/>
+            <a:ext cx="11245320" cy="382320"/>
+          </a:xfrm>
+          <a:prstGeom prst="rect">
+            <a:avLst/>
+          </a:prstGeom>
+          <a:noFill/>
+          <a:ln w="0">
+            <a:noFill/>
+          </a:ln>
+        </p:spPr>
+        <p:style>
+          <a:lnRef idx="0"/>
+          <a:fillRef idx="0"/>
+          <a:effectRef idx="0"/>
+          <a:fontRef idx="minor"/>
+        </p:style>
+        <p:txBody>
+          <a:bodyPr lIns="0" rIns="0" tIns="0" bIns="0" anchor="ctr">
+            <a:normAutofit/>
+          </a:bodyPr>
+          <a:p>
+            <a:pPr defTabSz="914400">
+              <a:lnSpc>
+                <a:spcPct val="100000"/>
+              </a:lnSpc>
+              <a:tabLst>
+                <a:tab algn="l" pos="0"/>
+              </a:tabLst>
+            </a:pPr>
+            <a:r>
+              <a:rPr b="0" lang="en-US" sz="1450" spc="-1" strike="noStrike">
+                <a:solidFill>
+                  <a:srgbClr val="111111"/>
+                </a:solidFill>
+                <a:latin typeface="Arial"/>
+                <a:ea typeface="Arial"/>
+              </a:rPr>
+              <a:t>What is methodologically strong, and what should be interpreted carefully?</a:t>
+            </a:r>
+            <a:endParaRPr b="0" lang="de-AT" sz="1450" spc="-1" strike="noStrike">
+              <a:solidFill>
+                <a:srgbClr val="000000"/>
+              </a:solidFill>
+              <a:latin typeface="Arial"/>
+            </a:endParaRPr>
+          </a:p>
+        </p:txBody>
+      </p:sp>
+      <p:sp>
+        <p:nvSpPr>
+          <p:cNvPr id="52" name="Shape 43"/>
+          <p:cNvSpPr/>
+          <p:nvPr/>
+        </p:nvSpPr>
+        <p:spPr>
+          <a:xfrm>
+            <a:off x="438840" y="6336720"/>
+            <a:ext cx="11309400" cy="272520"/>
+          </a:xfrm>
+          <a:prstGeom prst="rect">
+            <a:avLst/>
+          </a:prstGeom>
+          <a:solidFill>
+            <a:srgbClr val="111111"/>
+          </a:solidFill>
+          <a:ln w="12700">
+            <a:solidFill>
+              <a:srgbClr val="111111"/>
+            </a:solidFill>
+            <a:round/>
+          </a:ln>
+        </p:spPr>
+        <p:style>
+          <a:lnRef idx="0"/>
+          <a:fillRef idx="0"/>
+          <a:effectRef idx="0"/>
+          <a:fontRef idx="minor"/>
+        </p:style>
+        <p:txBody>
+          <a:bodyPr lIns="90000" rIns="90000" tIns="45000" bIns="45000" anchor="t">
+            <a:noAutofit/>
+          </a:bodyPr>
+          <a:p>
+            <a:pPr>
+              <a:lnSpc>
+                <a:spcPct val="100000"/>
+              </a:lnSpc>
+            </a:pPr>
+            <a:endParaRPr b="0" lang="de-AT" sz="1800" spc="-1" strike="noStrike">
+              <a:solidFill>
+                <a:srgbClr val="ffffff"/>
+              </a:solidFill>
+              <a:latin typeface="Arial"/>
+            </a:endParaRPr>
+          </a:p>
+        </p:txBody>
+      </p:sp>
+      <p:sp>
+        <p:nvSpPr>
+          <p:cNvPr id="53" name="Text 17"/>
+          <p:cNvSpPr/>
+          <p:nvPr/>
+        </p:nvSpPr>
+        <p:spPr>
+          <a:xfrm>
+            <a:off x="567000" y="6364080"/>
+            <a:ext cx="10879560" cy="199440"/>
+          </a:xfrm>
+          <a:prstGeom prst="rect">
+            <a:avLst/>
+          </a:prstGeom>
+          <a:noFill/>
+          <a:ln w="0">
+            <a:noFill/>
+          </a:ln>
+        </p:spPr>
+        <p:style>
+          <a:lnRef idx="0"/>
+          <a:fillRef idx="0"/>
+          <a:effectRef idx="0"/>
+          <a:fontRef idx="minor"/>
+        </p:style>
+        <p:txBody>
+          <a:bodyPr lIns="0" rIns="0" tIns="0" bIns="0" anchor="ctr">
+            <a:normAutofit/>
+          </a:bodyPr>
+          <a:p>
+            <a:pPr algn="ctr" defTabSz="914400">
+              <a:lnSpc>
+                <a:spcPct val="100000"/>
+              </a:lnSpc>
+              <a:tabLst>
+                <a:tab algn="l" pos="0"/>
+              </a:tabLst>
+            </a:pPr>
+            <a:endParaRPr b="0" lang="de-AT" sz="1800" spc="-1" strike="noStrike">
+              <a:solidFill>
+                <a:srgbClr val="000000"/>
+              </a:solidFill>
+              <a:latin typeface="Arial"/>
+            </a:endParaRPr>
+          </a:p>
+        </p:txBody>
+      </p:sp>
+      <p:sp>
+        <p:nvSpPr>
+          <p:cNvPr id="54" name="Shape 46"/>
+          <p:cNvSpPr/>
+          <p:nvPr/>
+        </p:nvSpPr>
+        <p:spPr>
+          <a:xfrm>
+            <a:off x="441360" y="1417320"/>
+            <a:ext cx="5438880" cy="1324080"/>
+          </a:xfrm>
+          <a:prstGeom prst="rect">
+            <a:avLst/>
+          </a:prstGeom>
+          <a:solidFill>
+            <a:srgbClr val="ffffff"/>
+          </a:solidFill>
+          <a:ln w="12700">
+            <a:solidFill>
+              <a:srgbClr val="c6c6c6"/>
+            </a:solidFill>
+            <a:round/>
+          </a:ln>
+        </p:spPr>
+        <p:style>
+          <a:lnRef idx="0"/>
+          <a:fillRef idx="0"/>
+          <a:effectRef idx="0"/>
+          <a:fontRef idx="minor"/>
+        </p:style>
+        <p:txBody>
+          <a:bodyPr lIns="90000" rIns="90000" tIns="45000" bIns="45000" anchor="t">
+            <a:noAutofit/>
+          </a:bodyPr>
+          <a:p>
+            <a:pPr>
+              <a:lnSpc>
+                <a:spcPct val="100000"/>
+              </a:lnSpc>
+            </a:pPr>
+            <a:endParaRPr b="0" lang="de-AT" sz="1800" spc="-1" strike="noStrike">
+              <a:solidFill>
+                <a:srgbClr val="000000"/>
+              </a:solidFill>
+              <a:latin typeface="Arial"/>
+            </a:endParaRPr>
+          </a:p>
+        </p:txBody>
+      </p:sp>
+      <p:sp>
+        <p:nvSpPr>
+          <p:cNvPr id="55" name="Shape 47"/>
+          <p:cNvSpPr/>
+          <p:nvPr/>
+        </p:nvSpPr>
+        <p:spPr>
+          <a:xfrm>
+            <a:off x="441360" y="1417320"/>
+            <a:ext cx="5438880" cy="108000"/>
+          </a:xfrm>
+          <a:prstGeom prst="rect">
+            <a:avLst/>
+          </a:prstGeom>
+          <a:solidFill>
+            <a:srgbClr val="ffd500"/>
+          </a:solidFill>
+          <a:ln w="12700">
+            <a:solidFill>
+              <a:srgbClr val="ffd500"/>
+            </a:solidFill>
+            <a:round/>
+          </a:ln>
+        </p:spPr>
+        <p:style>
+          <a:lnRef idx="0"/>
+          <a:fillRef idx="0"/>
+          <a:effectRef idx="0"/>
+          <a:fontRef idx="minor"/>
+        </p:style>
+        <p:txBody>
+          <a:bodyPr lIns="90000" rIns="90000" tIns="45000" bIns="45000" anchor="t">
+            <a:noAutofit/>
+          </a:bodyPr>
+          <a:p>
+            <a:pPr>
+              <a:lnSpc>
+                <a:spcPct val="100000"/>
+              </a:lnSpc>
+            </a:pPr>
+            <a:endParaRPr b="0" lang="de-AT" sz="1800" spc="-1" strike="noStrike">
+              <a:solidFill>
+                <a:srgbClr val="000000"/>
+              </a:solidFill>
+              <a:latin typeface="Arial"/>
+            </a:endParaRPr>
+          </a:p>
+        </p:txBody>
+      </p:sp>
+      <p:sp>
+        <p:nvSpPr>
+          <p:cNvPr id="56" name="Text 30"/>
+          <p:cNvSpPr/>
+          <p:nvPr/>
+        </p:nvSpPr>
+        <p:spPr>
+          <a:xfrm>
+            <a:off x="605880" y="1581840"/>
+            <a:ext cx="5109840" cy="254160"/>
+          </a:xfrm>
+          <a:prstGeom prst="rect">
+            <a:avLst/>
+          </a:prstGeom>
+          <a:noFill/>
+          <a:ln w="0">
+            <a:noFill/>
+          </a:ln>
+        </p:spPr>
+        <p:style>
+          <a:lnRef idx="0"/>
+          <a:fillRef idx="0"/>
+          <a:effectRef idx="0"/>
+          <a:fontRef idx="minor"/>
+        </p:style>
+        <p:txBody>
+          <a:bodyPr lIns="0" rIns="0" tIns="0" bIns="0" anchor="ctr">
+            <a:normAutofit/>
+          </a:bodyPr>
+          <a:p>
+            <a:pPr defTabSz="914400">
+              <a:lnSpc>
+                <a:spcPct val="100000"/>
+              </a:lnSpc>
+              <a:tabLst>
+                <a:tab algn="l" pos="0"/>
+              </a:tabLst>
+            </a:pPr>
+            <a:r>
+              <a:rPr b="1" lang="en-US" sz="1450" spc="-1" strike="noStrike">
+                <a:solidFill>
+                  <a:srgbClr val="111111"/>
+                </a:solidFill>
+                <a:latin typeface="Arial"/>
+                <a:ea typeface="Arial"/>
+              </a:rPr>
+              <a:t>Strong: controlled task</a:t>
+            </a:r>
+            <a:endParaRPr b="0" lang="de-AT" sz="1450" spc="-1" strike="noStrike">
+              <a:solidFill>
+                <a:srgbClr val="000000"/>
+              </a:solidFill>
+              <a:latin typeface="Arial"/>
+            </a:endParaRPr>
+          </a:p>
+        </p:txBody>
+      </p:sp>
+      <p:sp>
+        <p:nvSpPr>
+          <p:cNvPr id="57" name="Text 46"/>
+          <p:cNvSpPr/>
+          <p:nvPr/>
+        </p:nvSpPr>
+        <p:spPr>
+          <a:xfrm>
+            <a:off x="715680" y="1947600"/>
+            <a:ext cx="5000040" cy="720720"/>
+          </a:xfrm>
+          <a:prstGeom prst="rect">
+            <a:avLst/>
+          </a:prstGeom>
+          <a:noFill/>
+          <a:ln w="0">
+            <a:noFill/>
+          </a:ln>
+        </p:spPr>
+        <p:style>
+          <a:lnRef idx="0"/>
+          <a:fillRef idx="0"/>
+          <a:effectRef idx="0"/>
+          <a:fontRef idx="minor"/>
+        </p:style>
+        <p:txBody>
+          <a:bodyPr lIns="0" rIns="0" tIns="0" bIns="0" anchor="ctr">
+            <a:normAutofit/>
+          </a:bodyPr>
+          <a:p>
+            <a:pPr defTabSz="914400">
+              <a:lnSpc>
+                <a:spcPct val="100000"/>
+              </a:lnSpc>
+            </a:pPr>
+            <a:r>
+              <a:rPr b="0" lang="en-US" sz="1020" spc="-1" strike="noStrike">
+                <a:solidFill>
+                  <a:srgbClr val="111111"/>
+                </a:solidFill>
+                <a:latin typeface="Arial"/>
+                <a:ea typeface="Arial"/>
+              </a:rPr>
+              <a:t>Same task and same time</a:t>
+            </a:r>
+            <a:endParaRPr b="0" lang="de-AT" sz="1020" spc="-1" strike="noStrike">
+              <a:solidFill>
+                <a:srgbClr val="000000"/>
+              </a:solidFill>
+              <a:latin typeface="Arial"/>
+            </a:endParaRPr>
+          </a:p>
+          <a:p>
+            <a:pPr defTabSz="914400">
+              <a:lnSpc>
+                <a:spcPct val="100000"/>
+              </a:lnSpc>
+            </a:pPr>
+            <a:r>
+              <a:rPr b="0" lang="en-US" sz="1020" spc="-1" strike="noStrike">
+                <a:solidFill>
+                  <a:srgbClr val="111111"/>
+                </a:solidFill>
+                <a:latin typeface="Arial"/>
+                <a:ea typeface="Arial"/>
+              </a:rPr>
+              <a:t>Same lab environment</a:t>
+            </a:r>
+            <a:endParaRPr b="0" lang="de-AT" sz="1020" spc="-1" strike="noStrike">
+              <a:solidFill>
+                <a:srgbClr val="000000"/>
+              </a:solidFill>
+              <a:latin typeface="Arial"/>
+            </a:endParaRPr>
+          </a:p>
+          <a:p>
+            <a:pPr defTabSz="914400">
+              <a:lnSpc>
+                <a:spcPct val="100000"/>
+              </a:lnSpc>
+            </a:pPr>
+            <a:r>
+              <a:rPr b="0" lang="en-US" sz="1020" spc="-1" strike="noStrike">
+                <a:solidFill>
+                  <a:srgbClr val="111111"/>
+                </a:solidFill>
+                <a:latin typeface="Arial"/>
+                <a:ea typeface="Arial"/>
+              </a:rPr>
+              <a:t>University computers</a:t>
+            </a:r>
+            <a:endParaRPr b="0" lang="de-AT" sz="1020" spc="-1" strike="noStrike">
+              <a:solidFill>
+                <a:srgbClr val="000000"/>
+              </a:solidFill>
+              <a:latin typeface="Arial"/>
+            </a:endParaRPr>
+          </a:p>
+        </p:txBody>
+      </p:sp>
+      <p:sp>
+        <p:nvSpPr>
+          <p:cNvPr id="58" name="Shape 48"/>
+          <p:cNvSpPr/>
+          <p:nvPr/>
+        </p:nvSpPr>
+        <p:spPr>
+          <a:xfrm>
+            <a:off x="438840" y="3035880"/>
+            <a:ext cx="5438880" cy="1324080"/>
+          </a:xfrm>
+          <a:prstGeom prst="rect">
+            <a:avLst/>
+          </a:prstGeom>
+          <a:solidFill>
+            <a:srgbClr val="ffffff"/>
+          </a:solidFill>
+          <a:ln w="12700">
+            <a:solidFill>
+              <a:srgbClr val="c6c6c6"/>
+            </a:solidFill>
+            <a:round/>
+          </a:ln>
+        </p:spPr>
+        <p:style>
+          <a:lnRef idx="0"/>
+          <a:fillRef idx="0"/>
+          <a:effectRef idx="0"/>
+          <a:fontRef idx="minor"/>
+        </p:style>
+        <p:txBody>
+          <a:bodyPr lIns="90000" rIns="90000" tIns="45000" bIns="45000" anchor="t">
+            <a:noAutofit/>
+          </a:bodyPr>
+          <a:p>
+            <a:pPr>
+              <a:lnSpc>
+                <a:spcPct val="100000"/>
+              </a:lnSpc>
+            </a:pPr>
+            <a:endParaRPr b="0" lang="de-AT" sz="1800" spc="-1" strike="noStrike">
+              <a:solidFill>
+                <a:srgbClr val="000000"/>
+              </a:solidFill>
+              <a:latin typeface="Arial"/>
+            </a:endParaRPr>
+          </a:p>
+        </p:txBody>
+      </p:sp>
+      <p:sp>
+        <p:nvSpPr>
+          <p:cNvPr id="59" name="Shape 49"/>
+          <p:cNvSpPr/>
+          <p:nvPr/>
+        </p:nvSpPr>
+        <p:spPr>
+          <a:xfrm>
+            <a:off x="438840" y="3035880"/>
+            <a:ext cx="5438880" cy="108000"/>
+          </a:xfrm>
+          <a:prstGeom prst="rect">
+            <a:avLst/>
+          </a:prstGeom>
+          <a:solidFill>
+            <a:srgbClr val="ffd500"/>
+          </a:solidFill>
+          <a:ln w="12700">
+            <a:solidFill>
+              <a:srgbClr val="ffd500"/>
+            </a:solidFill>
+            <a:round/>
+          </a:ln>
+        </p:spPr>
+        <p:style>
+          <a:lnRef idx="0"/>
+          <a:fillRef idx="0"/>
+          <a:effectRef idx="0"/>
+          <a:fontRef idx="minor"/>
+        </p:style>
+        <p:txBody>
+          <a:bodyPr lIns="90000" rIns="90000" tIns="45000" bIns="45000" anchor="t">
+            <a:noAutofit/>
+          </a:bodyPr>
+          <a:p>
+            <a:pPr>
+              <a:lnSpc>
+                <a:spcPct val="100000"/>
+              </a:lnSpc>
+            </a:pPr>
+            <a:endParaRPr b="0" lang="de-AT" sz="1800" spc="-1" strike="noStrike">
+              <a:solidFill>
+                <a:srgbClr val="000000"/>
+              </a:solidFill>
+              <a:latin typeface="Arial"/>
+            </a:endParaRPr>
+          </a:p>
+        </p:txBody>
+      </p:sp>
+      <p:sp>
+        <p:nvSpPr>
+          <p:cNvPr id="60" name="Text 47"/>
+          <p:cNvSpPr/>
+          <p:nvPr/>
+        </p:nvSpPr>
+        <p:spPr>
+          <a:xfrm>
+            <a:off x="603360" y="3200400"/>
+            <a:ext cx="5109840" cy="254160"/>
+          </a:xfrm>
+          <a:prstGeom prst="rect">
+            <a:avLst/>
+          </a:prstGeom>
+          <a:noFill/>
+          <a:ln w="0">
+            <a:noFill/>
+          </a:ln>
+        </p:spPr>
+        <p:style>
+          <a:lnRef idx="0"/>
+          <a:fillRef idx="0"/>
+          <a:effectRef idx="0"/>
+          <a:fontRef idx="minor"/>
+        </p:style>
+        <p:txBody>
+          <a:bodyPr lIns="0" rIns="0" tIns="0" bIns="0" anchor="ctr">
+            <a:normAutofit/>
+          </a:bodyPr>
+          <a:p>
+            <a:pPr defTabSz="914400">
+              <a:lnSpc>
+                <a:spcPct val="100000"/>
+              </a:lnSpc>
+              <a:tabLst>
+                <a:tab algn="l" pos="0"/>
+              </a:tabLst>
+            </a:pPr>
+            <a:r>
+              <a:rPr b="1" lang="en-US" sz="1450" spc="-1" strike="noStrike">
+                <a:solidFill>
+                  <a:srgbClr val="111111"/>
+                </a:solidFill>
+                <a:latin typeface="Arial"/>
+                <a:ea typeface="Arial"/>
+              </a:rPr>
+              <a:t>Prior knowledge handling</a:t>
+            </a:r>
+            <a:endParaRPr b="0" lang="de-AT" sz="1450" spc="-1" strike="noStrike">
+              <a:solidFill>
+                <a:srgbClr val="000000"/>
+              </a:solidFill>
+              <a:latin typeface="Arial"/>
+            </a:endParaRPr>
+          </a:p>
+        </p:txBody>
+      </p:sp>
+      <p:sp>
+        <p:nvSpPr>
+          <p:cNvPr id="61" name="Text 48"/>
+          <p:cNvSpPr/>
+          <p:nvPr/>
+        </p:nvSpPr>
+        <p:spPr>
+          <a:xfrm>
+            <a:off x="713160" y="3566160"/>
+            <a:ext cx="5000040" cy="720720"/>
+          </a:xfrm>
+          <a:prstGeom prst="rect">
+            <a:avLst/>
+          </a:prstGeom>
+          <a:noFill/>
+          <a:ln w="0">
+            <a:noFill/>
+          </a:ln>
+        </p:spPr>
+        <p:style>
+          <a:lnRef idx="0"/>
+          <a:fillRef idx="0"/>
+          <a:effectRef idx="0"/>
+          <a:fontRef idx="minor"/>
+        </p:style>
+        <p:txBody>
+          <a:bodyPr lIns="0" rIns="0" tIns="0" bIns="0" anchor="ctr">
+            <a:normAutofit/>
+          </a:bodyPr>
+          <a:p>
+            <a:pPr defTabSz="914400">
+              <a:lnSpc>
+                <a:spcPct val="100000"/>
+              </a:lnSpc>
+            </a:pPr>
+            <a:r>
+              <a:rPr b="0" lang="en-US" sz="1020" spc="-1" strike="noStrike">
+                <a:solidFill>
+                  <a:srgbClr val="111111"/>
+                </a:solidFill>
+                <a:latin typeface="Arial"/>
+                <a:ea typeface="Arial"/>
+              </a:rPr>
+              <a:t>Medicine, pharmacy and biology excluded</a:t>
+            </a:r>
+            <a:endParaRPr b="0" lang="de-AT" sz="1020" spc="-1" strike="noStrike">
+              <a:solidFill>
+                <a:srgbClr val="000000"/>
+              </a:solidFill>
+              <a:latin typeface="Arial"/>
+            </a:endParaRPr>
+          </a:p>
+          <a:p>
+            <a:pPr defTabSz="914400">
+              <a:lnSpc>
+                <a:spcPct val="100000"/>
+              </a:lnSpc>
+            </a:pPr>
+            <a:r>
+              <a:rPr b="0" lang="en-US" sz="1020" spc="-1" strike="noStrike">
+                <a:solidFill>
+                  <a:srgbClr val="111111"/>
+                </a:solidFill>
+                <a:latin typeface="Arial"/>
+                <a:ea typeface="Arial"/>
+              </a:rPr>
+              <a:t>Prior knowledge measured but afterwards</a:t>
+            </a:r>
+            <a:endParaRPr b="0" lang="de-AT" sz="1020" spc="-1" strike="noStrike">
+              <a:solidFill>
+                <a:srgbClr val="000000"/>
+              </a:solidFill>
+              <a:latin typeface="Arial"/>
+            </a:endParaRPr>
+          </a:p>
+          <a:p>
+            <a:pPr defTabSz="914400">
+              <a:lnSpc>
+                <a:spcPct val="100000"/>
+              </a:lnSpc>
+            </a:pPr>
+            <a:r>
+              <a:rPr b="0" lang="en-US" sz="1020" spc="-1" strike="noStrike">
+                <a:solidFill>
+                  <a:srgbClr val="111111"/>
+                </a:solidFill>
+                <a:latin typeface="Arial"/>
+                <a:ea typeface="Arial"/>
+              </a:rPr>
+              <a:t>Controlled in ANCOVAs</a:t>
+            </a:r>
+            <a:endParaRPr b="0" lang="de-AT" sz="1020" spc="-1" strike="noStrike">
+              <a:solidFill>
+                <a:srgbClr val="000000"/>
+              </a:solidFill>
+              <a:latin typeface="Arial"/>
+            </a:endParaRPr>
+          </a:p>
+        </p:txBody>
+      </p:sp>
+      <p:sp>
+        <p:nvSpPr>
+          <p:cNvPr id="62" name="Shape 50"/>
+          <p:cNvSpPr/>
+          <p:nvPr/>
+        </p:nvSpPr>
+        <p:spPr>
+          <a:xfrm>
+            <a:off x="6309360" y="3035880"/>
+            <a:ext cx="5438880" cy="1324080"/>
+          </a:xfrm>
+          <a:prstGeom prst="rect">
+            <a:avLst/>
+          </a:prstGeom>
+          <a:solidFill>
+            <a:srgbClr val="ffffff"/>
+          </a:solidFill>
+          <a:ln w="12700">
+            <a:solidFill>
+              <a:srgbClr val="c6c6c6"/>
+            </a:solidFill>
+            <a:round/>
+          </a:ln>
+        </p:spPr>
+        <p:style>
+          <a:lnRef idx="0"/>
+          <a:fillRef idx="0"/>
+          <a:effectRef idx="0"/>
+          <a:fontRef idx="minor"/>
+        </p:style>
+        <p:txBody>
+          <a:bodyPr lIns="90000" rIns="90000" tIns="45000" bIns="45000" anchor="t">
+            <a:noAutofit/>
+          </a:bodyPr>
+          <a:p>
+            <a:pPr>
+              <a:lnSpc>
+                <a:spcPct val="100000"/>
+              </a:lnSpc>
+            </a:pPr>
+            <a:endParaRPr b="0" lang="de-AT" sz="1800" spc="-1" strike="noStrike">
+              <a:solidFill>
+                <a:srgbClr val="000000"/>
+              </a:solidFill>
+              <a:latin typeface="Arial"/>
+            </a:endParaRPr>
+          </a:p>
+        </p:txBody>
+      </p:sp>
+      <p:sp>
+        <p:nvSpPr>
+          <p:cNvPr id="63" name="Shape 51"/>
+          <p:cNvSpPr/>
+          <p:nvPr/>
+        </p:nvSpPr>
+        <p:spPr>
+          <a:xfrm>
+            <a:off x="6309360" y="3035880"/>
+            <a:ext cx="5438880" cy="108000"/>
+          </a:xfrm>
+          <a:prstGeom prst="rect">
+            <a:avLst/>
+          </a:prstGeom>
+          <a:solidFill>
+            <a:srgbClr val="ffd500"/>
+          </a:solidFill>
+          <a:ln w="12700">
+            <a:solidFill>
+              <a:srgbClr val="ffd500"/>
+            </a:solidFill>
+            <a:round/>
+          </a:ln>
+        </p:spPr>
+        <p:style>
+          <a:lnRef idx="0"/>
+          <a:fillRef idx="0"/>
+          <a:effectRef idx="0"/>
+          <a:fontRef idx="minor"/>
+        </p:style>
+        <p:txBody>
+          <a:bodyPr lIns="90000" rIns="90000" tIns="45000" bIns="45000" anchor="t">
+            <a:noAutofit/>
+          </a:bodyPr>
+          <a:p>
+            <a:pPr>
+              <a:lnSpc>
+                <a:spcPct val="100000"/>
+              </a:lnSpc>
+            </a:pPr>
+            <a:endParaRPr b="0" lang="de-AT" sz="1800" spc="-1" strike="noStrike">
+              <a:solidFill>
+                <a:srgbClr val="000000"/>
+              </a:solidFill>
+              <a:latin typeface="Arial"/>
+            </a:endParaRPr>
+          </a:p>
+        </p:txBody>
+      </p:sp>
+      <p:sp>
+        <p:nvSpPr>
+          <p:cNvPr id="64" name="Text 49"/>
+          <p:cNvSpPr/>
+          <p:nvPr/>
+        </p:nvSpPr>
+        <p:spPr>
+          <a:xfrm>
+            <a:off x="6617880" y="3272400"/>
+            <a:ext cx="5109840" cy="254160"/>
+          </a:xfrm>
+          <a:prstGeom prst="rect">
+            <a:avLst/>
+          </a:prstGeom>
+          <a:noFill/>
+          <a:ln w="0">
+            <a:noFill/>
+          </a:ln>
+        </p:spPr>
+        <p:style>
+          <a:lnRef idx="0"/>
+          <a:fillRef idx="0"/>
+          <a:effectRef idx="0"/>
+          <a:fontRef idx="minor"/>
+        </p:style>
+        <p:txBody>
+          <a:bodyPr lIns="0" rIns="0" tIns="0" bIns="0" anchor="ctr">
+            <a:normAutofit/>
+          </a:bodyPr>
+          <a:p>
+            <a:pPr defTabSz="914400">
+              <a:lnSpc>
+                <a:spcPct val="100000"/>
+              </a:lnSpc>
+              <a:tabLst>
+                <a:tab algn="l" pos="0"/>
+              </a:tabLst>
+            </a:pPr>
+            <a:r>
+              <a:rPr b="1" lang="en-US" sz="1450" spc="-1" strike="noStrike">
+                <a:solidFill>
+                  <a:srgbClr val="111111"/>
+                </a:solidFill>
+                <a:latin typeface="Arial"/>
+                <a:ea typeface="Arial"/>
+              </a:rPr>
+              <a:t>Strong: coding quality</a:t>
+            </a:r>
+            <a:endParaRPr b="0" lang="de-AT" sz="1450" spc="-1" strike="noStrike">
+              <a:solidFill>
+                <a:srgbClr val="000000"/>
+              </a:solidFill>
+              <a:latin typeface="Arial"/>
+            </a:endParaRPr>
+          </a:p>
+        </p:txBody>
+      </p:sp>
+      <p:sp>
+        <p:nvSpPr>
+          <p:cNvPr id="65" name="Text 50"/>
+          <p:cNvSpPr/>
+          <p:nvPr/>
+        </p:nvSpPr>
+        <p:spPr>
+          <a:xfrm>
+            <a:off x="6583680" y="3566160"/>
+            <a:ext cx="5000040" cy="720720"/>
+          </a:xfrm>
+          <a:prstGeom prst="rect">
+            <a:avLst/>
+          </a:prstGeom>
+          <a:noFill/>
+          <a:ln w="0">
+            <a:noFill/>
+          </a:ln>
+        </p:spPr>
+        <p:style>
+          <a:lnRef idx="0"/>
+          <a:fillRef idx="0"/>
+          <a:effectRef idx="0"/>
+          <a:fontRef idx="minor"/>
+        </p:style>
+        <p:txBody>
+          <a:bodyPr lIns="0" rIns="0" tIns="0" bIns="0" anchor="ctr">
+            <a:normAutofit/>
+          </a:bodyPr>
+          <a:p>
+            <a:pPr defTabSz="914400">
+              <a:lnSpc>
+                <a:spcPct val="100000"/>
+              </a:lnSpc>
+            </a:pPr>
+            <a:r>
+              <a:rPr b="0" lang="en-US" sz="1020" spc="-1" strike="noStrike">
+                <a:solidFill>
+                  <a:srgbClr val="111111"/>
+                </a:solidFill>
+                <a:latin typeface="Arial"/>
+                <a:ea typeface="Arial"/>
+              </a:rPr>
+              <a:t>Two independent raters</a:t>
+            </a:r>
+            <a:endParaRPr b="0" lang="de-AT" sz="1020" spc="-1" strike="noStrike">
+              <a:solidFill>
+                <a:srgbClr val="000000"/>
+              </a:solidFill>
+              <a:latin typeface="Arial"/>
+            </a:endParaRPr>
+          </a:p>
+          <a:p>
+            <a:pPr defTabSz="914400">
+              <a:lnSpc>
+                <a:spcPct val="100000"/>
+              </a:lnSpc>
+            </a:pPr>
+            <a:r>
+              <a:rPr b="0" lang="en-US" sz="1020" spc="-1" strike="noStrike">
+                <a:solidFill>
+                  <a:srgbClr val="111111"/>
+                </a:solidFill>
+                <a:latin typeface="Arial"/>
+                <a:ea typeface="Arial"/>
+              </a:rPr>
+              <a:t>Justifications: k = .92</a:t>
+            </a:r>
+            <a:endParaRPr b="0" lang="de-AT" sz="1020" spc="-1" strike="noStrike">
+              <a:solidFill>
+                <a:srgbClr val="000000"/>
+              </a:solidFill>
+              <a:latin typeface="Arial"/>
+            </a:endParaRPr>
+          </a:p>
+          <a:p>
+            <a:pPr defTabSz="914400">
+              <a:lnSpc>
+                <a:spcPct val="100000"/>
+              </a:lnSpc>
+            </a:pPr>
+            <a:r>
+              <a:rPr b="0" lang="en-US" sz="1020" spc="-1" strike="noStrike">
+                <a:solidFill>
+                  <a:srgbClr val="111111"/>
+                </a:solidFill>
+                <a:latin typeface="Arial"/>
+                <a:ea typeface="Arial"/>
+              </a:rPr>
+              <a:t>Recommendations: k = .89</a:t>
+            </a:r>
+            <a:br>
+              <a:rPr sz="1020"/>
+            </a:br>
+            <a:endParaRPr b="0" lang="de-AT" sz="1020" spc="-1" strike="noStrike">
+              <a:solidFill>
+                <a:srgbClr val="000000"/>
+              </a:solidFill>
+              <a:latin typeface="Arial"/>
+            </a:endParaRPr>
+          </a:p>
+        </p:txBody>
+      </p:sp>
+      <p:sp>
+        <p:nvSpPr>
+          <p:cNvPr id="66" name="Shape 52"/>
+          <p:cNvSpPr/>
+          <p:nvPr/>
+        </p:nvSpPr>
+        <p:spPr>
+          <a:xfrm>
+            <a:off x="438840" y="4654440"/>
+            <a:ext cx="5438880" cy="1324080"/>
+          </a:xfrm>
+          <a:prstGeom prst="rect">
+            <a:avLst/>
+          </a:prstGeom>
+          <a:solidFill>
+            <a:srgbClr val="ffffff"/>
+          </a:solidFill>
+          <a:ln w="12700">
+            <a:solidFill>
+              <a:srgbClr val="c6c6c6"/>
+            </a:solidFill>
+            <a:round/>
+          </a:ln>
+        </p:spPr>
+        <p:style>
+          <a:lnRef idx="0"/>
+          <a:fillRef idx="0"/>
+          <a:effectRef idx="0"/>
+          <a:fontRef idx="minor"/>
+        </p:style>
+        <p:txBody>
+          <a:bodyPr lIns="90000" rIns="90000" tIns="45000" bIns="45000" anchor="t">
+            <a:noAutofit/>
+          </a:bodyPr>
+          <a:p>
+            <a:pPr>
+              <a:lnSpc>
+                <a:spcPct val="100000"/>
+              </a:lnSpc>
+            </a:pPr>
+            <a:endParaRPr b="0" lang="de-AT" sz="1800" spc="-1" strike="noStrike">
+              <a:solidFill>
+                <a:srgbClr val="000000"/>
+              </a:solidFill>
+              <a:latin typeface="Arial"/>
+            </a:endParaRPr>
+          </a:p>
+        </p:txBody>
+      </p:sp>
+      <p:sp>
+        <p:nvSpPr>
+          <p:cNvPr id="67" name="Shape 53"/>
+          <p:cNvSpPr/>
+          <p:nvPr/>
+        </p:nvSpPr>
+        <p:spPr>
+          <a:xfrm>
+            <a:off x="438840" y="4654440"/>
+            <a:ext cx="5438880" cy="108000"/>
+          </a:xfrm>
+          <a:prstGeom prst="rect">
+            <a:avLst/>
+          </a:prstGeom>
+          <a:solidFill>
+            <a:srgbClr val="ffd500"/>
+          </a:solidFill>
+          <a:ln w="12700">
+            <a:solidFill>
+              <a:srgbClr val="ffd500"/>
+            </a:solidFill>
+            <a:round/>
+          </a:ln>
+        </p:spPr>
+        <p:style>
+          <a:lnRef idx="0"/>
+          <a:fillRef idx="0"/>
+          <a:effectRef idx="0"/>
+          <a:fontRef idx="minor"/>
+        </p:style>
+        <p:txBody>
+          <a:bodyPr lIns="90000" rIns="90000" tIns="45000" bIns="45000" anchor="t">
+            <a:noAutofit/>
+          </a:bodyPr>
+          <a:p>
+            <a:pPr>
+              <a:lnSpc>
+                <a:spcPct val="100000"/>
+              </a:lnSpc>
+            </a:pPr>
+            <a:endParaRPr b="0" lang="de-AT" sz="1800" spc="-1" strike="noStrike">
+              <a:solidFill>
+                <a:srgbClr val="000000"/>
+              </a:solidFill>
+              <a:latin typeface="Arial"/>
+            </a:endParaRPr>
+          </a:p>
+        </p:txBody>
+      </p:sp>
+      <p:sp>
+        <p:nvSpPr>
+          <p:cNvPr id="68" name="Text 51"/>
+          <p:cNvSpPr/>
+          <p:nvPr/>
+        </p:nvSpPr>
+        <p:spPr>
+          <a:xfrm>
+            <a:off x="603360" y="4818960"/>
+            <a:ext cx="5109840" cy="254160"/>
+          </a:xfrm>
+          <a:prstGeom prst="rect">
+            <a:avLst/>
+          </a:prstGeom>
+          <a:noFill/>
+          <a:ln w="0">
+            <a:noFill/>
+          </a:ln>
+        </p:spPr>
+        <p:style>
+          <a:lnRef idx="0"/>
+          <a:fillRef idx="0"/>
+          <a:effectRef idx="0"/>
+          <a:fontRef idx="minor"/>
+        </p:style>
+        <p:txBody>
+          <a:bodyPr lIns="0" rIns="0" tIns="0" bIns="0" anchor="ctr">
+            <a:normAutofit/>
+          </a:bodyPr>
+          <a:p>
+            <a:pPr defTabSz="914400">
+              <a:lnSpc>
+                <a:spcPct val="100000"/>
+              </a:lnSpc>
+              <a:tabLst>
+                <a:tab algn="l" pos="0"/>
+              </a:tabLst>
+            </a:pPr>
+            <a:r>
+              <a:rPr b="1" lang="en-US" sz="1450" spc="-1" strike="noStrike">
+                <a:solidFill>
+                  <a:srgbClr val="111111"/>
+                </a:solidFill>
+                <a:latin typeface="Arial"/>
+                <a:ea typeface="Arial"/>
+              </a:rPr>
+              <a:t>Critical: sample and power</a:t>
+            </a:r>
+            <a:endParaRPr b="0" lang="de-AT" sz="1450" spc="-1" strike="noStrike">
+              <a:solidFill>
+                <a:srgbClr val="000000"/>
+              </a:solidFill>
+              <a:latin typeface="Arial"/>
+            </a:endParaRPr>
+          </a:p>
+        </p:txBody>
+      </p:sp>
+      <p:sp>
+        <p:nvSpPr>
+          <p:cNvPr id="69" name="Text 52"/>
+          <p:cNvSpPr/>
+          <p:nvPr/>
+        </p:nvSpPr>
+        <p:spPr>
+          <a:xfrm>
+            <a:off x="713160" y="5184720"/>
+            <a:ext cx="5000040" cy="720720"/>
+          </a:xfrm>
+          <a:prstGeom prst="rect">
+            <a:avLst/>
+          </a:prstGeom>
+          <a:noFill/>
+          <a:ln w="0">
+            <a:noFill/>
+          </a:ln>
+        </p:spPr>
+        <p:style>
+          <a:lnRef idx="0"/>
+          <a:fillRef idx="0"/>
+          <a:effectRef idx="0"/>
+          <a:fontRef idx="minor"/>
+        </p:style>
+        <p:txBody>
+          <a:bodyPr lIns="0" rIns="0" tIns="0" bIns="0" anchor="ctr">
+            <a:normAutofit/>
+          </a:bodyPr>
+          <a:p>
+            <a:pPr defTabSz="914400">
+              <a:lnSpc>
+                <a:spcPct val="100000"/>
+              </a:lnSpc>
+            </a:pPr>
+            <a:r>
+              <a:rPr b="0" lang="en-US" sz="1020" spc="-1" strike="noStrike">
+                <a:solidFill>
+                  <a:srgbClr val="111111"/>
+                </a:solidFill>
+                <a:latin typeface="Arial"/>
+                <a:ea typeface="Arial"/>
+              </a:rPr>
+              <a:t>Small, non-representative sample</a:t>
+            </a:r>
+            <a:endParaRPr b="0" lang="de-AT" sz="1020" spc="-1" strike="noStrike">
+              <a:solidFill>
+                <a:srgbClr val="000000"/>
+              </a:solidFill>
+              <a:latin typeface="Arial"/>
+            </a:endParaRPr>
+          </a:p>
+          <a:p>
+            <a:pPr defTabSz="914400">
+              <a:lnSpc>
+                <a:spcPct val="100000"/>
+              </a:lnSpc>
+            </a:pPr>
+            <a:r>
+              <a:rPr b="0" lang="en-US" sz="1020" spc="-1" strike="noStrike">
+                <a:solidFill>
+                  <a:srgbClr val="111111"/>
+                </a:solidFill>
+                <a:latin typeface="Arial"/>
+                <a:ea typeface="Arial"/>
+              </a:rPr>
+              <a:t>Only university students</a:t>
+            </a:r>
+            <a:endParaRPr b="0" lang="de-AT" sz="1020" spc="-1" strike="noStrike">
+              <a:solidFill>
+                <a:srgbClr val="000000"/>
+              </a:solidFill>
+              <a:latin typeface="Arial"/>
+            </a:endParaRPr>
+          </a:p>
+          <a:p>
+            <a:pPr defTabSz="914400">
+              <a:lnSpc>
+                <a:spcPct val="100000"/>
+              </a:lnSpc>
+            </a:pPr>
+            <a:r>
+              <a:rPr b="0" lang="en-US" sz="1020" spc="-1" strike="noStrike">
+                <a:solidFill>
+                  <a:srgbClr val="111111"/>
+                </a:solidFill>
+                <a:latin typeface="Arial"/>
+                <a:ea typeface="Arial"/>
+              </a:rPr>
+              <a:t>No clear a-priori power analysis</a:t>
+            </a:r>
+            <a:endParaRPr b="0" lang="de-AT" sz="1020" spc="-1" strike="noStrike">
+              <a:solidFill>
+                <a:srgbClr val="000000"/>
+              </a:solidFill>
+              <a:latin typeface="Arial"/>
+            </a:endParaRPr>
+          </a:p>
+        </p:txBody>
+      </p:sp>
+      <p:sp>
+        <p:nvSpPr>
+          <p:cNvPr id="70" name="Shape 54"/>
+          <p:cNvSpPr/>
+          <p:nvPr/>
+        </p:nvSpPr>
+        <p:spPr>
+          <a:xfrm>
+            <a:off x="6309360" y="4654440"/>
+            <a:ext cx="5438880" cy="1324080"/>
+          </a:xfrm>
+          <a:prstGeom prst="rect">
+            <a:avLst/>
+          </a:prstGeom>
+          <a:solidFill>
+            <a:srgbClr val="ffffff"/>
+          </a:solidFill>
+          <a:ln w="12700">
+            <a:solidFill>
+              <a:srgbClr val="c6c6c6"/>
+            </a:solidFill>
+            <a:round/>
+          </a:ln>
+        </p:spPr>
+        <p:style>
+          <a:lnRef idx="0"/>
+          <a:fillRef idx="0"/>
+          <a:effectRef idx="0"/>
+          <a:fontRef idx="minor"/>
+        </p:style>
+        <p:txBody>
+          <a:bodyPr lIns="90000" rIns="90000" tIns="45000" bIns="45000" anchor="t">
+            <a:noAutofit/>
+          </a:bodyPr>
+          <a:p>
+            <a:pPr>
+              <a:lnSpc>
+                <a:spcPct val="100000"/>
+              </a:lnSpc>
+            </a:pPr>
+            <a:endParaRPr b="0" lang="de-AT" sz="1800" spc="-1" strike="noStrike">
+              <a:solidFill>
+                <a:srgbClr val="000000"/>
+              </a:solidFill>
+              <a:latin typeface="Arial"/>
+            </a:endParaRPr>
+          </a:p>
+        </p:txBody>
+      </p:sp>
+      <p:sp>
+        <p:nvSpPr>
+          <p:cNvPr id="71" name="Shape 55"/>
+          <p:cNvSpPr/>
+          <p:nvPr/>
+        </p:nvSpPr>
+        <p:spPr>
+          <a:xfrm>
+            <a:off x="6309360" y="4654440"/>
+            <a:ext cx="5438880" cy="108000"/>
+          </a:xfrm>
+          <a:prstGeom prst="rect">
+            <a:avLst/>
+          </a:prstGeom>
+          <a:solidFill>
+            <a:srgbClr val="ffd500"/>
+          </a:solidFill>
+          <a:ln w="12700">
+            <a:solidFill>
+              <a:srgbClr val="ffd500"/>
+            </a:solidFill>
+            <a:round/>
+          </a:ln>
+        </p:spPr>
+        <p:style>
+          <a:lnRef idx="0"/>
+          <a:fillRef idx="0"/>
+          <a:effectRef idx="0"/>
+          <a:fontRef idx="minor"/>
+        </p:style>
+        <p:txBody>
+          <a:bodyPr lIns="90000" rIns="90000" tIns="45000" bIns="45000" anchor="t">
+            <a:noAutofit/>
+          </a:bodyPr>
+          <a:p>
+            <a:pPr>
+              <a:lnSpc>
+                <a:spcPct val="100000"/>
+              </a:lnSpc>
+            </a:pPr>
+            <a:endParaRPr b="0" lang="de-AT" sz="1800" spc="-1" strike="noStrike">
+              <a:solidFill>
+                <a:srgbClr val="000000"/>
+              </a:solidFill>
+              <a:latin typeface="Arial"/>
+            </a:endParaRPr>
+          </a:p>
+        </p:txBody>
+      </p:sp>
+      <p:sp>
+        <p:nvSpPr>
+          <p:cNvPr id="72" name="Text 53"/>
+          <p:cNvSpPr/>
+          <p:nvPr/>
+        </p:nvSpPr>
+        <p:spPr>
+          <a:xfrm>
+            <a:off x="6473880" y="4818960"/>
+            <a:ext cx="5109840" cy="254160"/>
+          </a:xfrm>
+          <a:prstGeom prst="rect">
+            <a:avLst/>
+          </a:prstGeom>
+          <a:noFill/>
+          <a:ln w="0">
+            <a:noFill/>
+          </a:ln>
+        </p:spPr>
+        <p:style>
+          <a:lnRef idx="0"/>
+          <a:fillRef idx="0"/>
+          <a:effectRef idx="0"/>
+          <a:fontRef idx="minor"/>
+        </p:style>
+        <p:txBody>
+          <a:bodyPr lIns="0" rIns="0" tIns="0" bIns="0" anchor="ctr">
+            <a:normAutofit/>
+          </a:bodyPr>
+          <a:p>
+            <a:pPr defTabSz="914400">
+              <a:lnSpc>
+                <a:spcPct val="100000"/>
+              </a:lnSpc>
+              <a:tabLst>
+                <a:tab algn="l" pos="0"/>
+              </a:tabLst>
+            </a:pPr>
+            <a:r>
+              <a:rPr b="1" lang="en-US" sz="1450" spc="-1" strike="noStrike">
+                <a:solidFill>
+                  <a:srgbClr val="111111"/>
+                </a:solidFill>
+                <a:latin typeface="Arial"/>
+                <a:ea typeface="Arial"/>
+              </a:rPr>
+              <a:t>Critical: process insight</a:t>
+            </a:r>
+            <a:endParaRPr b="0" lang="de-AT" sz="1450" spc="-1" strike="noStrike">
+              <a:solidFill>
+                <a:srgbClr val="000000"/>
+              </a:solidFill>
+              <a:latin typeface="Arial"/>
+            </a:endParaRPr>
+          </a:p>
+        </p:txBody>
+      </p:sp>
+      <p:sp>
+        <p:nvSpPr>
+          <p:cNvPr id="73" name="Text 54"/>
+          <p:cNvSpPr/>
+          <p:nvPr/>
+        </p:nvSpPr>
+        <p:spPr>
+          <a:xfrm>
+            <a:off x="6583680" y="5184720"/>
+            <a:ext cx="5000040" cy="720720"/>
+          </a:xfrm>
+          <a:prstGeom prst="rect">
+            <a:avLst/>
+          </a:prstGeom>
+          <a:noFill/>
+          <a:ln w="0">
+            <a:noFill/>
+          </a:ln>
+        </p:spPr>
+        <p:style>
+          <a:lnRef idx="0"/>
+          <a:fillRef idx="0"/>
+          <a:effectRef idx="0"/>
+          <a:fontRef idx="minor"/>
+        </p:style>
+        <p:txBody>
+          <a:bodyPr lIns="0" rIns="0" tIns="0" bIns="0" anchor="ctr">
+            <a:normAutofit/>
+          </a:bodyPr>
+          <a:p>
+            <a:pPr defTabSz="914400">
+              <a:lnSpc>
+                <a:spcPct val="100000"/>
+              </a:lnSpc>
+            </a:pPr>
+            <a:r>
+              <a:rPr b="0" lang="en-US" sz="1020" spc="-1" strike="noStrike">
+                <a:solidFill>
+                  <a:srgbClr val="111111"/>
+                </a:solidFill>
+                <a:latin typeface="Arial"/>
+                <a:ea typeface="Arial"/>
+              </a:rPr>
+              <a:t>No classic pre-post learning test</a:t>
+            </a:r>
+            <a:endParaRPr b="0" lang="de-AT" sz="1020" spc="-1" strike="noStrike">
+              <a:solidFill>
+                <a:srgbClr val="000000"/>
+              </a:solidFill>
+              <a:latin typeface="Arial"/>
+            </a:endParaRPr>
+          </a:p>
+          <a:p>
+            <a:pPr defTabSz="914400">
+              <a:lnSpc>
+                <a:spcPct val="100000"/>
+              </a:lnSpc>
+            </a:pPr>
+            <a:r>
+              <a:rPr b="0" lang="en-US" sz="1020" spc="-1" strike="noStrike">
+                <a:solidFill>
+                  <a:srgbClr val="111111"/>
+                </a:solidFill>
+                <a:latin typeface="Arial"/>
+                <a:ea typeface="Arial"/>
+              </a:rPr>
+              <a:t>No think-aloud protocol</a:t>
+            </a:r>
+            <a:endParaRPr b="0" lang="de-AT" sz="1020" spc="-1" strike="noStrike">
+              <a:solidFill>
+                <a:srgbClr val="000000"/>
+              </a:solidFill>
+              <a:latin typeface="Arial"/>
+            </a:endParaRPr>
+          </a:p>
+          <a:p>
+            <a:pPr defTabSz="914400">
+              <a:lnSpc>
+                <a:spcPct val="100000"/>
+              </a:lnSpc>
+            </a:pPr>
+            <a:r>
+              <a:rPr b="0" lang="en-US" sz="1020" spc="-1" strike="noStrike">
+                <a:solidFill>
+                  <a:srgbClr val="111111"/>
+                </a:solidFill>
+                <a:latin typeface="Arial"/>
+                <a:ea typeface="Arial"/>
+              </a:rPr>
+              <a:t>No search logs</a:t>
+            </a:r>
+            <a:endParaRPr b="0" lang="de-AT" sz="1020" spc="-1" strike="noStrike">
+              <a:solidFill>
+                <a:srgbClr val="000000"/>
+              </a:solidFill>
+              <a:latin typeface="Arial"/>
+            </a:endParaRPr>
+          </a:p>
+        </p:txBody>
+      </p:sp>
+      <p:sp>
+        <p:nvSpPr>
+          <p:cNvPr id="74" name="Shape 1"/>
+          <p:cNvSpPr/>
+          <p:nvPr/>
+        </p:nvSpPr>
+        <p:spPr>
+          <a:xfrm>
+            <a:off x="6345360" y="1415880"/>
+            <a:ext cx="5438880" cy="1324080"/>
+          </a:xfrm>
+          <a:prstGeom prst="rect">
+            <a:avLst/>
+          </a:prstGeom>
+          <a:solidFill>
+            <a:srgbClr val="ffffff"/>
+          </a:solidFill>
+          <a:ln w="12700">
+            <a:solidFill>
+              <a:srgbClr val="c6c6c6"/>
+            </a:solidFill>
+            <a:round/>
+          </a:ln>
+        </p:spPr>
+        <p:style>
+          <a:lnRef idx="0"/>
+          <a:fillRef idx="0"/>
+          <a:effectRef idx="0"/>
+          <a:fontRef idx="minor"/>
+        </p:style>
+        <p:txBody>
+          <a:bodyPr lIns="90000" rIns="90000" tIns="45000" bIns="45000" anchor="t">
+            <a:noAutofit/>
+          </a:bodyPr>
+          <a:p>
+            <a:pPr>
+              <a:lnSpc>
+                <a:spcPct val="100000"/>
+              </a:lnSpc>
+            </a:pPr>
+            <a:endParaRPr b="0" lang="de-AT" sz="1800" spc="-1" strike="noStrike">
+              <a:solidFill>
+                <a:srgbClr val="000000"/>
+              </a:solidFill>
+              <a:latin typeface="Arial"/>
+            </a:endParaRPr>
+          </a:p>
+        </p:txBody>
+      </p:sp>
+      <p:sp>
+        <p:nvSpPr>
+          <p:cNvPr id="75" name="Shape 2"/>
+          <p:cNvSpPr/>
+          <p:nvPr/>
+        </p:nvSpPr>
+        <p:spPr>
+          <a:xfrm>
+            <a:off x="6345360" y="1415880"/>
+            <a:ext cx="5438880" cy="108000"/>
+          </a:xfrm>
+          <a:prstGeom prst="rect">
+            <a:avLst/>
+          </a:prstGeom>
+          <a:solidFill>
+            <a:srgbClr val="ffd500"/>
+          </a:solidFill>
+          <a:ln w="12700">
+            <a:solidFill>
+              <a:srgbClr val="ffd500"/>
+            </a:solidFill>
+            <a:round/>
+          </a:ln>
+        </p:spPr>
+        <p:style>
+          <a:lnRef idx="0"/>
+          <a:fillRef idx="0"/>
+          <a:effectRef idx="0"/>
+          <a:fontRef idx="minor"/>
+        </p:style>
+        <p:txBody>
+          <a:bodyPr lIns="90000" rIns="90000" tIns="45000" bIns="45000" anchor="t">
+            <a:noAutofit/>
+          </a:bodyPr>
+          <a:p>
+            <a:pPr>
+              <a:lnSpc>
+                <a:spcPct val="100000"/>
+              </a:lnSpc>
+            </a:pPr>
+            <a:endParaRPr b="0" lang="de-AT" sz="1800" spc="-1" strike="noStrike">
+              <a:solidFill>
+                <a:srgbClr val="000000"/>
+              </a:solidFill>
+              <a:latin typeface="Arial"/>
+            </a:endParaRPr>
+          </a:p>
+        </p:txBody>
+      </p:sp>
+      <p:sp>
+        <p:nvSpPr>
+          <p:cNvPr id="76" name="Text 4"/>
+          <p:cNvSpPr/>
+          <p:nvPr/>
+        </p:nvSpPr>
+        <p:spPr>
+          <a:xfrm>
+            <a:off x="6509880" y="1580400"/>
+            <a:ext cx="5109840" cy="254160"/>
+          </a:xfrm>
+          <a:prstGeom prst="rect">
+            <a:avLst/>
+          </a:prstGeom>
+          <a:noFill/>
+          <a:ln w="0">
+            <a:noFill/>
+          </a:ln>
+        </p:spPr>
+        <p:style>
+          <a:lnRef idx="0"/>
+          <a:fillRef idx="0"/>
+          <a:effectRef idx="0"/>
+          <a:fontRef idx="minor"/>
+        </p:style>
+        <p:txBody>
+          <a:bodyPr lIns="0" rIns="0" tIns="0" bIns="0" anchor="ctr">
+            <a:normAutofit/>
+          </a:bodyPr>
+          <a:p>
+            <a:pPr defTabSz="914400">
+              <a:lnSpc>
+                <a:spcPct val="100000"/>
+              </a:lnSpc>
+              <a:tabLst>
+                <a:tab algn="l" pos="0"/>
+              </a:tabLst>
+            </a:pPr>
+            <a:r>
+              <a:rPr b="1" lang="en-US" sz="1450" spc="-1" strike="noStrike">
+                <a:solidFill>
+                  <a:srgbClr val="111111"/>
+                </a:solidFill>
+                <a:latin typeface="Arial"/>
+                <a:ea typeface="Arial"/>
+              </a:rPr>
+              <a:t>Cognitive load</a:t>
+            </a:r>
+            <a:endParaRPr b="0" lang="de-AT" sz="1450" spc="-1" strike="noStrike">
+              <a:solidFill>
+                <a:srgbClr val="000000"/>
+              </a:solidFill>
+              <a:latin typeface="Arial"/>
+            </a:endParaRPr>
+          </a:p>
+        </p:txBody>
+      </p:sp>
+      <p:sp>
+        <p:nvSpPr>
+          <p:cNvPr id="77" name="Text 5"/>
+          <p:cNvSpPr/>
+          <p:nvPr/>
+        </p:nvSpPr>
+        <p:spPr>
+          <a:xfrm>
+            <a:off x="6619680" y="1946160"/>
+            <a:ext cx="5000040" cy="720720"/>
+          </a:xfrm>
+          <a:prstGeom prst="rect">
+            <a:avLst/>
+          </a:prstGeom>
+          <a:noFill/>
+          <a:ln w="0">
+            <a:noFill/>
+          </a:ln>
+        </p:spPr>
+        <p:style>
+          <a:lnRef idx="0"/>
+          <a:fillRef idx="0"/>
+          <a:effectRef idx="0"/>
+          <a:fontRef idx="minor"/>
+        </p:style>
+        <p:txBody>
+          <a:bodyPr lIns="0" rIns="0" tIns="0" bIns="0" anchor="ctr">
+            <a:normAutofit/>
+          </a:bodyPr>
+          <a:p>
+            <a:pPr defTabSz="914400">
+              <a:lnSpc>
+                <a:spcPct val="100000"/>
+              </a:lnSpc>
+            </a:pPr>
+            <a:r>
+              <a:rPr b="0" lang="en-US" sz="1020" spc="-1" strike="noStrike">
+                <a:solidFill>
+                  <a:srgbClr val="111111"/>
+                </a:solidFill>
+                <a:latin typeface="Arial"/>
+                <a:ea typeface="Arial"/>
+              </a:rPr>
+              <a:t>Measured directly after search</a:t>
+            </a:r>
+            <a:endParaRPr b="0" lang="de-AT" sz="1020" spc="-1" strike="noStrike">
+              <a:solidFill>
+                <a:srgbClr val="000000"/>
+              </a:solidFill>
+              <a:latin typeface="Arial"/>
+            </a:endParaRPr>
+          </a:p>
+          <a:p>
+            <a:pPr defTabSz="914400">
+              <a:lnSpc>
+                <a:spcPct val="100000"/>
+              </a:lnSpc>
+            </a:pPr>
+            <a:r>
+              <a:rPr b="0" lang="en-US" sz="1020" spc="-1" strike="noStrike">
+                <a:solidFill>
+                  <a:srgbClr val="111111"/>
+                </a:solidFill>
+                <a:latin typeface="Arial"/>
+                <a:ea typeface="Arial"/>
+              </a:rPr>
+              <a:t>Questionnaire with 1-7 scale by Klepsch</a:t>
+            </a:r>
+            <a:endParaRPr b="0" lang="de-AT" sz="1020" spc="-1" strike="noStrike">
+              <a:solidFill>
+                <a:srgbClr val="000000"/>
+              </a:solidFill>
+              <a:latin typeface="Arial"/>
+            </a:endParaRPr>
+          </a:p>
+          <a:p>
+            <a:pPr defTabSz="914400">
+              <a:lnSpc>
+                <a:spcPct val="100000"/>
+              </a:lnSpc>
+            </a:pPr>
+            <a:r>
+              <a:rPr b="0" lang="en-US" sz="1020" spc="-1" strike="noStrike">
+                <a:solidFill>
+                  <a:srgbClr val="111111"/>
+                </a:solidFill>
+                <a:latin typeface="Arial"/>
+                <a:ea typeface="Arial"/>
+              </a:rPr>
+              <a:t>ICL, ECL and GCL</a:t>
+            </a:r>
+            <a:endParaRPr b="0" lang="de-AT" sz="1020" spc="-1" strike="noStrike">
+              <a:solidFill>
+                <a:srgbClr val="000000"/>
+              </a:solidFill>
+              <a:latin typeface="Arial"/>
+            </a:endParaRPr>
+          </a:p>
+        </p:txBody>
+      </p:sp>
+      <p:sp>
+        <p:nvSpPr>
+          <p:cNvPr id="78" name=""/>
+          <p:cNvSpPr/>
+          <p:nvPr/>
+        </p:nvSpPr>
+        <p:spPr>
+          <a:xfrm>
+            <a:off x="2557440" y="6336720"/>
+            <a:ext cx="6801840" cy="253080"/>
+          </a:xfrm>
+          <a:prstGeom prst="rect">
+            <a:avLst/>
+          </a:prstGeom>
+          <a:noFill/>
+          <a:ln w="0">
+            <a:noFill/>
+          </a:ln>
+        </p:spPr>
+        <p:style>
+          <a:lnRef idx="0"/>
+          <a:fillRef idx="0"/>
+          <a:effectRef idx="0"/>
+          <a:fontRef idx="minor"/>
+        </p:style>
+        <p:txBody>
+          <a:bodyPr lIns="90000" rIns="90000" tIns="45000" bIns="45000" anchor="t">
+            <a:noAutofit/>
+          </a:bodyPr>
+          <a:p>
+            <a:pPr algn="ctr">
+              <a:lnSpc>
+                <a:spcPct val="100000"/>
+              </a:lnSpc>
+            </a:pPr>
+            <a:r>
+              <a:rPr b="1" lang="en-US" sz="1150" spc="-1" strike="noStrike">
+                <a:solidFill>
+                  <a:srgbClr val="ffffff"/>
+                </a:solidFill>
+                <a:latin typeface="Arial"/>
+                <a:ea typeface="Arial"/>
+              </a:rPr>
+              <a:t>Strong internal control, limited real-world generalizability.</a:t>
+            </a:r>
+            <a:endParaRPr b="0" lang="de-AT" sz="1150" spc="-1" strike="noStrike">
+              <a:solidFill>
+                <a:srgbClr val="000000"/>
               </a:solidFill>
               <a:latin typeface="Arial"/>
             </a:endParaRPr>
@@ -3209,6 +6216,178 @@
 <file path=ppt/theme/theme2.xml><?xml version="1.0" encoding="utf-8"?>
 <a:theme xmlns:a="http://schemas.openxmlformats.org/drawingml/2006/main" xmlns:r="http://schemas.openxmlformats.org/officeDocument/2006/relationships" name="Office Theme">
   <a:themeElements>
+    <a:clrScheme name="Office">
+      <a:dk1>
+        <a:srgbClr val="000000"/>
+      </a:dk1>
+      <a:lt1>
+        <a:srgbClr val="ffffff"/>
+      </a:lt1>
+      <a:dk2>
+        <a:srgbClr val="44546a"/>
+      </a:dk2>
+      <a:lt2>
+        <a:srgbClr val="e7e6e6"/>
+      </a:lt2>
+      <a:accent1>
+        <a:srgbClr val="4472c4"/>
+      </a:accent1>
+      <a:accent2>
+        <a:srgbClr val="ed7d31"/>
+      </a:accent2>
+      <a:accent3>
+        <a:srgbClr val="a5a5a5"/>
+      </a:accent3>
+      <a:accent4>
+        <a:srgbClr val="ffc000"/>
+      </a:accent4>
+      <a:accent5>
+        <a:srgbClr val="5b9bd5"/>
+      </a:accent5>
+      <a:accent6>
+        <a:srgbClr val="70ad47"/>
+      </a:accent6>
+      <a:hlink>
+        <a:srgbClr val="0563c1"/>
+      </a:hlink>
+      <a:folHlink>
+        <a:srgbClr val="954f72"/>
+      </a:folHlink>
+    </a:clrScheme>
+    <a:fontScheme name="Office">
+      <a:majorFont>
+        <a:latin typeface="Arial" pitchFamily="0" charset="1"/>
+        <a:ea typeface=""/>
+        <a:cs typeface=""/>
+      </a:majorFont>
+      <a:minorFont>
+        <a:latin typeface="Arial" pitchFamily="0" charset="1"/>
+        <a:ea typeface=""/>
+        <a:cs typeface=""/>
+      </a:minorFont>
+    </a:fontScheme>
+    <a:fmtScheme>
+      <a:fillStyleLst>
+        <a:solidFill>
+          <a:schemeClr val="phClr"/>
+        </a:solidFill>
+        <a:gradFill>
+          <a:gsLst>
+            <a:gs pos="0">
+              <a:schemeClr val="phClr">
+                <a:lumMod val="110000"/>
+                <a:tint val="67000"/>
+              </a:schemeClr>
+            </a:gs>
+            <a:gs pos="50000">
+              <a:schemeClr val="phClr">
+                <a:lumMod val="105000"/>
+                <a:tint val="73000"/>
+              </a:schemeClr>
+            </a:gs>
+            <a:gs pos="100000">
+              <a:schemeClr val="phClr">
+                <a:lumMod val="105000"/>
+                <a:tint val="81000"/>
+              </a:schemeClr>
+            </a:gs>
+          </a:gsLst>
+          <a:lin ang="5400000" scaled="0"/>
+          <a:tileRect l="0" t="0" r="0" b="0"/>
+        </a:gradFill>
+        <a:gradFill>
+          <a:gsLst>
+            <a:gs pos="0">
+              <a:schemeClr val="phClr">
+                <a:lumMod val="102000"/>
+                <a:tint val="94000"/>
+              </a:schemeClr>
+            </a:gs>
+            <a:gs pos="50000">
+              <a:schemeClr val="phClr">
+                <a:lumMod val="100000"/>
+                <a:shade val="100000"/>
+              </a:schemeClr>
+            </a:gs>
+            <a:gs pos="100000">
+              <a:schemeClr val="phClr">
+                <a:lumMod val="99000"/>
+                <a:shade val="78000"/>
+              </a:schemeClr>
+            </a:gs>
+          </a:gsLst>
+          <a:lin ang="5400000" scaled="0"/>
+          <a:tileRect l="0" t="0" r="0" b="0"/>
+        </a:gradFill>
+      </a:fillStyleLst>
+      <a:lnStyleLst>
+        <a:ln w="6350" cap="flat" cmpd="sng" algn="ctr">
+          <a:prstDash val="solid"/>
+          <a:miter lim="800000"/>
+        </a:ln>
+        <a:ln w="12700" cap="flat" cmpd="sng" algn="ctr">
+          <a:prstDash val="solid"/>
+          <a:miter lim="800000"/>
+        </a:ln>
+        <a:ln w="19050" cap="flat" cmpd="sng" algn="ctr">
+          <a:prstDash val="solid"/>
+          <a:miter lim="800000"/>
+        </a:ln>
+      </a:lnStyleLst>
+      <a:effectStyleLst>
+        <a:effectStyle>
+          <a:effectLst/>
+        </a:effectStyle>
+        <a:effectStyle>
+          <a:effectLst/>
+        </a:effectStyle>
+        <a:effectStyle>
+          <a:effectLst/>
+        </a:effectStyle>
+      </a:effectStyleLst>
+      <a:bgFillStyleLst>
+        <a:solidFill>
+          <a:schemeClr val="phClr"/>
+        </a:solidFill>
+        <a:solidFill>
+          <a:schemeClr val="phClr">
+            <a:tint val="95000"/>
+          </a:schemeClr>
+        </a:solidFill>
+        <a:gradFill>
+          <a:gsLst>
+            <a:gs pos="0">
+              <a:schemeClr val="phClr">
+                <a:tint val="93000"/>
+                <a:shade val="98000"/>
+                <a:lumMod val="102000"/>
+              </a:schemeClr>
+            </a:gs>
+            <a:gs pos="50000">
+              <a:schemeClr val="phClr">
+                <a:tint val="98000"/>
+                <a:shade val="90000"/>
+                <a:lumMod val="103000"/>
+              </a:schemeClr>
+            </a:gs>
+            <a:gs pos="100000">
+              <a:schemeClr val="phClr">
+                <a:shade val="63000"/>
+              </a:schemeClr>
+            </a:gs>
+          </a:gsLst>
+          <a:lin ang="5400000" scaled="0"/>
+          <a:tileRect l="0" t="0" r="0" b="0"/>
+        </a:gradFill>
+      </a:bgFillStyleLst>
+    </a:fmtScheme>
+  </a:themeElements>
+</a:theme>
+</file>
+
+<file path=ppt/theme/theme3.xml><?xml version="1.0" encoding="utf-8"?>
+<a:theme xmlns:a="http://schemas.openxmlformats.org/drawingml/2006/main" xmlns:r="http://schemas.openxmlformats.org/officeDocument/2006/relationships" name="Office Theme">
+  <a:themeElements>
     <a:clrScheme name="LibreOffice">
       <a:dk1>
         <a:srgbClr val="000000"/>

--- a/Lightning Talk Marina.pptx
+++ b/Lightning Talk Marina.pptx
@@ -342,7 +342,7 @@
             <a:pPr indent="0" algn="r">
               <a:buNone/>
             </a:pPr>
-            <a:fld id="{D9A33B5D-5C01-485E-8BAD-0EBB3E41D5A2}" type="slidenum">
+            <a:fld id="{C0327485-B405-401D-BA3B-C976C8097088}" type="slidenum">
               <a:rPr b="0" lang="de-AT" sz="1400" spc="-1" strike="noStrike">
                 <a:solidFill>
                   <a:srgbClr val="000000"/>
@@ -385,7 +385,7 @@
       </p:grpSpPr>
       <p:sp>
         <p:nvSpPr>
-          <p:cNvPr id="79" name="PlaceHolder 1"/>
+          <p:cNvPr id="80" name="PlaceHolder 1"/>
           <p:cNvSpPr>
             <a:spLocks noGrp="1"/>
           </p:cNvSpPr>
@@ -396,7 +396,7 @@
         <p:spPr>
           <a:xfrm>
             <a:off x="685800" y="1143000"/>
-            <a:ext cx="5484960" cy="3084840"/>
+            <a:ext cx="5484600" cy="3084480"/>
           </a:xfrm>
           <a:prstGeom prst="rect">
             <a:avLst/>
@@ -408,7 +408,7 @@
       </p:sp>
       <p:sp>
         <p:nvSpPr>
-          <p:cNvPr id="80" name="PlaceHolder 2"/>
+          <p:cNvPr id="81" name="PlaceHolder 2"/>
           <p:cNvSpPr>
             <a:spLocks noGrp="1"/>
           </p:cNvSpPr>
@@ -419,7 +419,7 @@
         <p:spPr>
           <a:xfrm>
             <a:off x="685800" y="4400640"/>
-            <a:ext cx="5484960" cy="3598920"/>
+            <a:ext cx="5484600" cy="3598560"/>
           </a:xfrm>
           <a:prstGeom prst="rect">
             <a:avLst/>
@@ -593,7 +593,7 @@
       </p:sp>
       <p:sp>
         <p:nvSpPr>
-          <p:cNvPr id="81" name="PlaceHolder 3"/>
+          <p:cNvPr id="82" name="PlaceHolder 3"/>
           <p:cNvSpPr>
             <a:spLocks noGrp="1"/>
           </p:cNvSpPr>
@@ -604,7 +604,7 @@
         <p:spPr>
           <a:xfrm>
             <a:off x="3884760" y="8685360"/>
-            <a:ext cx="2970360" cy="457200"/>
+            <a:ext cx="2970000" cy="456840"/>
           </a:xfrm>
           <a:prstGeom prst="rect">
             <a:avLst/>
@@ -646,7 +646,7 @@
                 <a:tab algn="l" pos="0"/>
               </a:tabLst>
             </a:pPr>
-            <a:fld id="{D57C9EC1-784B-4FAE-A90C-3152BFEAEC74}" type="slidenum">
+            <a:fld id="{C6F6E255-E3CF-42A4-9386-95AC7C6CDC95}" type="slidenum">
               <a:rPr b="0" lang="en-US" sz="1200" spc="-1" strike="noStrike">
                 <a:solidFill>
                   <a:schemeClr val="dk1"/>
@@ -689,7 +689,7 @@
       </p:grpSpPr>
       <p:sp>
         <p:nvSpPr>
-          <p:cNvPr id="82" name="PlaceHolder 1"/>
+          <p:cNvPr id="83" name="PlaceHolder 1"/>
           <p:cNvSpPr>
             <a:spLocks noGrp="1"/>
           </p:cNvSpPr>
@@ -700,7 +700,7 @@
         <p:spPr>
           <a:xfrm>
             <a:off x="216000" y="812520"/>
-            <a:ext cx="7126920" cy="4008600"/>
+            <a:ext cx="7126560" cy="4008240"/>
           </a:xfrm>
           <a:prstGeom prst="rect">
             <a:avLst/>
@@ -712,7 +712,7 @@
       </p:sp>
       <p:sp>
         <p:nvSpPr>
-          <p:cNvPr id="83" name="PlaceHolder 2"/>
+          <p:cNvPr id="84" name="PlaceHolder 2"/>
           <p:cNvSpPr>
             <a:spLocks noGrp="1"/>
           </p:cNvSpPr>
@@ -723,7 +723,7 @@
         <p:spPr>
           <a:xfrm>
             <a:off x="756000" y="5078520"/>
-            <a:ext cx="6047280" cy="4810680"/>
+            <a:ext cx="6046920" cy="4810320"/>
           </a:xfrm>
           <a:prstGeom prst="rect">
             <a:avLst/>
@@ -945,7 +945,7 @@
       </p:grpSpPr>
       <p:sp>
         <p:nvSpPr>
-          <p:cNvPr id="84" name="PlaceHolder 1"/>
+          <p:cNvPr id="85" name="PlaceHolder 1"/>
           <p:cNvSpPr>
             <a:spLocks noGrp="1"/>
           </p:cNvSpPr>
@@ -956,7 +956,7 @@
         <p:spPr>
           <a:xfrm>
             <a:off x="685800" y="1143000"/>
-            <a:ext cx="5485320" cy="3085200"/>
+            <a:ext cx="5484960" cy="3084840"/>
           </a:xfrm>
           <a:prstGeom prst="rect">
             <a:avLst/>
@@ -968,7 +968,7 @@
       </p:sp>
       <p:sp>
         <p:nvSpPr>
-          <p:cNvPr id="85" name="PlaceHolder 2"/>
+          <p:cNvPr id="86" name="PlaceHolder 2"/>
           <p:cNvSpPr>
             <a:spLocks noGrp="1"/>
           </p:cNvSpPr>
@@ -979,7 +979,7 @@
         <p:spPr>
           <a:xfrm>
             <a:off x="685800" y="4400640"/>
-            <a:ext cx="5485320" cy="3599280"/>
+            <a:ext cx="5484960" cy="3598920"/>
           </a:xfrm>
           <a:prstGeom prst="rect">
             <a:avLst/>
@@ -1008,7 +1008,7 @@
       </p:sp>
       <p:sp>
         <p:nvSpPr>
-          <p:cNvPr id="86" name="PlaceHolder 3"/>
+          <p:cNvPr id="87" name="PlaceHolder 3"/>
           <p:cNvSpPr>
             <a:spLocks noGrp="1"/>
           </p:cNvSpPr>
@@ -1019,7 +1019,7 @@
         <p:spPr>
           <a:xfrm>
             <a:off x="3884760" y="8685360"/>
-            <a:ext cx="2970720" cy="457560"/>
+            <a:ext cx="2970360" cy="457200"/>
           </a:xfrm>
           <a:prstGeom prst="rect">
             <a:avLst/>
@@ -1061,7 +1061,7 @@
                 <a:tab algn="l" pos="0"/>
               </a:tabLst>
             </a:pPr>
-            <a:fld id="{6CFB9625-5161-4C61-B53B-5612B7AE3DA2}" type="slidenum">
+            <a:fld id="{F89577E3-ABDD-4530-8BDD-1F95363A5F58}" type="slidenum">
               <a:rPr b="0" lang="en-US" sz="1200" spc="-1" strike="noStrike">
                 <a:solidFill>
                   <a:schemeClr val="dk1"/>
@@ -1859,7 +1859,7 @@
         <p:spPr>
           <a:xfrm>
             <a:off x="0" y="0"/>
-            <a:ext cx="12190320" cy="675360"/>
+            <a:ext cx="12189960" cy="675000"/>
           </a:xfrm>
           <a:prstGeom prst="rect">
             <a:avLst/>
@@ -1908,7 +1908,7 @@
         <p:spPr>
           <a:xfrm>
             <a:off x="384120" y="128160"/>
-            <a:ext cx="7953840" cy="401040"/>
+            <a:ext cx="7953480" cy="400680"/>
           </a:xfrm>
           <a:prstGeom prst="rect">
             <a:avLst/>
@@ -1965,7 +1965,7 @@
         <p:spPr>
           <a:xfrm>
             <a:off x="9875520" y="191880"/>
-            <a:ext cx="1918800" cy="254520"/>
+            <a:ext cx="1918440" cy="254160"/>
           </a:xfrm>
           <a:prstGeom prst="rect">
             <a:avLst/>
@@ -2028,7 +2028,7 @@
         <p:spPr>
           <a:xfrm>
             <a:off x="384120" y="804600"/>
-            <a:ext cx="11245680" cy="382680"/>
+            <a:ext cx="11245320" cy="382320"/>
           </a:xfrm>
           <a:prstGeom prst="rect">
             <a:avLst/>
@@ -2085,7 +2085,7 @@
         <p:spPr>
           <a:xfrm>
             <a:off x="438840" y="1417320"/>
-            <a:ext cx="5439240" cy="1324440"/>
+            <a:ext cx="5438880" cy="1324080"/>
           </a:xfrm>
           <a:prstGeom prst="roundRect">
             <a:avLst>
@@ -2136,7 +2136,7 @@
         <p:spPr>
           <a:xfrm>
             <a:off x="438840" y="1417320"/>
-            <a:ext cx="5439240" cy="108360"/>
+            <a:ext cx="5438880" cy="108000"/>
           </a:xfrm>
           <a:prstGeom prst="rect">
             <a:avLst/>
@@ -2185,7 +2185,7 @@
         <p:spPr>
           <a:xfrm>
             <a:off x="603360" y="1581840"/>
-            <a:ext cx="5110200" cy="254520"/>
+            <a:ext cx="5109840" cy="254160"/>
           </a:xfrm>
           <a:prstGeom prst="rect">
             <a:avLst/>
@@ -2242,7 +2242,7 @@
         <p:spPr>
           <a:xfrm>
             <a:off x="713160" y="1947600"/>
-            <a:ext cx="5000400" cy="721080"/>
+            <a:ext cx="5000040" cy="720720"/>
           </a:xfrm>
           <a:prstGeom prst="rect">
             <a:avLst/>
@@ -2342,7 +2342,7 @@
         <p:spPr>
           <a:xfrm>
             <a:off x="6309360" y="1417320"/>
-            <a:ext cx="5439240" cy="1324440"/>
+            <a:ext cx="5438880" cy="1324080"/>
           </a:xfrm>
           <a:prstGeom prst="roundRect">
             <a:avLst>
@@ -2393,7 +2393,7 @@
         <p:spPr>
           <a:xfrm>
             <a:off x="6309360" y="1417320"/>
-            <a:ext cx="5439240" cy="108360"/>
+            <a:ext cx="5438880" cy="108000"/>
           </a:xfrm>
           <a:prstGeom prst="rect">
             <a:avLst/>
@@ -2442,7 +2442,7 @@
         <p:spPr>
           <a:xfrm>
             <a:off x="6473880" y="1581840"/>
-            <a:ext cx="5110200" cy="254520"/>
+            <a:ext cx="5109840" cy="254160"/>
           </a:xfrm>
           <a:prstGeom prst="rect">
             <a:avLst/>
@@ -2499,7 +2499,7 @@
         <p:spPr>
           <a:xfrm>
             <a:off x="6583680" y="1980000"/>
-            <a:ext cx="5000400" cy="688680"/>
+            <a:ext cx="5000040" cy="688320"/>
           </a:xfrm>
           <a:prstGeom prst="rect">
             <a:avLst/>
@@ -2622,7 +2622,7 @@
         <p:spPr>
           <a:xfrm>
             <a:off x="438840" y="3035880"/>
-            <a:ext cx="5439240" cy="1324440"/>
+            <a:ext cx="5438880" cy="1324080"/>
           </a:xfrm>
           <a:prstGeom prst="roundRect">
             <a:avLst>
@@ -2673,7 +2673,7 @@
         <p:spPr>
           <a:xfrm>
             <a:off x="438840" y="3035880"/>
-            <a:ext cx="5439240" cy="108360"/>
+            <a:ext cx="5438880" cy="108000"/>
           </a:xfrm>
           <a:prstGeom prst="rect">
             <a:avLst/>
@@ -2722,7 +2722,7 @@
         <p:spPr>
           <a:xfrm>
             <a:off x="603360" y="3200400"/>
-            <a:ext cx="5110200" cy="254520"/>
+            <a:ext cx="5109840" cy="254160"/>
           </a:xfrm>
           <a:prstGeom prst="rect">
             <a:avLst/>
@@ -2779,7 +2779,7 @@
         <p:spPr>
           <a:xfrm>
             <a:off x="713160" y="3566160"/>
-            <a:ext cx="5000400" cy="721080"/>
+            <a:ext cx="5000040" cy="720720"/>
           </a:xfrm>
           <a:prstGeom prst="rect">
             <a:avLst/>
@@ -2879,7 +2879,7 @@
         <p:spPr>
           <a:xfrm>
             <a:off x="6309360" y="3035880"/>
-            <a:ext cx="5439240" cy="1324440"/>
+            <a:ext cx="5438880" cy="1324080"/>
           </a:xfrm>
           <a:prstGeom prst="roundRect">
             <a:avLst>
@@ -2930,7 +2930,7 @@
         <p:spPr>
           <a:xfrm>
             <a:off x="6309360" y="3035880"/>
-            <a:ext cx="5439240" cy="108360"/>
+            <a:ext cx="5438880" cy="108000"/>
           </a:xfrm>
           <a:prstGeom prst="rect">
             <a:avLst/>
@@ -2979,7 +2979,7 @@
         <p:spPr>
           <a:xfrm>
             <a:off x="6473880" y="3200400"/>
-            <a:ext cx="5110200" cy="254520"/>
+            <a:ext cx="5109840" cy="254160"/>
           </a:xfrm>
           <a:prstGeom prst="rect">
             <a:avLst/>
@@ -3036,7 +3036,7 @@
         <p:spPr>
           <a:xfrm>
             <a:off x="6583680" y="3566160"/>
-            <a:ext cx="5000400" cy="721080"/>
+            <a:ext cx="5000040" cy="720720"/>
           </a:xfrm>
           <a:prstGeom prst="rect">
             <a:avLst/>
@@ -3136,7 +3136,7 @@
         <p:spPr>
           <a:xfrm>
             <a:off x="438840" y="4654440"/>
-            <a:ext cx="5439240" cy="1324440"/>
+            <a:ext cx="5438880" cy="1324080"/>
           </a:xfrm>
           <a:prstGeom prst="roundRect">
             <a:avLst>
@@ -3188,7 +3188,7 @@
         <p:spPr>
           <a:xfrm>
             <a:off x="438840" y="4654440"/>
-            <a:ext cx="5439240" cy="108360"/>
+            <a:ext cx="5438880" cy="108000"/>
           </a:xfrm>
           <a:prstGeom prst="rect">
             <a:avLst/>
@@ -3237,7 +3237,7 @@
         <p:spPr>
           <a:xfrm>
             <a:off x="603360" y="4818960"/>
-            <a:ext cx="5110200" cy="254520"/>
+            <a:ext cx="5109840" cy="254160"/>
           </a:xfrm>
           <a:prstGeom prst="rect">
             <a:avLst/>
@@ -3294,7 +3294,7 @@
         <p:spPr>
           <a:xfrm>
             <a:off x="713160" y="5184720"/>
-            <a:ext cx="5000400" cy="721080"/>
+            <a:ext cx="5000040" cy="720720"/>
           </a:xfrm>
           <a:prstGeom prst="rect">
             <a:avLst/>
@@ -3440,7 +3440,7 @@
         <p:spPr>
           <a:xfrm>
             <a:off x="6309360" y="4654440"/>
-            <a:ext cx="5439240" cy="1324440"/>
+            <a:ext cx="5438880" cy="1324080"/>
           </a:xfrm>
           <a:prstGeom prst="roundRect">
             <a:avLst>
@@ -3491,7 +3491,7 @@
         <p:spPr>
           <a:xfrm>
             <a:off x="6309360" y="4654440"/>
-            <a:ext cx="5439240" cy="108360"/>
+            <a:ext cx="5438880" cy="108000"/>
           </a:xfrm>
           <a:prstGeom prst="rect">
             <a:avLst/>
@@ -3540,7 +3540,7 @@
         <p:spPr>
           <a:xfrm>
             <a:off x="6473880" y="4818960"/>
-            <a:ext cx="5110200" cy="254520"/>
+            <a:ext cx="5109840" cy="254160"/>
           </a:xfrm>
           <a:prstGeom prst="rect">
             <a:avLst/>
@@ -3597,7 +3597,7 @@
         <p:spPr>
           <a:xfrm>
             <a:off x="6583680" y="5184720"/>
-            <a:ext cx="5000400" cy="721080"/>
+            <a:ext cx="5000040" cy="720720"/>
           </a:xfrm>
           <a:prstGeom prst="rect">
             <a:avLst/>
@@ -3697,7 +3697,7 @@
         <p:spPr>
           <a:xfrm>
             <a:off x="438840" y="6336720"/>
-            <a:ext cx="11309760" cy="272880"/>
+            <a:ext cx="11309400" cy="272520"/>
           </a:xfrm>
           <a:prstGeom prst="rect">
             <a:avLst/>
@@ -3746,7 +3746,7 @@
         <p:spPr>
           <a:xfrm>
             <a:off x="567000" y="6364080"/>
-            <a:ext cx="10879920" cy="199800"/>
+            <a:ext cx="10879560" cy="199440"/>
           </a:xfrm>
           <a:prstGeom prst="rect">
             <a:avLst/>
@@ -3832,13 +3832,12 @@
         </p:nvPicPr>
         <p:blipFill>
           <a:blip r:embed="rId1"/>
-          <a:srcRect l="0" t="10499" r="0" b="0"/>
           <a:stretch/>
         </p:blipFill>
         <p:spPr>
           <a:xfrm>
-            <a:off x="1429920" y="1080000"/>
-            <a:ext cx="9550080" cy="4962600"/>
+            <a:off x="1260000" y="344160"/>
+            <a:ext cx="9950040" cy="5596560"/>
           </a:xfrm>
           <a:prstGeom prst="rect">
             <a:avLst/>
@@ -3857,7 +3856,7 @@
         <p:spPr>
           <a:xfrm>
             <a:off x="0" y="0"/>
-            <a:ext cx="12190320" cy="675360"/>
+            <a:ext cx="12189960" cy="675000"/>
           </a:xfrm>
           <a:prstGeom prst="rect">
             <a:avLst/>
@@ -3906,7 +3905,7 @@
         <p:spPr>
           <a:xfrm>
             <a:off x="384120" y="128160"/>
-            <a:ext cx="7953840" cy="401040"/>
+            <a:ext cx="7953480" cy="400680"/>
           </a:xfrm>
           <a:prstGeom prst="rect">
             <a:avLst/>
@@ -3963,7 +3962,7 @@
         <p:spPr>
           <a:xfrm>
             <a:off x="9875520" y="191880"/>
-            <a:ext cx="1918800" cy="254520"/>
+            <a:ext cx="1918440" cy="254160"/>
           </a:xfrm>
           <a:prstGeom prst="rect">
             <a:avLst/>
@@ -4007,7 +4006,7 @@
         <p:spPr>
           <a:xfrm>
             <a:off x="438840" y="6336720"/>
-            <a:ext cx="11309400" cy="272520"/>
+            <a:ext cx="11309040" cy="272160"/>
           </a:xfrm>
           <a:prstGeom prst="rect">
             <a:avLst/>
@@ -4056,7 +4055,7 @@
         <p:spPr>
           <a:xfrm>
             <a:off x="567000" y="6364080"/>
-            <a:ext cx="10879560" cy="199440"/>
+            <a:ext cx="10879200" cy="199080"/>
           </a:xfrm>
           <a:prstGeom prst="rect">
             <a:avLst/>
@@ -4100,7 +4099,7 @@
         <p:spPr>
           <a:xfrm>
             <a:off x="2557440" y="6336720"/>
-            <a:ext cx="6801840" cy="253080"/>
+            <a:ext cx="6801480" cy="252720"/>
           </a:xfrm>
           <a:prstGeom prst="rect">
             <a:avLst/>
@@ -4137,6 +4136,53 @@
               <a:t>Lower effort is not automatically better learning: lower GCL may indicate less deep processing.</a:t>
             </a:r>
             <a:endParaRPr b="0" lang="de-AT" sz="1150" spc="-1" strike="noStrike">
+              <a:solidFill>
+                <a:srgbClr val="000000"/>
+              </a:solidFill>
+              <a:latin typeface="Arial"/>
+            </a:endParaRPr>
+          </a:p>
+        </p:txBody>
+      </p:sp>
+      <p:sp>
+        <p:nvSpPr>
+          <p:cNvPr id="49" name=""/>
+          <p:cNvSpPr/>
+          <p:nvPr/>
+        </p:nvSpPr>
+        <p:spPr>
+          <a:xfrm>
+            <a:off x="1260000" y="720000"/>
+            <a:ext cx="4140000" cy="360000"/>
+          </a:xfrm>
+          <a:prstGeom prst="rect">
+            <a:avLst/>
+          </a:prstGeom>
+          <a:solidFill>
+            <a:schemeClr val="lt1">
+              <a:lumOff val="0"/>
+            </a:schemeClr>
+          </a:solidFill>
+          <a:ln w="0">
+            <a:solidFill>
+              <a:schemeClr val="lt1">
+                <a:lumOff val="0"/>
+              </a:schemeClr>
+            </a:solidFill>
+          </a:ln>
+        </p:spPr>
+        <p:style>
+          <a:lnRef idx="0"/>
+          <a:fillRef idx="0"/>
+          <a:effectRef idx="0"/>
+          <a:fontRef idx="minor"/>
+        </p:style>
+        <p:txBody>
+          <a:bodyPr lIns="90000" rIns="90000" tIns="45000" bIns="45000" anchor="ctr">
+            <a:noAutofit/>
+          </a:bodyPr>
+          <a:p>
+            <a:endParaRPr b="0" lang="de-AT" sz="1800" spc="-1" strike="noStrike">
               <a:solidFill>
                 <a:srgbClr val="000000"/>
               </a:solidFill>
@@ -4159,7 +4205,7 @@
 </file>
 
 <file path=ppt/slides/slide3.xml><?xml version="1.0" encoding="utf-8"?>
-<p:sld xmlns:a="http://schemas.openxmlformats.org/drawingml/2006/main" xmlns:p="http://schemas.openxmlformats.org/presentationml/2006/main" xmlns:r="http://schemas.openxmlformats.org/officeDocument/2006/relationships" xmlns:p14="http://schemas.microsoft.com/office/powerpoint/2010/main" xmlns:p15="http://schemas.microsoft.com/office/powerpoint/2012/main" xmlns:mc="http://schemas.openxmlformats.org/markup-compatibility/2006">
+<p:sld xmlns:a="http://schemas.openxmlformats.org/drawingml/2006/main" xmlns:p="http://schemas.openxmlformats.org/presentationml/2006/main" xmlns:r="http://schemas.openxmlformats.org/officeDocument/2006/relationships" xmlns:p14="http://schemas.microsoft.com/office/powerpoint/2010/main" xmlns:p15="http://schemas.microsoft.com/office/powerpoint/2012/main" xmlns:mc="http://schemas.openxmlformats.org/markup-compatibility/2006" show="0">
   <p:cSld>
     <p:bg>
       <p:bgPr>
@@ -4184,14 +4230,14 @@
       </p:grpSpPr>
       <p:sp>
         <p:nvSpPr>
-          <p:cNvPr id="49" name="Shape 42"/>
+          <p:cNvPr id="50" name="Shape 42"/>
           <p:cNvSpPr/>
           <p:nvPr/>
         </p:nvSpPr>
         <p:spPr>
           <a:xfrm>
             <a:off x="0" y="0"/>
-            <a:ext cx="12189960" cy="675000"/>
+            <a:ext cx="12189600" cy="674640"/>
           </a:xfrm>
           <a:prstGeom prst="rect">
             <a:avLst/>
@@ -4233,14 +4279,14 @@
       </p:sp>
       <p:sp>
         <p:nvSpPr>
-          <p:cNvPr id="50" name="Text 9"/>
+          <p:cNvPr id="51" name="Text 9"/>
           <p:cNvSpPr/>
           <p:nvPr/>
         </p:nvSpPr>
         <p:spPr>
           <a:xfrm>
             <a:off x="384120" y="128160"/>
-            <a:ext cx="7953480" cy="400680"/>
+            <a:ext cx="7953120" cy="400320"/>
           </a:xfrm>
           <a:prstGeom prst="rect">
             <a:avLst/>
@@ -4290,14 +4336,14 @@
       </p:sp>
       <p:sp>
         <p:nvSpPr>
-          <p:cNvPr id="51" name="Text 13"/>
+          <p:cNvPr id="52" name="Text 13"/>
           <p:cNvSpPr/>
           <p:nvPr/>
         </p:nvSpPr>
         <p:spPr>
           <a:xfrm>
             <a:off x="384120" y="804600"/>
-            <a:ext cx="11245320" cy="382320"/>
+            <a:ext cx="11244960" cy="381960"/>
           </a:xfrm>
           <a:prstGeom prst="rect">
             <a:avLst/>
@@ -4347,14 +4393,14 @@
       </p:sp>
       <p:sp>
         <p:nvSpPr>
-          <p:cNvPr id="52" name="Shape 43"/>
+          <p:cNvPr id="53" name="Shape 43"/>
           <p:cNvSpPr/>
           <p:nvPr/>
         </p:nvSpPr>
         <p:spPr>
           <a:xfrm>
             <a:off x="438840" y="6336720"/>
-            <a:ext cx="11309400" cy="272520"/>
+            <a:ext cx="11309040" cy="272160"/>
           </a:xfrm>
           <a:prstGeom prst="rect">
             <a:avLst/>
@@ -4396,14 +4442,14 @@
       </p:sp>
       <p:sp>
         <p:nvSpPr>
-          <p:cNvPr id="53" name="Text 17"/>
+          <p:cNvPr id="54" name="Text 17"/>
           <p:cNvSpPr/>
           <p:nvPr/>
         </p:nvSpPr>
         <p:spPr>
           <a:xfrm>
             <a:off x="567000" y="6364080"/>
-            <a:ext cx="10879560" cy="199440"/>
+            <a:ext cx="10879200" cy="199080"/>
           </a:xfrm>
           <a:prstGeom prst="rect">
             <a:avLst/>
@@ -4443,14 +4489,14 @@
       </p:sp>
       <p:sp>
         <p:nvSpPr>
-          <p:cNvPr id="54" name="Shape 46"/>
+          <p:cNvPr id="55" name="Shape 46"/>
           <p:cNvSpPr/>
           <p:nvPr/>
         </p:nvSpPr>
         <p:spPr>
           <a:xfrm>
             <a:off x="441360" y="1417320"/>
-            <a:ext cx="5438880" cy="1324080"/>
+            <a:ext cx="5438520" cy="1323720"/>
           </a:xfrm>
           <a:prstGeom prst="rect">
             <a:avLst/>
@@ -4492,14 +4538,14 @@
       </p:sp>
       <p:sp>
         <p:nvSpPr>
-          <p:cNvPr id="55" name="Shape 47"/>
+          <p:cNvPr id="56" name="Shape 47"/>
           <p:cNvSpPr/>
           <p:nvPr/>
         </p:nvSpPr>
         <p:spPr>
           <a:xfrm>
             <a:off x="441360" y="1417320"/>
-            <a:ext cx="5438880" cy="108000"/>
+            <a:ext cx="5438520" cy="107640"/>
           </a:xfrm>
           <a:prstGeom prst="rect">
             <a:avLst/>
@@ -4541,14 +4587,14 @@
       </p:sp>
       <p:sp>
         <p:nvSpPr>
-          <p:cNvPr id="56" name="Text 30"/>
+          <p:cNvPr id="57" name="Text 30"/>
           <p:cNvSpPr/>
           <p:nvPr/>
         </p:nvSpPr>
         <p:spPr>
           <a:xfrm>
             <a:off x="605880" y="1581840"/>
-            <a:ext cx="5109840" cy="254160"/>
+            <a:ext cx="5109480" cy="253800"/>
           </a:xfrm>
           <a:prstGeom prst="rect">
             <a:avLst/>
@@ -4598,14 +4644,14 @@
       </p:sp>
       <p:sp>
         <p:nvSpPr>
-          <p:cNvPr id="57" name="Text 46"/>
+          <p:cNvPr id="58" name="Text 46"/>
           <p:cNvSpPr/>
           <p:nvPr/>
         </p:nvSpPr>
         <p:spPr>
           <a:xfrm>
             <a:off x="715680" y="1947600"/>
-            <a:ext cx="5000040" cy="720720"/>
+            <a:ext cx="4999680" cy="720360"/>
           </a:xfrm>
           <a:prstGeom prst="rect">
             <a:avLst/>
@@ -4698,14 +4744,14 @@
       </p:sp>
       <p:sp>
         <p:nvSpPr>
-          <p:cNvPr id="58" name="Shape 48"/>
+          <p:cNvPr id="59" name="Shape 48"/>
           <p:cNvSpPr/>
           <p:nvPr/>
         </p:nvSpPr>
         <p:spPr>
           <a:xfrm>
             <a:off x="438840" y="3035880"/>
-            <a:ext cx="5438880" cy="1324080"/>
+            <a:ext cx="5438520" cy="1323720"/>
           </a:xfrm>
           <a:prstGeom prst="rect">
             <a:avLst/>
@@ -4747,14 +4793,14 @@
       </p:sp>
       <p:sp>
         <p:nvSpPr>
-          <p:cNvPr id="59" name="Shape 49"/>
+          <p:cNvPr id="60" name="Shape 49"/>
           <p:cNvSpPr/>
           <p:nvPr/>
         </p:nvSpPr>
         <p:spPr>
           <a:xfrm>
             <a:off x="438840" y="3035880"/>
-            <a:ext cx="5438880" cy="108000"/>
+            <a:ext cx="5438520" cy="107640"/>
           </a:xfrm>
           <a:prstGeom prst="rect">
             <a:avLst/>
@@ -4796,14 +4842,14 @@
       </p:sp>
       <p:sp>
         <p:nvSpPr>
-          <p:cNvPr id="60" name="Text 47"/>
+          <p:cNvPr id="61" name="Text 47"/>
           <p:cNvSpPr/>
           <p:nvPr/>
         </p:nvSpPr>
         <p:spPr>
           <a:xfrm>
             <a:off x="603360" y="3200400"/>
-            <a:ext cx="5109840" cy="254160"/>
+            <a:ext cx="5109480" cy="253800"/>
           </a:xfrm>
           <a:prstGeom prst="rect">
             <a:avLst/>
@@ -4853,14 +4899,14 @@
       </p:sp>
       <p:sp>
         <p:nvSpPr>
-          <p:cNvPr id="61" name="Text 48"/>
+          <p:cNvPr id="62" name="Text 48"/>
           <p:cNvSpPr/>
           <p:nvPr/>
         </p:nvSpPr>
         <p:spPr>
           <a:xfrm>
             <a:off x="713160" y="3566160"/>
-            <a:ext cx="5000040" cy="720720"/>
+            <a:ext cx="4999680" cy="720360"/>
           </a:xfrm>
           <a:prstGeom prst="rect">
             <a:avLst/>
@@ -4953,14 +4999,14 @@
       </p:sp>
       <p:sp>
         <p:nvSpPr>
-          <p:cNvPr id="62" name="Shape 50"/>
+          <p:cNvPr id="63" name="Shape 50"/>
           <p:cNvSpPr/>
           <p:nvPr/>
         </p:nvSpPr>
         <p:spPr>
           <a:xfrm>
             <a:off x="6309360" y="3035880"/>
-            <a:ext cx="5438880" cy="1324080"/>
+            <a:ext cx="5438520" cy="1323720"/>
           </a:xfrm>
           <a:prstGeom prst="rect">
             <a:avLst/>
@@ -5002,14 +5048,14 @@
       </p:sp>
       <p:sp>
         <p:nvSpPr>
-          <p:cNvPr id="63" name="Shape 51"/>
+          <p:cNvPr id="64" name="Shape 51"/>
           <p:cNvSpPr/>
           <p:nvPr/>
         </p:nvSpPr>
         <p:spPr>
           <a:xfrm>
             <a:off x="6309360" y="3035880"/>
-            <a:ext cx="5438880" cy="108000"/>
+            <a:ext cx="5438520" cy="107640"/>
           </a:xfrm>
           <a:prstGeom prst="rect">
             <a:avLst/>
@@ -5051,14 +5097,14 @@
       </p:sp>
       <p:sp>
         <p:nvSpPr>
-          <p:cNvPr id="64" name="Text 49"/>
+          <p:cNvPr id="65" name="Text 49"/>
           <p:cNvSpPr/>
           <p:nvPr/>
         </p:nvSpPr>
         <p:spPr>
           <a:xfrm>
             <a:off x="6617880" y="3272400"/>
-            <a:ext cx="5109840" cy="254160"/>
+            <a:ext cx="5109480" cy="253800"/>
           </a:xfrm>
           <a:prstGeom prst="rect">
             <a:avLst/>
@@ -5108,14 +5154,14 @@
       </p:sp>
       <p:sp>
         <p:nvSpPr>
-          <p:cNvPr id="65" name="Text 50"/>
+          <p:cNvPr id="66" name="Text 50"/>
           <p:cNvSpPr/>
           <p:nvPr/>
         </p:nvSpPr>
         <p:spPr>
           <a:xfrm>
             <a:off x="6583680" y="3566160"/>
-            <a:ext cx="5000040" cy="720720"/>
+            <a:ext cx="4999680" cy="720360"/>
           </a:xfrm>
           <a:prstGeom prst="rect">
             <a:avLst/>
@@ -5211,14 +5257,14 @@
       </p:sp>
       <p:sp>
         <p:nvSpPr>
-          <p:cNvPr id="66" name="Shape 52"/>
+          <p:cNvPr id="67" name="Shape 52"/>
           <p:cNvSpPr/>
           <p:nvPr/>
         </p:nvSpPr>
         <p:spPr>
           <a:xfrm>
             <a:off x="438840" y="4654440"/>
-            <a:ext cx="5438880" cy="1324080"/>
+            <a:ext cx="5438520" cy="1323720"/>
           </a:xfrm>
           <a:prstGeom prst="rect">
             <a:avLst/>
@@ -5260,14 +5306,14 @@
       </p:sp>
       <p:sp>
         <p:nvSpPr>
-          <p:cNvPr id="67" name="Shape 53"/>
+          <p:cNvPr id="68" name="Shape 53"/>
           <p:cNvSpPr/>
           <p:nvPr/>
         </p:nvSpPr>
         <p:spPr>
           <a:xfrm>
             <a:off x="438840" y="4654440"/>
-            <a:ext cx="5438880" cy="108000"/>
+            <a:ext cx="5438520" cy="107640"/>
           </a:xfrm>
           <a:prstGeom prst="rect">
             <a:avLst/>
@@ -5309,14 +5355,14 @@
       </p:sp>
       <p:sp>
         <p:nvSpPr>
-          <p:cNvPr id="68" name="Text 51"/>
+          <p:cNvPr id="69" name="Text 51"/>
           <p:cNvSpPr/>
           <p:nvPr/>
         </p:nvSpPr>
         <p:spPr>
           <a:xfrm>
             <a:off x="603360" y="4818960"/>
-            <a:ext cx="5109840" cy="254160"/>
+            <a:ext cx="5109480" cy="253800"/>
           </a:xfrm>
           <a:prstGeom prst="rect">
             <a:avLst/>
@@ -5366,14 +5412,14 @@
       </p:sp>
       <p:sp>
         <p:nvSpPr>
-          <p:cNvPr id="69" name="Text 52"/>
+          <p:cNvPr id="70" name="Text 52"/>
           <p:cNvSpPr/>
           <p:nvPr/>
         </p:nvSpPr>
         <p:spPr>
           <a:xfrm>
             <a:off x="713160" y="5184720"/>
-            <a:ext cx="5000040" cy="720720"/>
+            <a:ext cx="4999680" cy="720360"/>
           </a:xfrm>
           <a:prstGeom prst="rect">
             <a:avLst/>
@@ -5466,14 +5512,14 @@
       </p:sp>
       <p:sp>
         <p:nvSpPr>
-          <p:cNvPr id="70" name="Shape 54"/>
+          <p:cNvPr id="71" name="Shape 54"/>
           <p:cNvSpPr/>
           <p:nvPr/>
         </p:nvSpPr>
         <p:spPr>
           <a:xfrm>
             <a:off x="6309360" y="4654440"/>
-            <a:ext cx="5438880" cy="1324080"/>
+            <a:ext cx="5438520" cy="1323720"/>
           </a:xfrm>
           <a:prstGeom prst="rect">
             <a:avLst/>
@@ -5515,14 +5561,14 @@
       </p:sp>
       <p:sp>
         <p:nvSpPr>
-          <p:cNvPr id="71" name="Shape 55"/>
+          <p:cNvPr id="72" name="Shape 55"/>
           <p:cNvSpPr/>
           <p:nvPr/>
         </p:nvSpPr>
         <p:spPr>
           <a:xfrm>
             <a:off x="6309360" y="4654440"/>
-            <a:ext cx="5438880" cy="108000"/>
+            <a:ext cx="5438520" cy="107640"/>
           </a:xfrm>
           <a:prstGeom prst="rect">
             <a:avLst/>
@@ -5564,14 +5610,14 @@
       </p:sp>
       <p:sp>
         <p:nvSpPr>
-          <p:cNvPr id="72" name="Text 53"/>
+          <p:cNvPr id="73" name="Text 53"/>
           <p:cNvSpPr/>
           <p:nvPr/>
         </p:nvSpPr>
         <p:spPr>
           <a:xfrm>
             <a:off x="6473880" y="4818960"/>
-            <a:ext cx="5109840" cy="254160"/>
+            <a:ext cx="5109480" cy="253800"/>
           </a:xfrm>
           <a:prstGeom prst="rect">
             <a:avLst/>
@@ -5621,14 +5667,14 @@
       </p:sp>
       <p:sp>
         <p:nvSpPr>
-          <p:cNvPr id="73" name="Text 54"/>
+          <p:cNvPr id="74" name="Text 54"/>
           <p:cNvSpPr/>
           <p:nvPr/>
         </p:nvSpPr>
         <p:spPr>
           <a:xfrm>
             <a:off x="6583680" y="5184720"/>
-            <a:ext cx="5000040" cy="720720"/>
+            <a:ext cx="4999680" cy="720360"/>
           </a:xfrm>
           <a:prstGeom prst="rect">
             <a:avLst/>
@@ -5721,14 +5767,14 @@
       </p:sp>
       <p:sp>
         <p:nvSpPr>
-          <p:cNvPr id="74" name="Shape 1"/>
+          <p:cNvPr id="75" name="Shape 1"/>
           <p:cNvSpPr/>
           <p:nvPr/>
         </p:nvSpPr>
         <p:spPr>
           <a:xfrm>
             <a:off x="6345360" y="1415880"/>
-            <a:ext cx="5438880" cy="1324080"/>
+            <a:ext cx="5438520" cy="1323720"/>
           </a:xfrm>
           <a:prstGeom prst="rect">
             <a:avLst/>
@@ -5770,14 +5816,14 @@
       </p:sp>
       <p:sp>
         <p:nvSpPr>
-          <p:cNvPr id="75" name="Shape 2"/>
+          <p:cNvPr id="76" name="Shape 2"/>
           <p:cNvSpPr/>
           <p:nvPr/>
         </p:nvSpPr>
         <p:spPr>
           <a:xfrm>
             <a:off x="6345360" y="1415880"/>
-            <a:ext cx="5438880" cy="108000"/>
+            <a:ext cx="5438520" cy="107640"/>
           </a:xfrm>
           <a:prstGeom prst="rect">
             <a:avLst/>
@@ -5819,14 +5865,14 @@
       </p:sp>
       <p:sp>
         <p:nvSpPr>
-          <p:cNvPr id="76" name="Text 4"/>
+          <p:cNvPr id="77" name="Text 4"/>
           <p:cNvSpPr/>
           <p:nvPr/>
         </p:nvSpPr>
         <p:spPr>
           <a:xfrm>
             <a:off x="6509880" y="1580400"/>
-            <a:ext cx="5109840" cy="254160"/>
+            <a:ext cx="5109480" cy="253800"/>
           </a:xfrm>
           <a:prstGeom prst="rect">
             <a:avLst/>
@@ -5876,14 +5922,14 @@
       </p:sp>
       <p:sp>
         <p:nvSpPr>
-          <p:cNvPr id="77" name="Text 5"/>
+          <p:cNvPr id="78" name="Text 5"/>
           <p:cNvSpPr/>
           <p:nvPr/>
         </p:nvSpPr>
         <p:spPr>
           <a:xfrm>
             <a:off x="6619680" y="1946160"/>
-            <a:ext cx="5000040" cy="720720"/>
+            <a:ext cx="4999680" cy="720360"/>
           </a:xfrm>
           <a:prstGeom prst="rect">
             <a:avLst/>
@@ -5976,14 +6022,14 @@
       </p:sp>
       <p:sp>
         <p:nvSpPr>
-          <p:cNvPr id="78" name=""/>
+          <p:cNvPr id="79" name=""/>
           <p:cNvSpPr/>
           <p:nvPr/>
         </p:nvSpPr>
         <p:spPr>
           <a:xfrm>
             <a:off x="2557440" y="6336720"/>
-            <a:ext cx="6801840" cy="253080"/>
+            <a:ext cx="6801480" cy="252720"/>
           </a:xfrm>
           <a:prstGeom prst="rect">
             <a:avLst/>
